--- a/docs/content/05-teaching-resources/slides/digital-support/05-end-user-support-and-troubleshooting.pptx
+++ b/docs/content/05-teaching-resources/slides/digital-support/05-end-user-support-and-troubleshooting.pptx
@@ -10,11 +10,17 @@
     <p:sldId id="258" r:id="rId9"/>
     <p:sldId id="259" r:id="rId10"/>
     <p:sldId id="260" r:id="rId11"/>
-    <p:sldId id="261" r:id="rId12"/>
-    <p:sldId id="262" r:id="rId13"/>
+    <p:sldId id="261" r:id="rId13"/>
+    <p:sldId id="262" r:id="rId14"/>
     <p:sldId id="263" r:id="rId15"/>
     <p:sldId id="264" r:id="rId16"/>
     <p:sldId id="265" r:id="rId17"/>
+    <p:sldId id="266" r:id="rId18"/>
+    <p:sldId id="267" r:id="rId19"/>
+    <p:sldId id="268" r:id="rId20"/>
+    <p:sldId id="269" r:id="rId21"/>
+    <p:sldId id="270" r:id="rId22"/>
+    <p:sldId id="271" r:id="rId23"/>
   </p:sldIdLst>
   <p:sldSz cx="12191695" cy="6858000" type="screen4x3"/>
   <p:notesSz cx="6858000" cy="9144000"/>
@@ -511,7 +517,22 @@
           <a:lstStyle/>
           <a:p>
             <a:r>
-              <a:t>Give students a few minutes to answer on mini whiteboards or paper, then reveal the answers on the next slide.</a:t>
+              <a:t>Answers:</a:t>
+            </a:r>
+          </a:p>
+          <a:p>
+            <a:r>
+              <a:t>1. Any two: incident/request, knowledge, change, configuration/asset management.</a:t>
+            </a:r>
+          </a:p>
+          <a:p>
+            <a:r>
+              <a:t>2. To see trends, share fixes and prove service levels.</a:t>
+            </a:r>
+          </a:p>
+          <a:p>
+            <a:r>
+              <a:t>3. Licences, hardware, software requests and decommissioning.</a:t>
             </a:r>
           </a:p>
         </p:txBody>
@@ -581,7 +602,22 @@
           <a:lstStyle/>
           <a:p>
             <a:r>
-              <a:t>Talk through any answers the class found difficult.</a:t>
+              <a:t>Answers:</a:t>
+            </a:r>
+          </a:p>
+          <a:p>
+            <a:r>
+              <a:t>1. Gather information.</a:t>
+            </a:r>
+          </a:p>
+          <a:p>
+            <a:r>
+              <a:t>2. So you know which change fixed it.</a:t>
+            </a:r>
+          </a:p>
+          <a:p>
+            <a:r>
+              <a:t>3. So the team can solve it faster next time.</a:t>
             </a:r>
           </a:p>
         </p:txBody>
@@ -651,7 +687,22 @@
           <a:lstStyle/>
           <a:p>
             <a:r>
-              <a:t>Fault card ideas: caps lock on, disconnected network cable, full mailbox, expired password, printer offline.</a:t>
+              <a:t>Answers:</a:t>
+            </a:r>
+          </a:p>
+          <a:p>
+            <a:r>
+              <a:t>1. Common, routine issues.</a:t>
+            </a:r>
+          </a:p>
+          <a:p>
+            <a:r>
+              <a:t>2. When it's beyond the current line's skills or access.</a:t>
+            </a:r>
+          </a:p>
+          <a:p>
+            <a:r>
+              <a:t>3. To stop former staff accessing systems.</a:t>
             </a:r>
           </a:p>
         </p:txBody>
@@ -677,6 +728,216 @@
 </file>
 
 <file path=ppt/notesSlides/notesSlide4.xml><?xml version="1.0" encoding="utf-8"?>
+<p:notes xmlns:a="http://schemas.openxmlformats.org/drawingml/2006/main" xmlns:p="http://schemas.openxmlformats.org/presentationml/2006/main" xmlns:r="http://schemas.openxmlformats.org/officeDocument/2006/relationships">
+  <p:cSld>
+    <p:spTree>
+      <p:nvGrpSpPr>
+        <p:cNvPr id="1" name=""/>
+        <p:cNvGrpSpPr/>
+        <p:nvPr/>
+      </p:nvGrpSpPr>
+      <p:grpSpPr>
+        <a:xfrm>
+          <a:off x="0" y="0"/>
+          <a:ext cx="0" cy="0"/>
+          <a:chOff x="0" y="0"/>
+          <a:chExt cx="0" cy="0"/>
+        </a:xfrm>
+      </p:grpSpPr>
+      <p:sp>
+        <p:nvSpPr>
+          <p:cNvPr id="2" name="Slide Image Placeholder 1"/>
+          <p:cNvSpPr>
+            <a:spLocks noGrp="1"/>
+          </p:cNvSpPr>
+          <p:nvPr>
+            <p:ph type="sldImg" idx="2"/>
+          </p:nvPr>
+        </p:nvSpPr>
+        <p:spPr/>
+      </p:sp>
+      <p:sp>
+        <p:nvSpPr>
+          <p:cNvPr id="3" name="Notes Placeholder 2"/>
+          <p:cNvSpPr>
+            <a:spLocks noGrp="1"/>
+          </p:cNvSpPr>
+          <p:nvPr>
+            <p:ph type="body" idx="3" sz="quarter"/>
+          </p:nvPr>
+        </p:nvSpPr>
+        <p:spPr/>
+        <p:txBody>
+          <a:bodyPr/>
+          <a:lstStyle/>
+          <a:p>
+            <a:r>
+              <a:t>Give students a few minutes to answer on mini whiteboards or paper, then reveal the answers on the next slide.</a:t>
+            </a:r>
+          </a:p>
+        </p:txBody>
+      </p:sp>
+      <p:sp>
+        <p:nvSpPr>
+          <p:cNvPr id="4" name="Slide Number Placeholder 3"/>
+          <p:cNvSpPr>
+            <a:spLocks noGrp="1"/>
+          </p:cNvSpPr>
+          <p:nvPr>
+            <p:ph type="sldNum" idx="5" sz="quarter"/>
+          </p:nvPr>
+        </p:nvSpPr>
+        <p:spPr/>
+      </p:sp>
+    </p:spTree>
+  </p:cSld>
+  <p:clrMapOvr>
+    <a:masterClrMapping/>
+  </p:clrMapOvr>
+</p:notes>
+</file>
+
+<file path=ppt/notesSlides/notesSlide5.xml><?xml version="1.0" encoding="utf-8"?>
+<p:notes xmlns:a="http://schemas.openxmlformats.org/drawingml/2006/main" xmlns:p="http://schemas.openxmlformats.org/presentationml/2006/main" xmlns:r="http://schemas.openxmlformats.org/officeDocument/2006/relationships">
+  <p:cSld>
+    <p:spTree>
+      <p:nvGrpSpPr>
+        <p:cNvPr id="1" name=""/>
+        <p:cNvGrpSpPr/>
+        <p:nvPr/>
+      </p:nvGrpSpPr>
+      <p:grpSpPr>
+        <a:xfrm>
+          <a:off x="0" y="0"/>
+          <a:ext cx="0" cy="0"/>
+          <a:chOff x="0" y="0"/>
+          <a:chExt cx="0" cy="0"/>
+        </a:xfrm>
+      </p:grpSpPr>
+      <p:sp>
+        <p:nvSpPr>
+          <p:cNvPr id="2" name="Slide Image Placeholder 1"/>
+          <p:cNvSpPr>
+            <a:spLocks noGrp="1"/>
+          </p:cNvSpPr>
+          <p:nvPr>
+            <p:ph type="sldImg" idx="2"/>
+          </p:nvPr>
+        </p:nvSpPr>
+        <p:spPr/>
+      </p:sp>
+      <p:sp>
+        <p:nvSpPr>
+          <p:cNvPr id="3" name="Notes Placeholder 2"/>
+          <p:cNvSpPr>
+            <a:spLocks noGrp="1"/>
+          </p:cNvSpPr>
+          <p:nvPr>
+            <p:ph type="body" idx="3" sz="quarter"/>
+          </p:nvPr>
+        </p:nvSpPr>
+        <p:spPr/>
+        <p:txBody>
+          <a:bodyPr/>
+          <a:lstStyle/>
+          <a:p>
+            <a:r>
+              <a:t>Talk through any answers the class found difficult.</a:t>
+            </a:r>
+          </a:p>
+        </p:txBody>
+      </p:sp>
+      <p:sp>
+        <p:nvSpPr>
+          <p:cNvPr id="4" name="Slide Number Placeholder 3"/>
+          <p:cNvSpPr>
+            <a:spLocks noGrp="1"/>
+          </p:cNvSpPr>
+          <p:nvPr>
+            <p:ph type="sldNum" idx="5" sz="quarter"/>
+          </p:nvPr>
+        </p:nvSpPr>
+        <p:spPr/>
+      </p:sp>
+    </p:spTree>
+  </p:cSld>
+  <p:clrMapOvr>
+    <a:masterClrMapping/>
+  </p:clrMapOvr>
+</p:notes>
+</file>
+
+<file path=ppt/notesSlides/notesSlide6.xml><?xml version="1.0" encoding="utf-8"?>
+<p:notes xmlns:a="http://schemas.openxmlformats.org/drawingml/2006/main" xmlns:p="http://schemas.openxmlformats.org/presentationml/2006/main" xmlns:r="http://schemas.openxmlformats.org/officeDocument/2006/relationships">
+  <p:cSld>
+    <p:spTree>
+      <p:nvGrpSpPr>
+        <p:cNvPr id="1" name=""/>
+        <p:cNvGrpSpPr/>
+        <p:nvPr/>
+      </p:nvGrpSpPr>
+      <p:grpSpPr>
+        <a:xfrm>
+          <a:off x="0" y="0"/>
+          <a:ext cx="0" cy="0"/>
+          <a:chOff x="0" y="0"/>
+          <a:chExt cx="0" cy="0"/>
+        </a:xfrm>
+      </p:grpSpPr>
+      <p:sp>
+        <p:nvSpPr>
+          <p:cNvPr id="2" name="Slide Image Placeholder 1"/>
+          <p:cNvSpPr>
+            <a:spLocks noGrp="1"/>
+          </p:cNvSpPr>
+          <p:nvPr>
+            <p:ph type="sldImg" idx="2"/>
+          </p:nvPr>
+        </p:nvSpPr>
+        <p:spPr/>
+      </p:sp>
+      <p:sp>
+        <p:nvSpPr>
+          <p:cNvPr id="3" name="Notes Placeholder 2"/>
+          <p:cNvSpPr>
+            <a:spLocks noGrp="1"/>
+          </p:cNvSpPr>
+          <p:nvPr>
+            <p:ph type="body" idx="3" sz="quarter"/>
+          </p:nvPr>
+        </p:nvSpPr>
+        <p:spPr/>
+        <p:txBody>
+          <a:bodyPr/>
+          <a:lstStyle/>
+          <a:p>
+            <a:r>
+              <a:t>Fault card ideas: caps lock on, disconnected network cable, full mailbox, expired password, printer offline.</a:t>
+            </a:r>
+          </a:p>
+        </p:txBody>
+      </p:sp>
+      <p:sp>
+        <p:nvSpPr>
+          <p:cNvPr id="4" name="Slide Number Placeholder 3"/>
+          <p:cNvSpPr>
+            <a:spLocks noGrp="1"/>
+          </p:cNvSpPr>
+          <p:nvPr>
+            <p:ph type="sldNum" idx="5" sz="quarter"/>
+          </p:nvPr>
+        </p:nvSpPr>
+        <p:spPr/>
+      </p:sp>
+    </p:spTree>
+  </p:cSld>
+  <p:clrMapOvr>
+    <a:masterClrMapping/>
+  </p:clrMapOvr>
+</p:notes>
+</file>
+
+<file path=ppt/notesSlides/notesSlide7.xml><?xml version="1.0" encoding="utf-8"?>
 <p:notes xmlns:a="http://schemas.openxmlformats.org/drawingml/2006/main" xmlns:p="http://schemas.openxmlformats.org/presentationml/2006/main" xmlns:r="http://schemas.openxmlformats.org/officeDocument/2006/relationships">
   <p:cSld>
     <p:spTree>
@@ -4052,6 +4313,3863 @@
     <p:bg>
       <p:bgPr>
         <a:solidFill>
+          <a:srgbClr val="FFFFFF"/>
+        </a:solidFill>
+        <a:effectLst/>
+      </p:bgPr>
+    </p:bg>
+    <p:spTree>
+      <p:nvGrpSpPr>
+        <p:cNvPr id="1" name=""/>
+        <p:cNvGrpSpPr/>
+        <p:nvPr/>
+      </p:nvGrpSpPr>
+      <p:grpSpPr/>
+      <p:sp>
+        <p:nvSpPr>
+          <p:cNvPr id="2" name="TextBox 1"/>
+          <p:cNvSpPr txBox="1"/>
+          <p:nvPr/>
+        </p:nvSpPr>
+        <p:spPr>
+          <a:xfrm>
+            <a:off x="548640" y="320040"/>
+            <a:ext cx="11094415" cy="274320"/>
+          </a:xfrm>
+          <a:prstGeom prst="rect">
+            <a:avLst/>
+          </a:prstGeom>
+          <a:noFill/>
+        </p:spPr>
+        <p:txBody>
+          <a:bodyPr wrap="square" anchor="t" lIns="0" rIns="0" tIns="0" bIns="0"/>
+          <a:lstStyle/>
+          <a:p>
+            <a:pPr algn="l"/>
+            <a:r>
+              <a:rPr sz="1100" b="1" i="0">
+                <a:solidFill>
+                  <a:srgbClr val="54595D"/>
+                </a:solidFill>
+                <a:latin typeface="Calibri"/>
+              </a:rPr>
+              <a:t>DIGITAL SUPPORT  ·  Digital Support Content Area 2</a:t>
+            </a:r>
+          </a:p>
+        </p:txBody>
+      </p:sp>
+      <p:sp>
+        <p:nvSpPr>
+          <p:cNvPr id="3" name="TextBox 2"/>
+          <p:cNvSpPr txBox="1"/>
+          <p:nvPr/>
+        </p:nvSpPr>
+        <p:spPr>
+          <a:xfrm>
+            <a:off x="548640" y="566928"/>
+            <a:ext cx="11094415" cy="822960"/>
+          </a:xfrm>
+          <a:prstGeom prst="rect">
+            <a:avLst/>
+          </a:prstGeom>
+          <a:noFill/>
+        </p:spPr>
+        <p:txBody>
+          <a:bodyPr wrap="square" anchor="ctr" lIns="0" rIns="0" tIns="0" bIns="0"/>
+          <a:lstStyle/>
+          <a:p>
+            <a:pPr algn="l"/>
+            <a:r>
+              <a:rPr sz="3200" b="1" i="0">
+                <a:solidFill>
+                  <a:srgbClr val="03306E"/>
+                </a:solidFill>
+                <a:latin typeface="Cambria"/>
+              </a:rPr>
+              <a:t>Support processes</a:t>
+            </a:r>
+          </a:p>
+        </p:txBody>
+      </p:sp>
+      <p:sp>
+        <p:nvSpPr>
+          <p:cNvPr id="4" name="TextBox 3"/>
+          <p:cNvSpPr txBox="1"/>
+          <p:nvPr/>
+        </p:nvSpPr>
+        <p:spPr>
+          <a:xfrm>
+            <a:off x="548640" y="6446520"/>
+            <a:ext cx="8229600" cy="274320"/>
+          </a:xfrm>
+          <a:prstGeom prst="rect">
+            <a:avLst/>
+          </a:prstGeom>
+          <a:noFill/>
+        </p:spPr>
+        <p:txBody>
+          <a:bodyPr wrap="square" anchor="t" lIns="0" rIns="0" tIns="0" bIns="0"/>
+          <a:lstStyle/>
+          <a:p>
+            <a:pPr algn="l"/>
+            <a:r>
+              <a:rPr sz="1000" b="0" i="0">
+                <a:solidFill>
+                  <a:srgbClr val="54595D"/>
+                </a:solidFill>
+                <a:latin typeface="Calibri"/>
+              </a:rPr>
+              <a:t>Digital Support and Security T Level  ·  End-User Support and Troubleshooting</a:t>
+            </a:r>
+          </a:p>
+        </p:txBody>
+      </p:sp>
+      <p:sp>
+        <p:nvSpPr>
+          <p:cNvPr id="5" name="TextBox 4"/>
+          <p:cNvSpPr txBox="1"/>
+          <p:nvPr/>
+        </p:nvSpPr>
+        <p:spPr>
+          <a:xfrm>
+            <a:off x="10728655" y="6446520"/>
+            <a:ext cx="914400" cy="274320"/>
+          </a:xfrm>
+          <a:prstGeom prst="rect">
+            <a:avLst/>
+          </a:prstGeom>
+          <a:noFill/>
+        </p:spPr>
+        <p:txBody>
+          <a:bodyPr wrap="square" anchor="t" lIns="0" rIns="0" tIns="0" bIns="0"/>
+          <a:lstStyle/>
+          <a:p>
+            <a:pPr algn="r"/>
+            <a:r>
+              <a:rPr sz="1000" b="0" i="0">
+                <a:solidFill>
+                  <a:srgbClr val="54595D"/>
+                </a:solidFill>
+                <a:latin typeface="Calibri"/>
+              </a:rPr>
+              <a:t>10</a:t>
+            </a:r>
+          </a:p>
+        </p:txBody>
+      </p:sp>
+      <p:sp>
+        <p:nvSpPr>
+          <p:cNvPr id="6" name="Rounded Rectangle 5"/>
+          <p:cNvSpPr/>
+          <p:nvPr/>
+        </p:nvSpPr>
+        <p:spPr>
+          <a:xfrm>
+            <a:off x="548640" y="1600200"/>
+            <a:ext cx="3515258" cy="2148840"/>
+          </a:xfrm>
+          <a:prstGeom prst="roundRect">
+            <a:avLst>
+              <a:gd name="adj" fmla="val 6000"/>
+            </a:avLst>
+          </a:prstGeom>
+          <a:solidFill>
+            <a:srgbClr val="EAF3FF"/>
+          </a:solidFill>
+          <a:ln>
+            <a:noFill/>
+          </a:ln>
+          <a:effectLst/>
+        </p:spPr>
+        <p:style>
+          <a:lnRef idx="1">
+            <a:schemeClr val="accent1"/>
+          </a:lnRef>
+          <a:fillRef idx="3">
+            <a:schemeClr val="accent1"/>
+          </a:fillRef>
+          <a:effectRef idx="2">
+            <a:schemeClr val="accent1"/>
+          </a:effectRef>
+          <a:fontRef idx="minor">
+            <a:schemeClr val="lt1"/>
+          </a:fontRef>
+        </p:style>
+        <p:txBody>
+          <a:bodyPr rtlCol="0" anchor="ctr"/>
+          <a:lstStyle/>
+          <a:p/>
+        </p:txBody>
+      </p:sp>
+      <p:sp>
+        <p:nvSpPr>
+          <p:cNvPr id="7" name="Oval 6"/>
+          <p:cNvSpPr/>
+          <p:nvPr/>
+        </p:nvSpPr>
+        <p:spPr>
+          <a:xfrm>
+            <a:off x="777240" y="1828800"/>
+            <a:ext cx="457200" cy="457200"/>
+          </a:xfrm>
+          <a:prstGeom prst="ellipse">
+            <a:avLst/>
+          </a:prstGeom>
+          <a:solidFill>
+            <a:srgbClr val="4EA1FF"/>
+          </a:solidFill>
+          <a:ln>
+            <a:noFill/>
+          </a:ln>
+          <a:effectLst/>
+        </p:spPr>
+        <p:style>
+          <a:lnRef idx="1">
+            <a:schemeClr val="accent1"/>
+          </a:lnRef>
+          <a:fillRef idx="3">
+            <a:schemeClr val="accent1"/>
+          </a:fillRef>
+          <a:effectRef idx="2">
+            <a:schemeClr val="accent1"/>
+          </a:effectRef>
+          <a:fontRef idx="minor">
+            <a:schemeClr val="lt1"/>
+          </a:fontRef>
+        </p:style>
+        <p:txBody>
+          <a:bodyPr rtlCol="0" anchor="ctr" lIns="0" rIns="0" tIns="0" bIns="0"/>
+          <a:lstStyle/>
+          <a:p>
+            <a:pPr algn="ctr"/>
+            <a:r>
+              <a:rPr sz="1500" b="1">
+                <a:solidFill>
+                  <a:srgbClr val="202122"/>
+                </a:solidFill>
+                <a:latin typeface="Calibri"/>
+              </a:rPr>
+              <a:t>1</a:t>
+            </a:r>
+          </a:p>
+        </p:txBody>
+      </p:sp>
+      <p:sp>
+        <p:nvSpPr>
+          <p:cNvPr id="8" name="TextBox 7"/>
+          <p:cNvSpPr txBox="1"/>
+          <p:nvPr/>
+        </p:nvSpPr>
+        <p:spPr>
+          <a:xfrm>
+            <a:off x="1371600" y="1801368"/>
+            <a:ext cx="2509418" cy="512064"/>
+          </a:xfrm>
+          <a:prstGeom prst="rect">
+            <a:avLst/>
+          </a:prstGeom>
+          <a:noFill/>
+        </p:spPr>
+        <p:txBody>
+          <a:bodyPr wrap="square" anchor="ctr" lIns="0" rIns="0" tIns="0" bIns="0"/>
+          <a:lstStyle/>
+          <a:p>
+            <a:pPr algn="l"/>
+            <a:r>
+              <a:rPr sz="1900" b="1" i="0">
+                <a:solidFill>
+                  <a:srgbClr val="03306E"/>
+                </a:solidFill>
+                <a:latin typeface="Calibri"/>
+              </a:rPr>
+              <a:t>Accounts</a:t>
+            </a:r>
+          </a:p>
+        </p:txBody>
+      </p:sp>
+      <p:sp>
+        <p:nvSpPr>
+          <p:cNvPr id="9" name="TextBox 8"/>
+          <p:cNvSpPr txBox="1"/>
+          <p:nvPr/>
+        </p:nvSpPr>
+        <p:spPr>
+          <a:xfrm>
+            <a:off x="777240" y="2468880"/>
+            <a:ext cx="3058058" cy="1143000"/>
+          </a:xfrm>
+          <a:prstGeom prst="rect">
+            <a:avLst/>
+          </a:prstGeom>
+          <a:noFill/>
+        </p:spPr>
+        <p:txBody>
+          <a:bodyPr wrap="square" anchor="t" lIns="0" rIns="0" tIns="0" bIns="0"/>
+          <a:lstStyle/>
+          <a:p>
+            <a:pPr algn="l"/>
+            <a:r>
+              <a:rPr sz="2000" b="0" i="0">
+                <a:solidFill>
+                  <a:srgbClr val="202122"/>
+                </a:solidFill>
+                <a:latin typeface="Calibri"/>
+              </a:rPr>
+              <a:t>Add and remove users, set access hours.</a:t>
+            </a:r>
+          </a:p>
+        </p:txBody>
+      </p:sp>
+      <p:sp>
+        <p:nvSpPr>
+          <p:cNvPr id="10" name="Rounded Rectangle 9"/>
+          <p:cNvSpPr/>
+          <p:nvPr/>
+        </p:nvSpPr>
+        <p:spPr>
+          <a:xfrm>
+            <a:off x="4338218" y="1600200"/>
+            <a:ext cx="3515258" cy="2148840"/>
+          </a:xfrm>
+          <a:prstGeom prst="roundRect">
+            <a:avLst>
+              <a:gd name="adj" fmla="val 6000"/>
+            </a:avLst>
+          </a:prstGeom>
+          <a:solidFill>
+            <a:srgbClr val="EAF3FF"/>
+          </a:solidFill>
+          <a:ln>
+            <a:noFill/>
+          </a:ln>
+          <a:effectLst/>
+        </p:spPr>
+        <p:style>
+          <a:lnRef idx="1">
+            <a:schemeClr val="accent1"/>
+          </a:lnRef>
+          <a:fillRef idx="3">
+            <a:schemeClr val="accent1"/>
+          </a:fillRef>
+          <a:effectRef idx="2">
+            <a:schemeClr val="accent1"/>
+          </a:effectRef>
+          <a:fontRef idx="minor">
+            <a:schemeClr val="lt1"/>
+          </a:fontRef>
+        </p:style>
+        <p:txBody>
+          <a:bodyPr rtlCol="0" anchor="ctr"/>
+          <a:lstStyle/>
+          <a:p/>
+        </p:txBody>
+      </p:sp>
+      <p:sp>
+        <p:nvSpPr>
+          <p:cNvPr id="11" name="Oval 10"/>
+          <p:cNvSpPr/>
+          <p:nvPr/>
+        </p:nvSpPr>
+        <p:spPr>
+          <a:xfrm>
+            <a:off x="4566818" y="1828800"/>
+            <a:ext cx="457200" cy="457200"/>
+          </a:xfrm>
+          <a:prstGeom prst="ellipse">
+            <a:avLst/>
+          </a:prstGeom>
+          <a:solidFill>
+            <a:srgbClr val="4EA1FF"/>
+          </a:solidFill>
+          <a:ln>
+            <a:noFill/>
+          </a:ln>
+          <a:effectLst/>
+        </p:spPr>
+        <p:style>
+          <a:lnRef idx="1">
+            <a:schemeClr val="accent1"/>
+          </a:lnRef>
+          <a:fillRef idx="3">
+            <a:schemeClr val="accent1"/>
+          </a:fillRef>
+          <a:effectRef idx="2">
+            <a:schemeClr val="accent1"/>
+          </a:effectRef>
+          <a:fontRef idx="minor">
+            <a:schemeClr val="lt1"/>
+          </a:fontRef>
+        </p:style>
+        <p:txBody>
+          <a:bodyPr rtlCol="0" anchor="ctr" lIns="0" rIns="0" tIns="0" bIns="0"/>
+          <a:lstStyle/>
+          <a:p>
+            <a:pPr algn="ctr"/>
+            <a:r>
+              <a:rPr sz="1500" b="1">
+                <a:solidFill>
+                  <a:srgbClr val="202122"/>
+                </a:solidFill>
+                <a:latin typeface="Calibri"/>
+              </a:rPr>
+              <a:t>2</a:t>
+            </a:r>
+          </a:p>
+        </p:txBody>
+      </p:sp>
+      <p:sp>
+        <p:nvSpPr>
+          <p:cNvPr id="12" name="TextBox 11"/>
+          <p:cNvSpPr txBox="1"/>
+          <p:nvPr/>
+        </p:nvSpPr>
+        <p:spPr>
+          <a:xfrm>
+            <a:off x="5161178" y="1801368"/>
+            <a:ext cx="2509418" cy="512064"/>
+          </a:xfrm>
+          <a:prstGeom prst="rect">
+            <a:avLst/>
+          </a:prstGeom>
+          <a:noFill/>
+        </p:spPr>
+        <p:txBody>
+          <a:bodyPr wrap="square" anchor="ctr" lIns="0" rIns="0" tIns="0" bIns="0"/>
+          <a:lstStyle/>
+          <a:p>
+            <a:pPr algn="l"/>
+            <a:r>
+              <a:rPr sz="1900" b="1" i="0">
+                <a:solidFill>
+                  <a:srgbClr val="03306E"/>
+                </a:solidFill>
+                <a:latin typeface="Calibri"/>
+              </a:rPr>
+              <a:t>Passwords</a:t>
+            </a:r>
+          </a:p>
+        </p:txBody>
+      </p:sp>
+      <p:sp>
+        <p:nvSpPr>
+          <p:cNvPr id="13" name="TextBox 12"/>
+          <p:cNvSpPr txBox="1"/>
+          <p:nvPr/>
+        </p:nvSpPr>
+        <p:spPr>
+          <a:xfrm>
+            <a:off x="4566818" y="2468880"/>
+            <a:ext cx="3058058" cy="1143000"/>
+          </a:xfrm>
+          <a:prstGeom prst="rect">
+            <a:avLst/>
+          </a:prstGeom>
+          <a:noFill/>
+        </p:spPr>
+        <p:txBody>
+          <a:bodyPr wrap="square" anchor="t" lIns="0" rIns="0" tIns="0" bIns="0"/>
+          <a:lstStyle/>
+          <a:p>
+            <a:pPr algn="l"/>
+            <a:r>
+              <a:rPr sz="2000" b="0" i="0">
+                <a:solidFill>
+                  <a:srgbClr val="202122"/>
+                </a:solidFill>
+                <a:latin typeface="Calibri"/>
+              </a:rPr>
+              <a:t>Complexity, expiry, forced resets.</a:t>
+            </a:r>
+          </a:p>
+        </p:txBody>
+      </p:sp>
+      <p:sp>
+        <p:nvSpPr>
+          <p:cNvPr id="14" name="Rounded Rectangle 13"/>
+          <p:cNvSpPr/>
+          <p:nvPr/>
+        </p:nvSpPr>
+        <p:spPr>
+          <a:xfrm>
+            <a:off x="8127796" y="1600200"/>
+            <a:ext cx="3515258" cy="2148840"/>
+          </a:xfrm>
+          <a:prstGeom prst="roundRect">
+            <a:avLst>
+              <a:gd name="adj" fmla="val 6000"/>
+            </a:avLst>
+          </a:prstGeom>
+          <a:solidFill>
+            <a:srgbClr val="EAF3FF"/>
+          </a:solidFill>
+          <a:ln>
+            <a:noFill/>
+          </a:ln>
+          <a:effectLst/>
+        </p:spPr>
+        <p:style>
+          <a:lnRef idx="1">
+            <a:schemeClr val="accent1"/>
+          </a:lnRef>
+          <a:fillRef idx="3">
+            <a:schemeClr val="accent1"/>
+          </a:fillRef>
+          <a:effectRef idx="2">
+            <a:schemeClr val="accent1"/>
+          </a:effectRef>
+          <a:fontRef idx="minor">
+            <a:schemeClr val="lt1"/>
+          </a:fontRef>
+        </p:style>
+        <p:txBody>
+          <a:bodyPr rtlCol="0" anchor="ctr"/>
+          <a:lstStyle/>
+          <a:p/>
+        </p:txBody>
+      </p:sp>
+      <p:sp>
+        <p:nvSpPr>
+          <p:cNvPr id="15" name="Oval 14"/>
+          <p:cNvSpPr/>
+          <p:nvPr/>
+        </p:nvSpPr>
+        <p:spPr>
+          <a:xfrm>
+            <a:off x="8356396" y="1828800"/>
+            <a:ext cx="457200" cy="457200"/>
+          </a:xfrm>
+          <a:prstGeom prst="ellipse">
+            <a:avLst/>
+          </a:prstGeom>
+          <a:solidFill>
+            <a:srgbClr val="4EA1FF"/>
+          </a:solidFill>
+          <a:ln>
+            <a:noFill/>
+          </a:ln>
+          <a:effectLst/>
+        </p:spPr>
+        <p:style>
+          <a:lnRef idx="1">
+            <a:schemeClr val="accent1"/>
+          </a:lnRef>
+          <a:fillRef idx="3">
+            <a:schemeClr val="accent1"/>
+          </a:fillRef>
+          <a:effectRef idx="2">
+            <a:schemeClr val="accent1"/>
+          </a:effectRef>
+          <a:fontRef idx="minor">
+            <a:schemeClr val="lt1"/>
+          </a:fontRef>
+        </p:style>
+        <p:txBody>
+          <a:bodyPr rtlCol="0" anchor="ctr" lIns="0" rIns="0" tIns="0" bIns="0"/>
+          <a:lstStyle/>
+          <a:p>
+            <a:pPr algn="ctr"/>
+            <a:r>
+              <a:rPr sz="1500" b="1">
+                <a:solidFill>
+                  <a:srgbClr val="202122"/>
+                </a:solidFill>
+                <a:latin typeface="Calibri"/>
+              </a:rPr>
+              <a:t>3</a:t>
+            </a:r>
+          </a:p>
+        </p:txBody>
+      </p:sp>
+      <p:sp>
+        <p:nvSpPr>
+          <p:cNvPr id="16" name="TextBox 15"/>
+          <p:cNvSpPr txBox="1"/>
+          <p:nvPr/>
+        </p:nvSpPr>
+        <p:spPr>
+          <a:xfrm>
+            <a:off x="8950756" y="1801368"/>
+            <a:ext cx="2509418" cy="512064"/>
+          </a:xfrm>
+          <a:prstGeom prst="rect">
+            <a:avLst/>
+          </a:prstGeom>
+          <a:noFill/>
+        </p:spPr>
+        <p:txBody>
+          <a:bodyPr wrap="square" anchor="ctr" lIns="0" rIns="0" tIns="0" bIns="0"/>
+          <a:lstStyle/>
+          <a:p>
+            <a:pPr algn="l"/>
+            <a:r>
+              <a:rPr sz="1900" b="1" i="0">
+                <a:solidFill>
+                  <a:srgbClr val="03306E"/>
+                </a:solidFill>
+                <a:latin typeface="Calibri"/>
+              </a:rPr>
+              <a:t>Permissions</a:t>
+            </a:r>
+          </a:p>
+        </p:txBody>
+      </p:sp>
+      <p:sp>
+        <p:nvSpPr>
+          <p:cNvPr id="17" name="TextBox 16"/>
+          <p:cNvSpPr txBox="1"/>
+          <p:nvPr/>
+        </p:nvSpPr>
+        <p:spPr>
+          <a:xfrm>
+            <a:off x="8356396" y="2468880"/>
+            <a:ext cx="3058058" cy="1143000"/>
+          </a:xfrm>
+          <a:prstGeom prst="rect">
+            <a:avLst/>
+          </a:prstGeom>
+          <a:noFill/>
+        </p:spPr>
+        <p:txBody>
+          <a:bodyPr wrap="square" anchor="t" lIns="0" rIns="0" tIns="0" bIns="0"/>
+          <a:lstStyle/>
+          <a:p>
+            <a:pPr algn="l"/>
+            <a:r>
+              <a:rPr sz="2000" b="0" i="0">
+                <a:solidFill>
+                  <a:srgbClr val="202122"/>
+                </a:solidFill>
+                <a:latin typeface="Calibri"/>
+              </a:rPr>
+              <a:t>Resource access, group policy, shared resources.</a:t>
+            </a:r>
+          </a:p>
+        </p:txBody>
+      </p:sp>
+      <p:sp>
+        <p:nvSpPr>
+          <p:cNvPr id="18" name="Rounded Rectangle 17"/>
+          <p:cNvSpPr/>
+          <p:nvPr/>
+        </p:nvSpPr>
+        <p:spPr>
+          <a:xfrm>
+            <a:off x="548640" y="4023360"/>
+            <a:ext cx="3515258" cy="2148840"/>
+          </a:xfrm>
+          <a:prstGeom prst="roundRect">
+            <a:avLst>
+              <a:gd name="adj" fmla="val 6000"/>
+            </a:avLst>
+          </a:prstGeom>
+          <a:solidFill>
+            <a:srgbClr val="EAF3FF"/>
+          </a:solidFill>
+          <a:ln>
+            <a:noFill/>
+          </a:ln>
+          <a:effectLst/>
+        </p:spPr>
+        <p:style>
+          <a:lnRef idx="1">
+            <a:schemeClr val="accent1"/>
+          </a:lnRef>
+          <a:fillRef idx="3">
+            <a:schemeClr val="accent1"/>
+          </a:fillRef>
+          <a:effectRef idx="2">
+            <a:schemeClr val="accent1"/>
+          </a:effectRef>
+          <a:fontRef idx="minor">
+            <a:schemeClr val="lt1"/>
+          </a:fontRef>
+        </p:style>
+        <p:txBody>
+          <a:bodyPr rtlCol="0" anchor="ctr"/>
+          <a:lstStyle/>
+          <a:p/>
+        </p:txBody>
+      </p:sp>
+      <p:sp>
+        <p:nvSpPr>
+          <p:cNvPr id="19" name="Oval 18"/>
+          <p:cNvSpPr/>
+          <p:nvPr/>
+        </p:nvSpPr>
+        <p:spPr>
+          <a:xfrm>
+            <a:off x="777240" y="4251960"/>
+            <a:ext cx="457200" cy="457200"/>
+          </a:xfrm>
+          <a:prstGeom prst="ellipse">
+            <a:avLst/>
+          </a:prstGeom>
+          <a:solidFill>
+            <a:srgbClr val="4EA1FF"/>
+          </a:solidFill>
+          <a:ln>
+            <a:noFill/>
+          </a:ln>
+          <a:effectLst/>
+        </p:spPr>
+        <p:style>
+          <a:lnRef idx="1">
+            <a:schemeClr val="accent1"/>
+          </a:lnRef>
+          <a:fillRef idx="3">
+            <a:schemeClr val="accent1"/>
+          </a:fillRef>
+          <a:effectRef idx="2">
+            <a:schemeClr val="accent1"/>
+          </a:effectRef>
+          <a:fontRef idx="minor">
+            <a:schemeClr val="lt1"/>
+          </a:fontRef>
+        </p:style>
+        <p:txBody>
+          <a:bodyPr rtlCol="0" anchor="ctr" lIns="0" rIns="0" tIns="0" bIns="0"/>
+          <a:lstStyle/>
+          <a:p>
+            <a:pPr algn="ctr"/>
+            <a:r>
+              <a:rPr sz="1500" b="1">
+                <a:solidFill>
+                  <a:srgbClr val="202122"/>
+                </a:solidFill>
+                <a:latin typeface="Calibri"/>
+              </a:rPr>
+              <a:t>4</a:t>
+            </a:r>
+          </a:p>
+        </p:txBody>
+      </p:sp>
+      <p:sp>
+        <p:nvSpPr>
+          <p:cNvPr id="20" name="TextBox 19"/>
+          <p:cNvSpPr txBox="1"/>
+          <p:nvPr/>
+        </p:nvSpPr>
+        <p:spPr>
+          <a:xfrm>
+            <a:off x="1371600" y="4224528"/>
+            <a:ext cx="2509418" cy="512064"/>
+          </a:xfrm>
+          <a:prstGeom prst="rect">
+            <a:avLst/>
+          </a:prstGeom>
+          <a:noFill/>
+        </p:spPr>
+        <p:txBody>
+          <a:bodyPr wrap="square" anchor="ctr" lIns="0" rIns="0" tIns="0" bIns="0"/>
+          <a:lstStyle/>
+          <a:p>
+            <a:pPr algn="l"/>
+            <a:r>
+              <a:rPr sz="1900" b="1" i="0">
+                <a:solidFill>
+                  <a:srgbClr val="03306E"/>
+                </a:solidFill>
+                <a:latin typeface="Calibri"/>
+              </a:rPr>
+              <a:t>Software</a:t>
+            </a:r>
+          </a:p>
+        </p:txBody>
+      </p:sp>
+      <p:sp>
+        <p:nvSpPr>
+          <p:cNvPr id="21" name="TextBox 20"/>
+          <p:cNvSpPr txBox="1"/>
+          <p:nvPr/>
+        </p:nvSpPr>
+        <p:spPr>
+          <a:xfrm>
+            <a:off x="777240" y="4892040"/>
+            <a:ext cx="3058058" cy="1143000"/>
+          </a:xfrm>
+          <a:prstGeom prst="rect">
+            <a:avLst/>
+          </a:prstGeom>
+          <a:noFill/>
+        </p:spPr>
+        <p:txBody>
+          <a:bodyPr wrap="square" anchor="t" lIns="0" rIns="0" tIns="0" bIns="0"/>
+          <a:lstStyle/>
+          <a:p>
+            <a:pPr algn="l"/>
+            <a:r>
+              <a:rPr sz="2000" b="0" i="0">
+                <a:solidFill>
+                  <a:srgbClr val="202122"/>
+                </a:solidFill>
+                <a:latin typeface="Calibri"/>
+              </a:rPr>
+              <a:t>Installation and deployment, connecting to remote resources.</a:t>
+            </a:r>
+          </a:p>
+        </p:txBody>
+      </p:sp>
+      <p:sp>
+        <p:nvSpPr>
+          <p:cNvPr id="22" name="Rounded Rectangle 21"/>
+          <p:cNvSpPr/>
+          <p:nvPr/>
+        </p:nvSpPr>
+        <p:spPr>
+          <a:xfrm>
+            <a:off x="4338218" y="4023360"/>
+            <a:ext cx="3515258" cy="2148840"/>
+          </a:xfrm>
+          <a:prstGeom prst="roundRect">
+            <a:avLst>
+              <a:gd name="adj" fmla="val 6000"/>
+            </a:avLst>
+          </a:prstGeom>
+          <a:solidFill>
+            <a:srgbClr val="EAF3FF"/>
+          </a:solidFill>
+          <a:ln>
+            <a:noFill/>
+          </a:ln>
+          <a:effectLst/>
+        </p:spPr>
+        <p:style>
+          <a:lnRef idx="1">
+            <a:schemeClr val="accent1"/>
+          </a:lnRef>
+          <a:fillRef idx="3">
+            <a:schemeClr val="accent1"/>
+          </a:fillRef>
+          <a:effectRef idx="2">
+            <a:schemeClr val="accent1"/>
+          </a:effectRef>
+          <a:fontRef idx="minor">
+            <a:schemeClr val="lt1"/>
+          </a:fontRef>
+        </p:style>
+        <p:txBody>
+          <a:bodyPr rtlCol="0" anchor="ctr"/>
+          <a:lstStyle/>
+          <a:p/>
+        </p:txBody>
+      </p:sp>
+      <p:sp>
+        <p:nvSpPr>
+          <p:cNvPr id="23" name="Oval 22"/>
+          <p:cNvSpPr/>
+          <p:nvPr/>
+        </p:nvSpPr>
+        <p:spPr>
+          <a:xfrm>
+            <a:off x="4566818" y="4251960"/>
+            <a:ext cx="457200" cy="457200"/>
+          </a:xfrm>
+          <a:prstGeom prst="ellipse">
+            <a:avLst/>
+          </a:prstGeom>
+          <a:solidFill>
+            <a:srgbClr val="4EA1FF"/>
+          </a:solidFill>
+          <a:ln>
+            <a:noFill/>
+          </a:ln>
+          <a:effectLst/>
+        </p:spPr>
+        <p:style>
+          <a:lnRef idx="1">
+            <a:schemeClr val="accent1"/>
+          </a:lnRef>
+          <a:fillRef idx="3">
+            <a:schemeClr val="accent1"/>
+          </a:fillRef>
+          <a:effectRef idx="2">
+            <a:schemeClr val="accent1"/>
+          </a:effectRef>
+          <a:fontRef idx="minor">
+            <a:schemeClr val="lt1"/>
+          </a:fontRef>
+        </p:style>
+        <p:txBody>
+          <a:bodyPr rtlCol="0" anchor="ctr" lIns="0" rIns="0" tIns="0" bIns="0"/>
+          <a:lstStyle/>
+          <a:p>
+            <a:pPr algn="ctr"/>
+            <a:r>
+              <a:rPr sz="1500" b="1">
+                <a:solidFill>
+                  <a:srgbClr val="202122"/>
+                </a:solidFill>
+                <a:latin typeface="Calibri"/>
+              </a:rPr>
+              <a:t>5</a:t>
+            </a:r>
+          </a:p>
+        </p:txBody>
+      </p:sp>
+      <p:sp>
+        <p:nvSpPr>
+          <p:cNvPr id="24" name="TextBox 23"/>
+          <p:cNvSpPr txBox="1"/>
+          <p:nvPr/>
+        </p:nvSpPr>
+        <p:spPr>
+          <a:xfrm>
+            <a:off x="5161178" y="4224528"/>
+            <a:ext cx="2509418" cy="512064"/>
+          </a:xfrm>
+          <a:prstGeom prst="rect">
+            <a:avLst/>
+          </a:prstGeom>
+          <a:noFill/>
+        </p:spPr>
+        <p:txBody>
+          <a:bodyPr wrap="square" anchor="ctr" lIns="0" rIns="0" tIns="0" bIns="0"/>
+          <a:lstStyle/>
+          <a:p>
+            <a:pPr algn="l"/>
+            <a:r>
+              <a:rPr sz="1900" b="1" i="0">
+                <a:solidFill>
+                  <a:srgbClr val="03306E"/>
+                </a:solidFill>
+                <a:latin typeface="Calibri"/>
+              </a:rPr>
+              <a:t>Faults</a:t>
+            </a:r>
+          </a:p>
+        </p:txBody>
+      </p:sp>
+      <p:sp>
+        <p:nvSpPr>
+          <p:cNvPr id="25" name="TextBox 24"/>
+          <p:cNvSpPr txBox="1"/>
+          <p:nvPr/>
+        </p:nvSpPr>
+        <p:spPr>
+          <a:xfrm>
+            <a:off x="4566818" y="4892040"/>
+            <a:ext cx="3058058" cy="1143000"/>
+          </a:xfrm>
+          <a:prstGeom prst="rect">
+            <a:avLst/>
+          </a:prstGeom>
+          <a:noFill/>
+        </p:spPr>
+        <p:txBody>
+          <a:bodyPr wrap="square" anchor="t" lIns="0" rIns="0" tIns="0" bIns="0"/>
+          <a:lstStyle/>
+          <a:p>
+            <a:pPr algn="l"/>
+            <a:r>
+              <a:rPr sz="2000" b="0" i="0">
+                <a:solidFill>
+                  <a:srgbClr val="202122"/>
+                </a:solidFill>
+                <a:latin typeface="Calibri"/>
+              </a:rPr>
+              <a:t>Identify, escalate from first to third line, use known fixes.</a:t>
+            </a:r>
+          </a:p>
+        </p:txBody>
+      </p:sp>
+      <p:sp>
+        <p:nvSpPr>
+          <p:cNvPr id="26" name="Rounded Rectangle 25"/>
+          <p:cNvSpPr/>
+          <p:nvPr/>
+        </p:nvSpPr>
+        <p:spPr>
+          <a:xfrm>
+            <a:off x="8127796" y="4023360"/>
+            <a:ext cx="3515258" cy="2148840"/>
+          </a:xfrm>
+          <a:prstGeom prst="roundRect">
+            <a:avLst>
+              <a:gd name="adj" fmla="val 6000"/>
+            </a:avLst>
+          </a:prstGeom>
+          <a:solidFill>
+            <a:srgbClr val="EAF3FF"/>
+          </a:solidFill>
+          <a:ln>
+            <a:noFill/>
+          </a:ln>
+          <a:effectLst/>
+        </p:spPr>
+        <p:style>
+          <a:lnRef idx="1">
+            <a:schemeClr val="accent1"/>
+          </a:lnRef>
+          <a:fillRef idx="3">
+            <a:schemeClr val="accent1"/>
+          </a:fillRef>
+          <a:effectRef idx="2">
+            <a:schemeClr val="accent1"/>
+          </a:effectRef>
+          <a:fontRef idx="minor">
+            <a:schemeClr val="lt1"/>
+          </a:fontRef>
+        </p:style>
+        <p:txBody>
+          <a:bodyPr rtlCol="0" anchor="ctr"/>
+          <a:lstStyle/>
+          <a:p/>
+        </p:txBody>
+      </p:sp>
+      <p:sp>
+        <p:nvSpPr>
+          <p:cNvPr id="27" name="Oval 26"/>
+          <p:cNvSpPr/>
+          <p:nvPr/>
+        </p:nvSpPr>
+        <p:spPr>
+          <a:xfrm>
+            <a:off x="8356396" y="4251960"/>
+            <a:ext cx="457200" cy="457200"/>
+          </a:xfrm>
+          <a:prstGeom prst="ellipse">
+            <a:avLst/>
+          </a:prstGeom>
+          <a:solidFill>
+            <a:srgbClr val="4EA1FF"/>
+          </a:solidFill>
+          <a:ln>
+            <a:noFill/>
+          </a:ln>
+          <a:effectLst/>
+        </p:spPr>
+        <p:style>
+          <a:lnRef idx="1">
+            <a:schemeClr val="accent1"/>
+          </a:lnRef>
+          <a:fillRef idx="3">
+            <a:schemeClr val="accent1"/>
+          </a:fillRef>
+          <a:effectRef idx="2">
+            <a:schemeClr val="accent1"/>
+          </a:effectRef>
+          <a:fontRef idx="minor">
+            <a:schemeClr val="lt1"/>
+          </a:fontRef>
+        </p:style>
+        <p:txBody>
+          <a:bodyPr rtlCol="0" anchor="ctr" lIns="0" rIns="0" tIns="0" bIns="0"/>
+          <a:lstStyle/>
+          <a:p>
+            <a:pPr algn="ctr"/>
+            <a:r>
+              <a:rPr sz="1500" b="1">
+                <a:solidFill>
+                  <a:srgbClr val="202122"/>
+                </a:solidFill>
+                <a:latin typeface="Calibri"/>
+              </a:rPr>
+              <a:t>6</a:t>
+            </a:r>
+          </a:p>
+        </p:txBody>
+      </p:sp>
+      <p:sp>
+        <p:nvSpPr>
+          <p:cNvPr id="28" name="TextBox 27"/>
+          <p:cNvSpPr txBox="1"/>
+          <p:nvPr/>
+        </p:nvSpPr>
+        <p:spPr>
+          <a:xfrm>
+            <a:off x="8950756" y="4224528"/>
+            <a:ext cx="2509418" cy="512064"/>
+          </a:xfrm>
+          <a:prstGeom prst="rect">
+            <a:avLst/>
+          </a:prstGeom>
+          <a:noFill/>
+        </p:spPr>
+        <p:txBody>
+          <a:bodyPr wrap="square" anchor="ctr" lIns="0" rIns="0" tIns="0" bIns="0"/>
+          <a:lstStyle/>
+          <a:p>
+            <a:pPr algn="l"/>
+            <a:r>
+              <a:rPr sz="1900" b="1" i="0">
+                <a:solidFill>
+                  <a:srgbClr val="03306E"/>
+                </a:solidFill>
+                <a:latin typeface="Calibri"/>
+              </a:rPr>
+              <a:t>Knowledge</a:t>
+            </a:r>
+          </a:p>
+        </p:txBody>
+      </p:sp>
+      <p:sp>
+        <p:nvSpPr>
+          <p:cNvPr id="29" name="TextBox 28"/>
+          <p:cNvSpPr txBox="1"/>
+          <p:nvPr/>
+        </p:nvSpPr>
+        <p:spPr>
+          <a:xfrm>
+            <a:off x="8356396" y="4892040"/>
+            <a:ext cx="3058058" cy="1143000"/>
+          </a:xfrm>
+          <a:prstGeom prst="rect">
+            <a:avLst/>
+          </a:prstGeom>
+          <a:noFill/>
+        </p:spPr>
+        <p:txBody>
+          <a:bodyPr wrap="square" anchor="t" lIns="0" rIns="0" tIns="0" bIns="0"/>
+          <a:lstStyle/>
+          <a:p>
+            <a:pPr algn="l"/>
+            <a:r>
+              <a:rPr sz="2000" b="0" i="0">
+                <a:solidFill>
+                  <a:srgbClr val="202122"/>
+                </a:solidFill>
+                <a:latin typeface="Calibri"/>
+              </a:rPr>
+              <a:t>Documentation, SOPs, asset management and auditing.</a:t>
+            </a:r>
+          </a:p>
+        </p:txBody>
+      </p:sp>
+    </p:spTree>
+  </p:cSld>
+  <p:clrMapOvr>
+    <a:masterClrMapping/>
+  </p:clrMapOvr>
+</p:sld>
+</file>
+
+<file path=ppt/slides/slide11.xml><?xml version="1.0" encoding="utf-8"?>
+<p:sld xmlns:a="http://schemas.openxmlformats.org/drawingml/2006/main" xmlns:p="http://schemas.openxmlformats.org/presentationml/2006/main" xmlns:r="http://schemas.openxmlformats.org/officeDocument/2006/relationships">
+  <p:cSld>
+    <p:bg>
+      <p:bgPr>
+        <a:solidFill>
+          <a:srgbClr val="FFFFFF"/>
+        </a:solidFill>
+        <a:effectLst/>
+      </p:bgPr>
+    </p:bg>
+    <p:spTree>
+      <p:nvGrpSpPr>
+        <p:cNvPr id="1" name=""/>
+        <p:cNvGrpSpPr/>
+        <p:nvPr/>
+      </p:nvGrpSpPr>
+      <p:grpSpPr/>
+      <p:sp>
+        <p:nvSpPr>
+          <p:cNvPr id="2" name="TextBox 1"/>
+          <p:cNvSpPr txBox="1"/>
+          <p:nvPr/>
+        </p:nvSpPr>
+        <p:spPr>
+          <a:xfrm>
+            <a:off x="548640" y="320040"/>
+            <a:ext cx="11094415" cy="274320"/>
+          </a:xfrm>
+          <a:prstGeom prst="rect">
+            <a:avLst/>
+          </a:prstGeom>
+          <a:noFill/>
+        </p:spPr>
+        <p:txBody>
+          <a:bodyPr wrap="square" anchor="t" lIns="0" rIns="0" tIns="0" bIns="0"/>
+          <a:lstStyle/>
+          <a:p>
+            <a:pPr algn="l"/>
+            <a:r>
+              <a:rPr sz="1100" b="1" i="0">
+                <a:solidFill>
+                  <a:srgbClr val="54595D"/>
+                </a:solidFill>
+                <a:latin typeface="Calibri"/>
+              </a:rPr>
+              <a:t>DIGITAL SUPPORT  ·  Digital Support Content Area 2</a:t>
+            </a:r>
+          </a:p>
+        </p:txBody>
+      </p:sp>
+      <p:sp>
+        <p:nvSpPr>
+          <p:cNvPr id="3" name="TextBox 2"/>
+          <p:cNvSpPr txBox="1"/>
+          <p:nvPr/>
+        </p:nvSpPr>
+        <p:spPr>
+          <a:xfrm>
+            <a:off x="548640" y="566928"/>
+            <a:ext cx="11094415" cy="822960"/>
+          </a:xfrm>
+          <a:prstGeom prst="rect">
+            <a:avLst/>
+          </a:prstGeom>
+          <a:noFill/>
+        </p:spPr>
+        <p:txBody>
+          <a:bodyPr wrap="square" anchor="ctr" lIns="0" rIns="0" tIns="0" bIns="0"/>
+          <a:lstStyle/>
+          <a:p>
+            <a:pPr algn="l"/>
+            <a:r>
+              <a:rPr sz="3200" b="1" i="0">
+                <a:solidFill>
+                  <a:srgbClr val="03306E"/>
+                </a:solidFill>
+                <a:latin typeface="Cambria"/>
+              </a:rPr>
+              <a:t>Quick check: Support processes</a:t>
+            </a:r>
+          </a:p>
+        </p:txBody>
+      </p:sp>
+      <p:sp>
+        <p:nvSpPr>
+          <p:cNvPr id="4" name="TextBox 3"/>
+          <p:cNvSpPr txBox="1"/>
+          <p:nvPr/>
+        </p:nvSpPr>
+        <p:spPr>
+          <a:xfrm>
+            <a:off x="548640" y="6446520"/>
+            <a:ext cx="8229600" cy="274320"/>
+          </a:xfrm>
+          <a:prstGeom prst="rect">
+            <a:avLst/>
+          </a:prstGeom>
+          <a:noFill/>
+        </p:spPr>
+        <p:txBody>
+          <a:bodyPr wrap="square" anchor="t" lIns="0" rIns="0" tIns="0" bIns="0"/>
+          <a:lstStyle/>
+          <a:p>
+            <a:pPr algn="l"/>
+            <a:r>
+              <a:rPr sz="1000" b="0" i="0">
+                <a:solidFill>
+                  <a:srgbClr val="54595D"/>
+                </a:solidFill>
+                <a:latin typeface="Calibri"/>
+              </a:rPr>
+              <a:t>Digital Support and Security T Level  ·  End-User Support and Troubleshooting</a:t>
+            </a:r>
+          </a:p>
+        </p:txBody>
+      </p:sp>
+      <p:sp>
+        <p:nvSpPr>
+          <p:cNvPr id="5" name="TextBox 4"/>
+          <p:cNvSpPr txBox="1"/>
+          <p:nvPr/>
+        </p:nvSpPr>
+        <p:spPr>
+          <a:xfrm>
+            <a:off x="10728655" y="6446520"/>
+            <a:ext cx="914400" cy="274320"/>
+          </a:xfrm>
+          <a:prstGeom prst="rect">
+            <a:avLst/>
+          </a:prstGeom>
+          <a:noFill/>
+        </p:spPr>
+        <p:txBody>
+          <a:bodyPr wrap="square" anchor="t" lIns="0" rIns="0" tIns="0" bIns="0"/>
+          <a:lstStyle/>
+          <a:p>
+            <a:pPr algn="r"/>
+            <a:r>
+              <a:rPr sz="1000" b="0" i="0">
+                <a:solidFill>
+                  <a:srgbClr val="54595D"/>
+                </a:solidFill>
+                <a:latin typeface="Calibri"/>
+              </a:rPr>
+              <a:t>11</a:t>
+            </a:r>
+          </a:p>
+        </p:txBody>
+      </p:sp>
+      <p:sp>
+        <p:nvSpPr>
+          <p:cNvPr id="6" name="Oval 5"/>
+          <p:cNvSpPr/>
+          <p:nvPr/>
+        </p:nvSpPr>
+        <p:spPr>
+          <a:xfrm>
+            <a:off x="548640" y="1691640"/>
+            <a:ext cx="502920" cy="502920"/>
+          </a:xfrm>
+          <a:prstGeom prst="ellipse">
+            <a:avLst/>
+          </a:prstGeom>
+          <a:solidFill>
+            <a:srgbClr val="4EA1FF"/>
+          </a:solidFill>
+          <a:ln>
+            <a:noFill/>
+          </a:ln>
+          <a:effectLst/>
+        </p:spPr>
+        <p:style>
+          <a:lnRef idx="1">
+            <a:schemeClr val="accent1"/>
+          </a:lnRef>
+          <a:fillRef idx="3">
+            <a:schemeClr val="accent1"/>
+          </a:fillRef>
+          <a:effectRef idx="2">
+            <a:schemeClr val="accent1"/>
+          </a:effectRef>
+          <a:fontRef idx="minor">
+            <a:schemeClr val="lt1"/>
+          </a:fontRef>
+        </p:style>
+        <p:txBody>
+          <a:bodyPr rtlCol="0" anchor="ctr" lIns="0" rIns="0" tIns="0" bIns="0"/>
+          <a:lstStyle/>
+          <a:p>
+            <a:pPr algn="ctr"/>
+            <a:r>
+              <a:rPr sz="1600" b="1">
+                <a:solidFill>
+                  <a:srgbClr val="202122"/>
+                </a:solidFill>
+                <a:latin typeface="Calibri"/>
+              </a:rPr>
+              <a:t>1</a:t>
+            </a:r>
+          </a:p>
+        </p:txBody>
+      </p:sp>
+      <p:sp>
+        <p:nvSpPr>
+          <p:cNvPr id="7" name="TextBox 6"/>
+          <p:cNvSpPr txBox="1"/>
+          <p:nvPr/>
+        </p:nvSpPr>
+        <p:spPr>
+          <a:xfrm>
+            <a:off x="1371600" y="1645920"/>
+            <a:ext cx="10271455" cy="1188720"/>
+          </a:xfrm>
+          <a:prstGeom prst="rect">
+            <a:avLst/>
+          </a:prstGeom>
+          <a:noFill/>
+        </p:spPr>
+        <p:txBody>
+          <a:bodyPr wrap="square" anchor="t" lIns="0" rIns="0" tIns="0" bIns="0"/>
+          <a:lstStyle/>
+          <a:p>
+            <a:pPr algn="l"/>
+            <a:r>
+              <a:rPr sz="2400" b="0" i="0">
+                <a:solidFill>
+                  <a:srgbClr val="202122"/>
+                </a:solidFill>
+                <a:latin typeface="Calibri"/>
+              </a:rPr>
+              <a:t>What does first-line support handle?</a:t>
+            </a:r>
+          </a:p>
+        </p:txBody>
+      </p:sp>
+      <p:sp>
+        <p:nvSpPr>
+          <p:cNvPr id="8" name="Oval 7"/>
+          <p:cNvSpPr/>
+          <p:nvPr/>
+        </p:nvSpPr>
+        <p:spPr>
+          <a:xfrm>
+            <a:off x="548640" y="3108960"/>
+            <a:ext cx="502920" cy="502920"/>
+          </a:xfrm>
+          <a:prstGeom prst="ellipse">
+            <a:avLst/>
+          </a:prstGeom>
+          <a:solidFill>
+            <a:srgbClr val="4EA1FF"/>
+          </a:solidFill>
+          <a:ln>
+            <a:noFill/>
+          </a:ln>
+          <a:effectLst/>
+        </p:spPr>
+        <p:style>
+          <a:lnRef idx="1">
+            <a:schemeClr val="accent1"/>
+          </a:lnRef>
+          <a:fillRef idx="3">
+            <a:schemeClr val="accent1"/>
+          </a:fillRef>
+          <a:effectRef idx="2">
+            <a:schemeClr val="accent1"/>
+          </a:effectRef>
+          <a:fontRef idx="minor">
+            <a:schemeClr val="lt1"/>
+          </a:fontRef>
+        </p:style>
+        <p:txBody>
+          <a:bodyPr rtlCol="0" anchor="ctr" lIns="0" rIns="0" tIns="0" bIns="0"/>
+          <a:lstStyle/>
+          <a:p>
+            <a:pPr algn="ctr"/>
+            <a:r>
+              <a:rPr sz="1600" b="1">
+                <a:solidFill>
+                  <a:srgbClr val="202122"/>
+                </a:solidFill>
+                <a:latin typeface="Calibri"/>
+              </a:rPr>
+              <a:t>2</a:t>
+            </a:r>
+          </a:p>
+        </p:txBody>
+      </p:sp>
+      <p:sp>
+        <p:nvSpPr>
+          <p:cNvPr id="9" name="TextBox 8"/>
+          <p:cNvSpPr txBox="1"/>
+          <p:nvPr/>
+        </p:nvSpPr>
+        <p:spPr>
+          <a:xfrm>
+            <a:off x="1371600" y="3063240"/>
+            <a:ext cx="10271455" cy="1188720"/>
+          </a:xfrm>
+          <a:prstGeom prst="rect">
+            <a:avLst/>
+          </a:prstGeom>
+          <a:noFill/>
+        </p:spPr>
+        <p:txBody>
+          <a:bodyPr wrap="square" anchor="t" lIns="0" rIns="0" tIns="0" bIns="0"/>
+          <a:lstStyle/>
+          <a:p>
+            <a:pPr algn="l"/>
+            <a:r>
+              <a:rPr sz="2400" b="0" i="0">
+                <a:solidFill>
+                  <a:srgbClr val="202122"/>
+                </a:solidFill>
+                <a:latin typeface="Calibri"/>
+              </a:rPr>
+              <a:t>When should a ticket be escalated?</a:t>
+            </a:r>
+          </a:p>
+        </p:txBody>
+      </p:sp>
+      <p:sp>
+        <p:nvSpPr>
+          <p:cNvPr id="10" name="Oval 9"/>
+          <p:cNvSpPr/>
+          <p:nvPr/>
+        </p:nvSpPr>
+        <p:spPr>
+          <a:xfrm>
+            <a:off x="548640" y="4526280"/>
+            <a:ext cx="502920" cy="502920"/>
+          </a:xfrm>
+          <a:prstGeom prst="ellipse">
+            <a:avLst/>
+          </a:prstGeom>
+          <a:solidFill>
+            <a:srgbClr val="4EA1FF"/>
+          </a:solidFill>
+          <a:ln>
+            <a:noFill/>
+          </a:ln>
+          <a:effectLst/>
+        </p:spPr>
+        <p:style>
+          <a:lnRef idx="1">
+            <a:schemeClr val="accent1"/>
+          </a:lnRef>
+          <a:fillRef idx="3">
+            <a:schemeClr val="accent1"/>
+          </a:fillRef>
+          <a:effectRef idx="2">
+            <a:schemeClr val="accent1"/>
+          </a:effectRef>
+          <a:fontRef idx="minor">
+            <a:schemeClr val="lt1"/>
+          </a:fontRef>
+        </p:style>
+        <p:txBody>
+          <a:bodyPr rtlCol="0" anchor="ctr" lIns="0" rIns="0" tIns="0" bIns="0"/>
+          <a:lstStyle/>
+          <a:p>
+            <a:pPr algn="ctr"/>
+            <a:r>
+              <a:rPr sz="1600" b="1">
+                <a:solidFill>
+                  <a:srgbClr val="202122"/>
+                </a:solidFill>
+                <a:latin typeface="Calibri"/>
+              </a:rPr>
+              <a:t>3</a:t>
+            </a:r>
+          </a:p>
+        </p:txBody>
+      </p:sp>
+      <p:sp>
+        <p:nvSpPr>
+          <p:cNvPr id="11" name="TextBox 10"/>
+          <p:cNvSpPr txBox="1"/>
+          <p:nvPr/>
+        </p:nvSpPr>
+        <p:spPr>
+          <a:xfrm>
+            <a:off x="1371600" y="4480560"/>
+            <a:ext cx="10271455" cy="1188720"/>
+          </a:xfrm>
+          <a:prstGeom prst="rect">
+            <a:avLst/>
+          </a:prstGeom>
+          <a:noFill/>
+        </p:spPr>
+        <p:txBody>
+          <a:bodyPr wrap="square" anchor="t" lIns="0" rIns="0" tIns="0" bIns="0"/>
+          <a:lstStyle/>
+          <a:p>
+            <a:pPr algn="l"/>
+            <a:r>
+              <a:rPr sz="2400" b="0" i="0">
+                <a:solidFill>
+                  <a:srgbClr val="202122"/>
+                </a:solidFill>
+                <a:latin typeface="Calibri"/>
+              </a:rPr>
+              <a:t>Why remove accounts promptly when staff leave?</a:t>
+            </a:r>
+          </a:p>
+        </p:txBody>
+      </p:sp>
+      <p:sp>
+        <p:nvSpPr>
+          <p:cNvPr id="12" name="TextBox 11"/>
+          <p:cNvSpPr txBox="1"/>
+          <p:nvPr/>
+        </p:nvSpPr>
+        <p:spPr>
+          <a:xfrm>
+            <a:off x="548640" y="5852160"/>
+            <a:ext cx="11094415" cy="365760"/>
+          </a:xfrm>
+          <a:prstGeom prst="rect">
+            <a:avLst/>
+          </a:prstGeom>
+          <a:noFill/>
+        </p:spPr>
+        <p:txBody>
+          <a:bodyPr wrap="square" anchor="t" lIns="0" rIns="0" tIns="0" bIns="0"/>
+          <a:lstStyle/>
+          <a:p>
+            <a:pPr algn="l"/>
+            <a:r>
+              <a:rPr sz="1300" b="0" i="1">
+                <a:solidFill>
+                  <a:srgbClr val="54595D"/>
+                </a:solidFill>
+                <a:latin typeface="Calibri"/>
+              </a:rPr>
+              <a:t>Answer on mini whiteboards or in your book. Answers are in the speaker notes.</a:t>
+            </a:r>
+          </a:p>
+        </p:txBody>
+      </p:sp>
+    </p:spTree>
+  </p:cSld>
+  <p:clrMapOvr>
+    <a:masterClrMapping/>
+  </p:clrMapOvr>
+</p:sld>
+</file>
+
+<file path=ppt/slides/slide12.xml><?xml version="1.0" encoding="utf-8"?>
+<p:sld xmlns:a="http://schemas.openxmlformats.org/drawingml/2006/main" xmlns:p="http://schemas.openxmlformats.org/presentationml/2006/main" xmlns:r="http://schemas.openxmlformats.org/officeDocument/2006/relationships">
+  <p:cSld>
+    <p:bg>
+      <p:bgPr>
+        <a:solidFill>
+          <a:srgbClr val="FFFFFF"/>
+        </a:solidFill>
+        <a:effectLst/>
+      </p:bgPr>
+    </p:bg>
+    <p:spTree>
+      <p:nvGrpSpPr>
+        <p:cNvPr id="1" name=""/>
+        <p:cNvGrpSpPr/>
+        <p:nvPr/>
+      </p:nvGrpSpPr>
+      <p:grpSpPr/>
+      <p:sp>
+        <p:nvSpPr>
+          <p:cNvPr id="2" name="TextBox 1"/>
+          <p:cNvSpPr txBox="1"/>
+          <p:nvPr/>
+        </p:nvSpPr>
+        <p:spPr>
+          <a:xfrm>
+            <a:off x="548640" y="320040"/>
+            <a:ext cx="11094415" cy="274320"/>
+          </a:xfrm>
+          <a:prstGeom prst="rect">
+            <a:avLst/>
+          </a:prstGeom>
+          <a:noFill/>
+        </p:spPr>
+        <p:txBody>
+          <a:bodyPr wrap="square" anchor="t" lIns="0" rIns="0" tIns="0" bIns="0"/>
+          <a:lstStyle/>
+          <a:p>
+            <a:pPr algn="l"/>
+            <a:r>
+              <a:rPr sz="1100" b="1" i="0">
+                <a:solidFill>
+                  <a:srgbClr val="54595D"/>
+                </a:solidFill>
+                <a:latin typeface="Calibri"/>
+              </a:rPr>
+              <a:t>DIGITAL SUPPORT  ·  Digital Support Content Area 2</a:t>
+            </a:r>
+          </a:p>
+        </p:txBody>
+      </p:sp>
+      <p:sp>
+        <p:nvSpPr>
+          <p:cNvPr id="3" name="TextBox 2"/>
+          <p:cNvSpPr txBox="1"/>
+          <p:nvPr/>
+        </p:nvSpPr>
+        <p:spPr>
+          <a:xfrm>
+            <a:off x="548640" y="566928"/>
+            <a:ext cx="11094415" cy="822960"/>
+          </a:xfrm>
+          <a:prstGeom prst="rect">
+            <a:avLst/>
+          </a:prstGeom>
+          <a:noFill/>
+        </p:spPr>
+        <p:txBody>
+          <a:bodyPr wrap="square" anchor="ctr" lIns="0" rIns="0" tIns="0" bIns="0"/>
+          <a:lstStyle/>
+          <a:p>
+            <a:pPr algn="l"/>
+            <a:r>
+              <a:rPr sz="3200" b="1" i="0">
+                <a:solidFill>
+                  <a:srgbClr val="03306E"/>
+                </a:solidFill>
+                <a:latin typeface="Cambria"/>
+              </a:rPr>
+              <a:t>Monitoring and operating systems</a:t>
+            </a:r>
+          </a:p>
+        </p:txBody>
+      </p:sp>
+      <p:sp>
+        <p:nvSpPr>
+          <p:cNvPr id="4" name="TextBox 3"/>
+          <p:cNvSpPr txBox="1"/>
+          <p:nvPr/>
+        </p:nvSpPr>
+        <p:spPr>
+          <a:xfrm>
+            <a:off x="548640" y="6446520"/>
+            <a:ext cx="8229600" cy="274320"/>
+          </a:xfrm>
+          <a:prstGeom prst="rect">
+            <a:avLst/>
+          </a:prstGeom>
+          <a:noFill/>
+        </p:spPr>
+        <p:txBody>
+          <a:bodyPr wrap="square" anchor="t" lIns="0" rIns="0" tIns="0" bIns="0"/>
+          <a:lstStyle/>
+          <a:p>
+            <a:pPr algn="l"/>
+            <a:r>
+              <a:rPr sz="1000" b="0" i="0">
+                <a:solidFill>
+                  <a:srgbClr val="54595D"/>
+                </a:solidFill>
+                <a:latin typeface="Calibri"/>
+              </a:rPr>
+              <a:t>Digital Support and Security T Level  ·  End-User Support and Troubleshooting</a:t>
+            </a:r>
+          </a:p>
+        </p:txBody>
+      </p:sp>
+      <p:sp>
+        <p:nvSpPr>
+          <p:cNvPr id="5" name="TextBox 4"/>
+          <p:cNvSpPr txBox="1"/>
+          <p:nvPr/>
+        </p:nvSpPr>
+        <p:spPr>
+          <a:xfrm>
+            <a:off x="10728655" y="6446520"/>
+            <a:ext cx="914400" cy="274320"/>
+          </a:xfrm>
+          <a:prstGeom prst="rect">
+            <a:avLst/>
+          </a:prstGeom>
+          <a:noFill/>
+        </p:spPr>
+        <p:txBody>
+          <a:bodyPr wrap="square" anchor="t" lIns="0" rIns="0" tIns="0" bIns="0"/>
+          <a:lstStyle/>
+          <a:p>
+            <a:pPr algn="r"/>
+            <a:r>
+              <a:rPr sz="1000" b="0" i="0">
+                <a:solidFill>
+                  <a:srgbClr val="54595D"/>
+                </a:solidFill>
+                <a:latin typeface="Calibri"/>
+              </a:rPr>
+              <a:t>12</a:t>
+            </a:r>
+          </a:p>
+        </p:txBody>
+      </p:sp>
+      <p:sp>
+        <p:nvSpPr>
+          <p:cNvPr id="6" name="TextBox 5"/>
+          <p:cNvSpPr txBox="1"/>
+          <p:nvPr/>
+        </p:nvSpPr>
+        <p:spPr>
+          <a:xfrm>
+            <a:off x="548640" y="1600200"/>
+            <a:ext cx="6675120" cy="4572000"/>
+          </a:xfrm>
+          <a:prstGeom prst="rect">
+            <a:avLst/>
+          </a:prstGeom>
+          <a:noFill/>
+        </p:spPr>
+        <p:txBody>
+          <a:bodyPr wrap="square" lIns="0" rIns="0" tIns="0" bIns="0">
+            <a:spAutoFit/>
+          </a:bodyPr>
+          <a:lstStyle/>
+          <a:p>
+            <a:pPr marL="274320" indent="-274320">
+              <a:spcAft>
+                <a:spcPts val="1080"/>
+              </a:spcAft>
+              <a:buClr>
+                <a:srgbClr val="0645AD"/>
+              </a:buClr>
+              <a:buFont typeface="Arial"/>
+              <a:buChar char="•"/>
+            </a:pPr>
+            <a:r>
+              <a:rPr sz="2400" b="0">
+                <a:solidFill>
+                  <a:srgbClr val="202122"/>
+                </a:solidFill>
+                <a:latin typeface="Calibri"/>
+              </a:rPr>
+              <a:t>Analyse performance of hardware, software, databases, networks and people.</a:t>
+            </a:r>
+          </a:p>
+          <a:p>
+            <a:pPr marL="274320" indent="-274320">
+              <a:spcAft>
+                <a:spcPts val="1080"/>
+              </a:spcAft>
+              <a:buClr>
+                <a:srgbClr val="0645AD"/>
+              </a:buClr>
+              <a:buFont typeface="Arial"/>
+              <a:buChar char="•"/>
+            </a:pPr>
+            <a:r>
+              <a:rPr sz="2400" b="0">
+                <a:solidFill>
+                  <a:srgbClr val="202122"/>
+                </a:solidFill>
+                <a:latin typeface="Calibri"/>
+              </a:rPr>
+              <a:t>Monitor security controls (firewalls, anti-virus) and network traffic.</a:t>
+            </a:r>
+          </a:p>
+          <a:p>
+            <a:pPr marL="274320" indent="-274320">
+              <a:spcAft>
+                <a:spcPts val="1080"/>
+              </a:spcAft>
+              <a:buClr>
+                <a:srgbClr val="0645AD"/>
+              </a:buClr>
+              <a:buFont typeface="Arial"/>
+              <a:buChar char="•"/>
+            </a:pPr>
+            <a:r>
+              <a:rPr sz="2400" b="0">
+                <a:solidFill>
+                  <a:srgbClr val="202122"/>
+                </a:solidFill>
+                <a:latin typeface="Calibri"/>
+              </a:rPr>
+              <a:t>Track licences and log and tag assets.</a:t>
+            </a:r>
+          </a:p>
+          <a:p>
+            <a:pPr marL="274320" indent="-274320">
+              <a:spcAft>
+                <a:spcPts val="1080"/>
+              </a:spcAft>
+              <a:buClr>
+                <a:srgbClr val="0645AD"/>
+              </a:buClr>
+              <a:buFont typeface="Arial"/>
+              <a:buChar char="•"/>
+            </a:pPr>
+            <a:r>
+              <a:rPr sz="2400" b="0">
+                <a:solidFill>
+                  <a:srgbClr val="202122"/>
+                </a:solidFill>
+                <a:latin typeface="Calibri"/>
+              </a:rPr>
+              <a:t>Create, update and communicate tickets; support users remotely.</a:t>
+            </a:r>
+          </a:p>
+          <a:p>
+            <a:pPr marL="274320" indent="-274320">
+              <a:spcAft>
+                <a:spcPts val="1080"/>
+              </a:spcAft>
+              <a:buClr>
+                <a:srgbClr val="0645AD"/>
+              </a:buClr>
+              <a:buFont typeface="Arial"/>
+              <a:buChar char="•"/>
+            </a:pPr>
+            <a:r>
+              <a:rPr sz="2400" b="0">
+                <a:solidFill>
+                  <a:srgbClr val="202122"/>
+                </a:solidFill>
+                <a:latin typeface="Calibri"/>
+              </a:rPr>
+              <a:t>Review user feedback critically.</a:t>
+            </a:r>
+          </a:p>
+        </p:txBody>
+      </p:sp>
+      <p:sp>
+        <p:nvSpPr>
+          <p:cNvPr id="7" name="Rounded Rectangle 6"/>
+          <p:cNvSpPr/>
+          <p:nvPr/>
+        </p:nvSpPr>
+        <p:spPr>
+          <a:xfrm>
+            <a:off x="7772400" y="1600200"/>
+            <a:ext cx="3867912" cy="4434840"/>
+          </a:xfrm>
+          <a:prstGeom prst="roundRect">
+            <a:avLst>
+              <a:gd name="adj" fmla="val 8000"/>
+            </a:avLst>
+          </a:prstGeom>
+          <a:solidFill>
+            <a:srgbClr val="03306E"/>
+          </a:solidFill>
+          <a:ln>
+            <a:noFill/>
+          </a:ln>
+          <a:effectLst/>
+        </p:spPr>
+        <p:style>
+          <a:lnRef idx="1">
+            <a:schemeClr val="accent1"/>
+          </a:lnRef>
+          <a:fillRef idx="3">
+            <a:schemeClr val="accent1"/>
+          </a:fillRef>
+          <a:effectRef idx="2">
+            <a:schemeClr val="accent1"/>
+          </a:effectRef>
+          <a:fontRef idx="minor">
+            <a:schemeClr val="lt1"/>
+          </a:fontRef>
+        </p:style>
+        <p:txBody>
+          <a:bodyPr rtlCol="0" anchor="ctr"/>
+          <a:lstStyle/>
+          <a:p/>
+        </p:txBody>
+      </p:sp>
+      <p:sp>
+        <p:nvSpPr>
+          <p:cNvPr id="8" name="Oval 7"/>
+          <p:cNvSpPr/>
+          <p:nvPr/>
+        </p:nvSpPr>
+        <p:spPr>
+          <a:xfrm>
+            <a:off x="8046720" y="1874519"/>
+            <a:ext cx="548640" cy="548640"/>
+          </a:xfrm>
+          <a:prstGeom prst="ellipse">
+            <a:avLst/>
+          </a:prstGeom>
+          <a:solidFill>
+            <a:srgbClr val="4EA1FF"/>
+          </a:solidFill>
+          <a:ln>
+            <a:noFill/>
+          </a:ln>
+          <a:effectLst/>
+        </p:spPr>
+        <p:style>
+          <a:lnRef idx="1">
+            <a:schemeClr val="accent1"/>
+          </a:lnRef>
+          <a:fillRef idx="3">
+            <a:schemeClr val="accent1"/>
+          </a:fillRef>
+          <a:effectRef idx="2">
+            <a:schemeClr val="accent1"/>
+          </a:effectRef>
+          <a:fontRef idx="minor">
+            <a:schemeClr val="lt1"/>
+          </a:fontRef>
+        </p:style>
+        <p:txBody>
+          <a:bodyPr rtlCol="0" anchor="ctr" lIns="0" rIns="0" tIns="0" bIns="0"/>
+          <a:lstStyle/>
+          <a:p>
+            <a:pPr algn="ctr"/>
+            <a:r>
+              <a:rPr sz="2000" b="1">
+                <a:solidFill>
+                  <a:srgbClr val="202122"/>
+                </a:solidFill>
+                <a:latin typeface="Calibri"/>
+              </a:rPr>
+              <a:t>!</a:t>
+            </a:r>
+          </a:p>
+        </p:txBody>
+      </p:sp>
+      <p:sp>
+        <p:nvSpPr>
+          <p:cNvPr id="9" name="TextBox 8"/>
+          <p:cNvSpPr txBox="1"/>
+          <p:nvPr/>
+        </p:nvSpPr>
+        <p:spPr>
+          <a:xfrm>
+            <a:off x="8046720" y="2606040"/>
+            <a:ext cx="3291840" cy="365760"/>
+          </a:xfrm>
+          <a:prstGeom prst="rect">
+            <a:avLst/>
+          </a:prstGeom>
+          <a:noFill/>
+        </p:spPr>
+        <p:txBody>
+          <a:bodyPr wrap="square" anchor="t" lIns="0" rIns="0" tIns="0" bIns="0"/>
+          <a:lstStyle/>
+          <a:p>
+            <a:pPr algn="l"/>
+            <a:r>
+              <a:rPr sz="1300" b="1" i="0">
+                <a:solidFill>
+                  <a:srgbClr val="A9C8F0"/>
+                </a:solidFill>
+                <a:latin typeface="Calibri"/>
+              </a:rPr>
+              <a:t>KEY IDEA</a:t>
+            </a:r>
+          </a:p>
+        </p:txBody>
+      </p:sp>
+      <p:sp>
+        <p:nvSpPr>
+          <p:cNvPr id="10" name="TextBox 9"/>
+          <p:cNvSpPr txBox="1"/>
+          <p:nvPr/>
+        </p:nvSpPr>
+        <p:spPr>
+          <a:xfrm>
+            <a:off x="8046720" y="3017520"/>
+            <a:ext cx="3291840" cy="2926080"/>
+          </a:xfrm>
+          <a:prstGeom prst="rect">
+            <a:avLst/>
+          </a:prstGeom>
+          <a:noFill/>
+        </p:spPr>
+        <p:txBody>
+          <a:bodyPr wrap="square" anchor="t" lIns="0" rIns="0" tIns="0" bIns="0"/>
+          <a:lstStyle/>
+          <a:p>
+            <a:pPr algn="l"/>
+            <a:r>
+              <a:rPr sz="2200" b="0" i="0">
+                <a:solidFill>
+                  <a:srgbClr val="FFFFFF"/>
+                </a:solidFill>
+                <a:latin typeface="Cambria"/>
+              </a:rPr>
+              <a:t>Record and summarise findings clearly using correct technical terms, so they can shape future policy.</a:t>
+            </a:r>
+          </a:p>
+        </p:txBody>
+      </p:sp>
+    </p:spTree>
+  </p:cSld>
+  <p:clrMapOvr>
+    <a:masterClrMapping/>
+  </p:clrMapOvr>
+</p:sld>
+</file>
+
+<file path=ppt/slides/slide13.xml><?xml version="1.0" encoding="utf-8"?>
+<p:sld xmlns:a="http://schemas.openxmlformats.org/drawingml/2006/main" xmlns:p="http://schemas.openxmlformats.org/presentationml/2006/main" xmlns:r="http://schemas.openxmlformats.org/officeDocument/2006/relationships">
+  <p:cSld>
+    <p:bg>
+      <p:bgPr>
+        <a:solidFill>
+          <a:srgbClr val="FFFFFF"/>
+        </a:solidFill>
+        <a:effectLst/>
+      </p:bgPr>
+    </p:bg>
+    <p:spTree>
+      <p:nvGrpSpPr>
+        <p:cNvPr id="1" name=""/>
+        <p:cNvGrpSpPr/>
+        <p:nvPr/>
+      </p:nvGrpSpPr>
+      <p:grpSpPr/>
+      <p:sp>
+        <p:nvSpPr>
+          <p:cNvPr id="2" name="TextBox 1"/>
+          <p:cNvSpPr txBox="1"/>
+          <p:nvPr/>
+        </p:nvSpPr>
+        <p:spPr>
+          <a:xfrm>
+            <a:off x="548640" y="320040"/>
+            <a:ext cx="11094415" cy="274320"/>
+          </a:xfrm>
+          <a:prstGeom prst="rect">
+            <a:avLst/>
+          </a:prstGeom>
+          <a:noFill/>
+        </p:spPr>
+        <p:txBody>
+          <a:bodyPr wrap="square" anchor="t" lIns="0" rIns="0" tIns="0" bIns="0"/>
+          <a:lstStyle/>
+          <a:p>
+            <a:pPr algn="l"/>
+            <a:r>
+              <a:rPr sz="1100" b="1" i="0">
+                <a:solidFill>
+                  <a:srgbClr val="54595D"/>
+                </a:solidFill>
+                <a:latin typeface="Calibri"/>
+              </a:rPr>
+              <a:t>DIGITAL SUPPORT  ·  Digital Support Content Area 2</a:t>
+            </a:r>
+          </a:p>
+        </p:txBody>
+      </p:sp>
+      <p:sp>
+        <p:nvSpPr>
+          <p:cNvPr id="3" name="TextBox 2"/>
+          <p:cNvSpPr txBox="1"/>
+          <p:nvPr/>
+        </p:nvSpPr>
+        <p:spPr>
+          <a:xfrm>
+            <a:off x="548640" y="566928"/>
+            <a:ext cx="11094415" cy="822960"/>
+          </a:xfrm>
+          <a:prstGeom prst="rect">
+            <a:avLst/>
+          </a:prstGeom>
+          <a:noFill/>
+        </p:spPr>
+        <p:txBody>
+          <a:bodyPr wrap="square" anchor="ctr" lIns="0" rIns="0" tIns="0" bIns="0"/>
+          <a:lstStyle/>
+          <a:p>
+            <a:pPr algn="l"/>
+            <a:r>
+              <a:rPr sz="3200" b="1" i="0">
+                <a:solidFill>
+                  <a:srgbClr val="03306E"/>
+                </a:solidFill>
+                <a:latin typeface="Cambria"/>
+              </a:rPr>
+              <a:t>Check your understanding</a:t>
+            </a:r>
+          </a:p>
+        </p:txBody>
+      </p:sp>
+      <p:sp>
+        <p:nvSpPr>
+          <p:cNvPr id="4" name="TextBox 3"/>
+          <p:cNvSpPr txBox="1"/>
+          <p:nvPr/>
+        </p:nvSpPr>
+        <p:spPr>
+          <a:xfrm>
+            <a:off x="548640" y="6446520"/>
+            <a:ext cx="8229600" cy="274320"/>
+          </a:xfrm>
+          <a:prstGeom prst="rect">
+            <a:avLst/>
+          </a:prstGeom>
+          <a:noFill/>
+        </p:spPr>
+        <p:txBody>
+          <a:bodyPr wrap="square" anchor="t" lIns="0" rIns="0" tIns="0" bIns="0"/>
+          <a:lstStyle/>
+          <a:p>
+            <a:pPr algn="l"/>
+            <a:r>
+              <a:rPr sz="1000" b="0" i="0">
+                <a:solidFill>
+                  <a:srgbClr val="54595D"/>
+                </a:solidFill>
+                <a:latin typeface="Calibri"/>
+              </a:rPr>
+              <a:t>Digital Support and Security T Level  ·  End-User Support and Troubleshooting</a:t>
+            </a:r>
+          </a:p>
+        </p:txBody>
+      </p:sp>
+      <p:sp>
+        <p:nvSpPr>
+          <p:cNvPr id="5" name="TextBox 4"/>
+          <p:cNvSpPr txBox="1"/>
+          <p:nvPr/>
+        </p:nvSpPr>
+        <p:spPr>
+          <a:xfrm>
+            <a:off x="10728655" y="6446520"/>
+            <a:ext cx="914400" cy="274320"/>
+          </a:xfrm>
+          <a:prstGeom prst="rect">
+            <a:avLst/>
+          </a:prstGeom>
+          <a:noFill/>
+        </p:spPr>
+        <p:txBody>
+          <a:bodyPr wrap="square" anchor="t" lIns="0" rIns="0" tIns="0" bIns="0"/>
+          <a:lstStyle/>
+          <a:p>
+            <a:pPr algn="r"/>
+            <a:r>
+              <a:rPr sz="1000" b="0" i="0">
+                <a:solidFill>
+                  <a:srgbClr val="54595D"/>
+                </a:solidFill>
+                <a:latin typeface="Calibri"/>
+              </a:rPr>
+              <a:t>13</a:t>
+            </a:r>
+          </a:p>
+        </p:txBody>
+      </p:sp>
+      <p:sp>
+        <p:nvSpPr>
+          <p:cNvPr id="6" name="Oval 5"/>
+          <p:cNvSpPr/>
+          <p:nvPr/>
+        </p:nvSpPr>
+        <p:spPr>
+          <a:xfrm>
+            <a:off x="548640" y="1618488"/>
+            <a:ext cx="411480" cy="411480"/>
+          </a:xfrm>
+          <a:prstGeom prst="ellipse">
+            <a:avLst/>
+          </a:prstGeom>
+          <a:solidFill>
+            <a:srgbClr val="4EA1FF"/>
+          </a:solidFill>
+          <a:ln>
+            <a:noFill/>
+          </a:ln>
+          <a:effectLst/>
+        </p:spPr>
+        <p:style>
+          <a:lnRef idx="1">
+            <a:schemeClr val="accent1"/>
+          </a:lnRef>
+          <a:fillRef idx="3">
+            <a:schemeClr val="accent1"/>
+          </a:fillRef>
+          <a:effectRef idx="2">
+            <a:schemeClr val="accent1"/>
+          </a:effectRef>
+          <a:fontRef idx="minor">
+            <a:schemeClr val="lt1"/>
+          </a:fontRef>
+        </p:style>
+        <p:txBody>
+          <a:bodyPr rtlCol="0" anchor="ctr" lIns="0" rIns="0" tIns="0" bIns="0"/>
+          <a:lstStyle/>
+          <a:p>
+            <a:pPr algn="ctr"/>
+            <a:r>
+              <a:rPr sz="1400" b="1">
+                <a:solidFill>
+                  <a:srgbClr val="202122"/>
+                </a:solidFill>
+                <a:latin typeface="Calibri"/>
+              </a:rPr>
+              <a:t>1</a:t>
+            </a:r>
+          </a:p>
+        </p:txBody>
+      </p:sp>
+      <p:sp>
+        <p:nvSpPr>
+          <p:cNvPr id="7" name="TextBox 6"/>
+          <p:cNvSpPr txBox="1"/>
+          <p:nvPr/>
+        </p:nvSpPr>
+        <p:spPr>
+          <a:xfrm>
+            <a:off x="1234440" y="1600200"/>
+            <a:ext cx="10408615" cy="1030986"/>
+          </a:xfrm>
+          <a:prstGeom prst="rect">
+            <a:avLst/>
+          </a:prstGeom>
+          <a:noFill/>
+        </p:spPr>
+        <p:txBody>
+          <a:bodyPr wrap="square" anchor="t" lIns="0" rIns="0" tIns="0" bIns="0"/>
+          <a:lstStyle/>
+          <a:p>
+            <a:pPr algn="l"/>
+            <a:r>
+              <a:rPr sz="2200" b="0" i="0">
+                <a:solidFill>
+                  <a:srgbClr val="202122"/>
+                </a:solidFill>
+                <a:latin typeface="Calibri"/>
+              </a:rPr>
+              <a:t>What is the first step of the troubleshooting method?</a:t>
+            </a:r>
+          </a:p>
+        </p:txBody>
+      </p:sp>
+      <p:sp>
+        <p:nvSpPr>
+          <p:cNvPr id="8" name="Oval 7"/>
+          <p:cNvSpPr/>
+          <p:nvPr/>
+        </p:nvSpPr>
+        <p:spPr>
+          <a:xfrm>
+            <a:off x="548640" y="2814066"/>
+            <a:ext cx="411480" cy="411480"/>
+          </a:xfrm>
+          <a:prstGeom prst="ellipse">
+            <a:avLst/>
+          </a:prstGeom>
+          <a:solidFill>
+            <a:srgbClr val="4EA1FF"/>
+          </a:solidFill>
+          <a:ln>
+            <a:noFill/>
+          </a:ln>
+          <a:effectLst/>
+        </p:spPr>
+        <p:style>
+          <a:lnRef idx="1">
+            <a:schemeClr val="accent1"/>
+          </a:lnRef>
+          <a:fillRef idx="3">
+            <a:schemeClr val="accent1"/>
+          </a:fillRef>
+          <a:effectRef idx="2">
+            <a:schemeClr val="accent1"/>
+          </a:effectRef>
+          <a:fontRef idx="minor">
+            <a:schemeClr val="lt1"/>
+          </a:fontRef>
+        </p:style>
+        <p:txBody>
+          <a:bodyPr rtlCol="0" anchor="ctr" lIns="0" rIns="0" tIns="0" bIns="0"/>
+          <a:lstStyle/>
+          <a:p>
+            <a:pPr algn="ctr"/>
+            <a:r>
+              <a:rPr sz="1400" b="1">
+                <a:solidFill>
+                  <a:srgbClr val="202122"/>
+                </a:solidFill>
+                <a:latin typeface="Calibri"/>
+              </a:rPr>
+              <a:t>2</a:t>
+            </a:r>
+          </a:p>
+        </p:txBody>
+      </p:sp>
+      <p:sp>
+        <p:nvSpPr>
+          <p:cNvPr id="9" name="TextBox 8"/>
+          <p:cNvSpPr txBox="1"/>
+          <p:nvPr/>
+        </p:nvSpPr>
+        <p:spPr>
+          <a:xfrm>
+            <a:off x="1234440" y="2795778"/>
+            <a:ext cx="10408615" cy="1030986"/>
+          </a:xfrm>
+          <a:prstGeom prst="rect">
+            <a:avLst/>
+          </a:prstGeom>
+          <a:noFill/>
+        </p:spPr>
+        <p:txBody>
+          <a:bodyPr wrap="square" anchor="t" lIns="0" rIns="0" tIns="0" bIns="0"/>
+          <a:lstStyle/>
+          <a:p>
+            <a:pPr algn="l"/>
+            <a:r>
+              <a:rPr sz="2200" b="0" i="0">
+                <a:solidFill>
+                  <a:srgbClr val="202122"/>
+                </a:solidFill>
+                <a:latin typeface="Calibri"/>
+              </a:rPr>
+              <a:t>Why back up before implementing a fix?</a:t>
+            </a:r>
+          </a:p>
+        </p:txBody>
+      </p:sp>
+      <p:sp>
+        <p:nvSpPr>
+          <p:cNvPr id="10" name="Oval 9"/>
+          <p:cNvSpPr/>
+          <p:nvPr/>
+        </p:nvSpPr>
+        <p:spPr>
+          <a:xfrm>
+            <a:off x="548640" y="4009644"/>
+            <a:ext cx="411480" cy="411480"/>
+          </a:xfrm>
+          <a:prstGeom prst="ellipse">
+            <a:avLst/>
+          </a:prstGeom>
+          <a:solidFill>
+            <a:srgbClr val="4EA1FF"/>
+          </a:solidFill>
+          <a:ln>
+            <a:noFill/>
+          </a:ln>
+          <a:effectLst/>
+        </p:spPr>
+        <p:style>
+          <a:lnRef idx="1">
+            <a:schemeClr val="accent1"/>
+          </a:lnRef>
+          <a:fillRef idx="3">
+            <a:schemeClr val="accent1"/>
+          </a:fillRef>
+          <a:effectRef idx="2">
+            <a:schemeClr val="accent1"/>
+          </a:effectRef>
+          <a:fontRef idx="minor">
+            <a:schemeClr val="lt1"/>
+          </a:fontRef>
+        </p:style>
+        <p:txBody>
+          <a:bodyPr rtlCol="0" anchor="ctr" lIns="0" rIns="0" tIns="0" bIns="0"/>
+          <a:lstStyle/>
+          <a:p>
+            <a:pPr algn="ctr"/>
+            <a:r>
+              <a:rPr sz="1400" b="1">
+                <a:solidFill>
+                  <a:srgbClr val="202122"/>
+                </a:solidFill>
+                <a:latin typeface="Calibri"/>
+              </a:rPr>
+              <a:t>3</a:t>
+            </a:r>
+          </a:p>
+        </p:txBody>
+      </p:sp>
+      <p:sp>
+        <p:nvSpPr>
+          <p:cNvPr id="11" name="TextBox 10"/>
+          <p:cNvSpPr txBox="1"/>
+          <p:nvPr/>
+        </p:nvSpPr>
+        <p:spPr>
+          <a:xfrm>
+            <a:off x="1234440" y="3991356"/>
+            <a:ext cx="10408615" cy="1030986"/>
+          </a:xfrm>
+          <a:prstGeom prst="rect">
+            <a:avLst/>
+          </a:prstGeom>
+          <a:noFill/>
+        </p:spPr>
+        <p:txBody>
+          <a:bodyPr wrap="square" anchor="t" lIns="0" rIns="0" tIns="0" bIns="0"/>
+          <a:lstStyle/>
+          <a:p>
+            <a:pPr algn="l"/>
+            <a:r>
+              <a:rPr sz="2200" b="0" i="0">
+                <a:solidFill>
+                  <a:srgbClr val="202122"/>
+                </a:solidFill>
+                <a:latin typeface="Calibri"/>
+              </a:rPr>
+              <a:t>What is escalation?</a:t>
+            </a:r>
+          </a:p>
+        </p:txBody>
+      </p:sp>
+      <p:sp>
+        <p:nvSpPr>
+          <p:cNvPr id="12" name="Oval 11"/>
+          <p:cNvSpPr/>
+          <p:nvPr/>
+        </p:nvSpPr>
+        <p:spPr>
+          <a:xfrm>
+            <a:off x="548640" y="5205221"/>
+            <a:ext cx="411480" cy="411480"/>
+          </a:xfrm>
+          <a:prstGeom prst="ellipse">
+            <a:avLst/>
+          </a:prstGeom>
+          <a:solidFill>
+            <a:srgbClr val="4EA1FF"/>
+          </a:solidFill>
+          <a:ln>
+            <a:noFill/>
+          </a:ln>
+          <a:effectLst/>
+        </p:spPr>
+        <p:style>
+          <a:lnRef idx="1">
+            <a:schemeClr val="accent1"/>
+          </a:lnRef>
+          <a:fillRef idx="3">
+            <a:schemeClr val="accent1"/>
+          </a:fillRef>
+          <a:effectRef idx="2">
+            <a:schemeClr val="accent1"/>
+          </a:effectRef>
+          <a:fontRef idx="minor">
+            <a:schemeClr val="lt1"/>
+          </a:fontRef>
+        </p:style>
+        <p:txBody>
+          <a:bodyPr rtlCol="0" anchor="ctr" lIns="0" rIns="0" tIns="0" bIns="0"/>
+          <a:lstStyle/>
+          <a:p>
+            <a:pPr algn="ctr"/>
+            <a:r>
+              <a:rPr sz="1400" b="1">
+                <a:solidFill>
+                  <a:srgbClr val="202122"/>
+                </a:solidFill>
+                <a:latin typeface="Calibri"/>
+              </a:rPr>
+              <a:t>4</a:t>
+            </a:r>
+          </a:p>
+        </p:txBody>
+      </p:sp>
+      <p:sp>
+        <p:nvSpPr>
+          <p:cNvPr id="13" name="TextBox 12"/>
+          <p:cNvSpPr txBox="1"/>
+          <p:nvPr/>
+        </p:nvSpPr>
+        <p:spPr>
+          <a:xfrm>
+            <a:off x="1234440" y="5186933"/>
+            <a:ext cx="10408615" cy="1030986"/>
+          </a:xfrm>
+          <a:prstGeom prst="rect">
+            <a:avLst/>
+          </a:prstGeom>
+          <a:noFill/>
+        </p:spPr>
+        <p:txBody>
+          <a:bodyPr wrap="square" anchor="t" lIns="0" rIns="0" tIns="0" bIns="0"/>
+          <a:lstStyle/>
+          <a:p>
+            <a:pPr algn="l"/>
+            <a:r>
+              <a:rPr sz="2200" b="0" i="0">
+                <a:solidFill>
+                  <a:srgbClr val="202122"/>
+                </a:solidFill>
+                <a:latin typeface="Calibri"/>
+              </a:rPr>
+              <a:t>Name two CMS functions.</a:t>
+            </a:r>
+          </a:p>
+        </p:txBody>
+      </p:sp>
+    </p:spTree>
+  </p:cSld>
+  <p:clrMapOvr>
+    <a:masterClrMapping/>
+  </p:clrMapOvr>
+</p:sld>
+</file>
+
+<file path=ppt/slides/slide14.xml><?xml version="1.0" encoding="utf-8"?>
+<p:sld xmlns:a="http://schemas.openxmlformats.org/drawingml/2006/main" xmlns:p="http://schemas.openxmlformats.org/presentationml/2006/main" xmlns:r="http://schemas.openxmlformats.org/officeDocument/2006/relationships">
+  <p:cSld>
+    <p:bg>
+      <p:bgPr>
+        <a:solidFill>
+          <a:srgbClr val="FFFFFF"/>
+        </a:solidFill>
+        <a:effectLst/>
+      </p:bgPr>
+    </p:bg>
+    <p:spTree>
+      <p:nvGrpSpPr>
+        <p:cNvPr id="1" name=""/>
+        <p:cNvGrpSpPr/>
+        <p:nvPr/>
+      </p:nvGrpSpPr>
+      <p:grpSpPr/>
+      <p:sp>
+        <p:nvSpPr>
+          <p:cNvPr id="2" name="TextBox 1"/>
+          <p:cNvSpPr txBox="1"/>
+          <p:nvPr/>
+        </p:nvSpPr>
+        <p:spPr>
+          <a:xfrm>
+            <a:off x="548640" y="320040"/>
+            <a:ext cx="11094415" cy="274320"/>
+          </a:xfrm>
+          <a:prstGeom prst="rect">
+            <a:avLst/>
+          </a:prstGeom>
+          <a:noFill/>
+        </p:spPr>
+        <p:txBody>
+          <a:bodyPr wrap="square" anchor="t" lIns="0" rIns="0" tIns="0" bIns="0"/>
+          <a:lstStyle/>
+          <a:p>
+            <a:pPr algn="l"/>
+            <a:r>
+              <a:rPr sz="1100" b="1" i="0">
+                <a:solidFill>
+                  <a:srgbClr val="54595D"/>
+                </a:solidFill>
+                <a:latin typeface="Calibri"/>
+              </a:rPr>
+              <a:t>DIGITAL SUPPORT  ·  Digital Support Content Area 2</a:t>
+            </a:r>
+          </a:p>
+        </p:txBody>
+      </p:sp>
+      <p:sp>
+        <p:nvSpPr>
+          <p:cNvPr id="3" name="TextBox 2"/>
+          <p:cNvSpPr txBox="1"/>
+          <p:nvPr/>
+        </p:nvSpPr>
+        <p:spPr>
+          <a:xfrm>
+            <a:off x="548640" y="566928"/>
+            <a:ext cx="11094415" cy="822960"/>
+          </a:xfrm>
+          <a:prstGeom prst="rect">
+            <a:avLst/>
+          </a:prstGeom>
+          <a:noFill/>
+        </p:spPr>
+        <p:txBody>
+          <a:bodyPr wrap="square" anchor="ctr" lIns="0" rIns="0" tIns="0" bIns="0"/>
+          <a:lstStyle/>
+          <a:p>
+            <a:pPr algn="l"/>
+            <a:r>
+              <a:rPr sz="3200" b="1" i="0">
+                <a:solidFill>
+                  <a:srgbClr val="03306E"/>
+                </a:solidFill>
+                <a:latin typeface="Cambria"/>
+              </a:rPr>
+              <a:t>Answers</a:t>
+            </a:r>
+          </a:p>
+        </p:txBody>
+      </p:sp>
+      <p:sp>
+        <p:nvSpPr>
+          <p:cNvPr id="4" name="TextBox 3"/>
+          <p:cNvSpPr txBox="1"/>
+          <p:nvPr/>
+        </p:nvSpPr>
+        <p:spPr>
+          <a:xfrm>
+            <a:off x="548640" y="6446520"/>
+            <a:ext cx="8229600" cy="274320"/>
+          </a:xfrm>
+          <a:prstGeom prst="rect">
+            <a:avLst/>
+          </a:prstGeom>
+          <a:noFill/>
+        </p:spPr>
+        <p:txBody>
+          <a:bodyPr wrap="square" anchor="t" lIns="0" rIns="0" tIns="0" bIns="0"/>
+          <a:lstStyle/>
+          <a:p>
+            <a:pPr algn="l"/>
+            <a:r>
+              <a:rPr sz="1000" b="0" i="0">
+                <a:solidFill>
+                  <a:srgbClr val="54595D"/>
+                </a:solidFill>
+                <a:latin typeface="Calibri"/>
+              </a:rPr>
+              <a:t>Digital Support and Security T Level  ·  End-User Support and Troubleshooting</a:t>
+            </a:r>
+          </a:p>
+        </p:txBody>
+      </p:sp>
+      <p:sp>
+        <p:nvSpPr>
+          <p:cNvPr id="5" name="TextBox 4"/>
+          <p:cNvSpPr txBox="1"/>
+          <p:nvPr/>
+        </p:nvSpPr>
+        <p:spPr>
+          <a:xfrm>
+            <a:off x="10728655" y="6446520"/>
+            <a:ext cx="914400" cy="274320"/>
+          </a:xfrm>
+          <a:prstGeom prst="rect">
+            <a:avLst/>
+          </a:prstGeom>
+          <a:noFill/>
+        </p:spPr>
+        <p:txBody>
+          <a:bodyPr wrap="square" anchor="t" lIns="0" rIns="0" tIns="0" bIns="0"/>
+          <a:lstStyle/>
+          <a:p>
+            <a:pPr algn="r"/>
+            <a:r>
+              <a:rPr sz="1000" b="0" i="0">
+                <a:solidFill>
+                  <a:srgbClr val="54595D"/>
+                </a:solidFill>
+                <a:latin typeface="Calibri"/>
+              </a:rPr>
+              <a:t>14</a:t>
+            </a:r>
+          </a:p>
+        </p:txBody>
+      </p:sp>
+      <p:sp>
+        <p:nvSpPr>
+          <p:cNvPr id="6" name="Oval 5"/>
+          <p:cNvSpPr/>
+          <p:nvPr/>
+        </p:nvSpPr>
+        <p:spPr>
+          <a:xfrm>
+            <a:off x="548640" y="1618488"/>
+            <a:ext cx="411480" cy="411480"/>
+          </a:xfrm>
+          <a:prstGeom prst="ellipse">
+            <a:avLst/>
+          </a:prstGeom>
+          <a:solidFill>
+            <a:srgbClr val="4EA1FF"/>
+          </a:solidFill>
+          <a:ln>
+            <a:noFill/>
+          </a:ln>
+          <a:effectLst/>
+        </p:spPr>
+        <p:style>
+          <a:lnRef idx="1">
+            <a:schemeClr val="accent1"/>
+          </a:lnRef>
+          <a:fillRef idx="3">
+            <a:schemeClr val="accent1"/>
+          </a:fillRef>
+          <a:effectRef idx="2">
+            <a:schemeClr val="accent1"/>
+          </a:effectRef>
+          <a:fontRef idx="minor">
+            <a:schemeClr val="lt1"/>
+          </a:fontRef>
+        </p:style>
+        <p:txBody>
+          <a:bodyPr rtlCol="0" anchor="ctr" lIns="0" rIns="0" tIns="0" bIns="0"/>
+          <a:lstStyle/>
+          <a:p>
+            <a:pPr algn="ctr"/>
+            <a:r>
+              <a:rPr sz="1400" b="1">
+                <a:solidFill>
+                  <a:srgbClr val="202122"/>
+                </a:solidFill>
+                <a:latin typeface="Calibri"/>
+              </a:rPr>
+              <a:t>1</a:t>
+            </a:r>
+          </a:p>
+        </p:txBody>
+      </p:sp>
+      <p:sp>
+        <p:nvSpPr>
+          <p:cNvPr id="7" name="TextBox 6"/>
+          <p:cNvSpPr txBox="1"/>
+          <p:nvPr/>
+        </p:nvSpPr>
+        <p:spPr>
+          <a:xfrm>
+            <a:off x="1234440" y="1600200"/>
+            <a:ext cx="10408615" cy="1030986"/>
+          </a:xfrm>
+          <a:prstGeom prst="rect">
+            <a:avLst/>
+          </a:prstGeom>
+          <a:noFill/>
+        </p:spPr>
+        <p:txBody>
+          <a:bodyPr wrap="square" anchor="t" lIns="0" rIns="0" tIns="0" bIns="0"/>
+          <a:lstStyle/>
+          <a:p>
+            <a:pPr algn="l"/>
+            <a:r>
+              <a:rPr sz="1800" b="0" i="0">
+                <a:solidFill>
+                  <a:srgbClr val="54595D"/>
+                </a:solidFill>
+                <a:latin typeface="Calibri"/>
+              </a:rPr>
+              <a:t>What is the first step of the troubleshooting method?</a:t>
+            </a:r>
+          </a:p>
+          <a:p>
+            <a:r>
+              <a:rPr sz="1800" b="1">
+                <a:solidFill>
+                  <a:srgbClr val="03306E"/>
+                </a:solidFill>
+                <a:latin typeface="Calibri"/>
+              </a:rPr>
+              <a:t>Gather information.</a:t>
+            </a:r>
+          </a:p>
+        </p:txBody>
+      </p:sp>
+      <p:sp>
+        <p:nvSpPr>
+          <p:cNvPr id="8" name="Oval 7"/>
+          <p:cNvSpPr/>
+          <p:nvPr/>
+        </p:nvSpPr>
+        <p:spPr>
+          <a:xfrm>
+            <a:off x="548640" y="2814066"/>
+            <a:ext cx="411480" cy="411480"/>
+          </a:xfrm>
+          <a:prstGeom prst="ellipse">
+            <a:avLst/>
+          </a:prstGeom>
+          <a:solidFill>
+            <a:srgbClr val="4EA1FF"/>
+          </a:solidFill>
+          <a:ln>
+            <a:noFill/>
+          </a:ln>
+          <a:effectLst/>
+        </p:spPr>
+        <p:style>
+          <a:lnRef idx="1">
+            <a:schemeClr val="accent1"/>
+          </a:lnRef>
+          <a:fillRef idx="3">
+            <a:schemeClr val="accent1"/>
+          </a:fillRef>
+          <a:effectRef idx="2">
+            <a:schemeClr val="accent1"/>
+          </a:effectRef>
+          <a:fontRef idx="minor">
+            <a:schemeClr val="lt1"/>
+          </a:fontRef>
+        </p:style>
+        <p:txBody>
+          <a:bodyPr rtlCol="0" anchor="ctr" lIns="0" rIns="0" tIns="0" bIns="0"/>
+          <a:lstStyle/>
+          <a:p>
+            <a:pPr algn="ctr"/>
+            <a:r>
+              <a:rPr sz="1400" b="1">
+                <a:solidFill>
+                  <a:srgbClr val="202122"/>
+                </a:solidFill>
+                <a:latin typeface="Calibri"/>
+              </a:rPr>
+              <a:t>2</a:t>
+            </a:r>
+          </a:p>
+        </p:txBody>
+      </p:sp>
+      <p:sp>
+        <p:nvSpPr>
+          <p:cNvPr id="9" name="TextBox 8"/>
+          <p:cNvSpPr txBox="1"/>
+          <p:nvPr/>
+        </p:nvSpPr>
+        <p:spPr>
+          <a:xfrm>
+            <a:off x="1234440" y="2795778"/>
+            <a:ext cx="10408615" cy="1030986"/>
+          </a:xfrm>
+          <a:prstGeom prst="rect">
+            <a:avLst/>
+          </a:prstGeom>
+          <a:noFill/>
+        </p:spPr>
+        <p:txBody>
+          <a:bodyPr wrap="square" anchor="t" lIns="0" rIns="0" tIns="0" bIns="0"/>
+          <a:lstStyle/>
+          <a:p>
+            <a:pPr algn="l"/>
+            <a:r>
+              <a:rPr sz="1800" b="0" i="0">
+                <a:solidFill>
+                  <a:srgbClr val="54595D"/>
+                </a:solidFill>
+                <a:latin typeface="Calibri"/>
+              </a:rPr>
+              <a:t>Why back up before implementing a fix?</a:t>
+            </a:r>
+          </a:p>
+          <a:p>
+            <a:r>
+              <a:rPr sz="1800" b="1">
+                <a:solidFill>
+                  <a:srgbClr val="03306E"/>
+                </a:solidFill>
+                <a:latin typeface="Calibri"/>
+              </a:rPr>
+              <a:t>So data can be restored if the fix causes problems.</a:t>
+            </a:r>
+          </a:p>
+        </p:txBody>
+      </p:sp>
+      <p:sp>
+        <p:nvSpPr>
+          <p:cNvPr id="10" name="Oval 9"/>
+          <p:cNvSpPr/>
+          <p:nvPr/>
+        </p:nvSpPr>
+        <p:spPr>
+          <a:xfrm>
+            <a:off x="548640" y="4009644"/>
+            <a:ext cx="411480" cy="411480"/>
+          </a:xfrm>
+          <a:prstGeom prst="ellipse">
+            <a:avLst/>
+          </a:prstGeom>
+          <a:solidFill>
+            <a:srgbClr val="4EA1FF"/>
+          </a:solidFill>
+          <a:ln>
+            <a:noFill/>
+          </a:ln>
+          <a:effectLst/>
+        </p:spPr>
+        <p:style>
+          <a:lnRef idx="1">
+            <a:schemeClr val="accent1"/>
+          </a:lnRef>
+          <a:fillRef idx="3">
+            <a:schemeClr val="accent1"/>
+          </a:fillRef>
+          <a:effectRef idx="2">
+            <a:schemeClr val="accent1"/>
+          </a:effectRef>
+          <a:fontRef idx="minor">
+            <a:schemeClr val="lt1"/>
+          </a:fontRef>
+        </p:style>
+        <p:txBody>
+          <a:bodyPr rtlCol="0" anchor="ctr" lIns="0" rIns="0" tIns="0" bIns="0"/>
+          <a:lstStyle/>
+          <a:p>
+            <a:pPr algn="ctr"/>
+            <a:r>
+              <a:rPr sz="1400" b="1">
+                <a:solidFill>
+                  <a:srgbClr val="202122"/>
+                </a:solidFill>
+                <a:latin typeface="Calibri"/>
+              </a:rPr>
+              <a:t>3</a:t>
+            </a:r>
+          </a:p>
+        </p:txBody>
+      </p:sp>
+      <p:sp>
+        <p:nvSpPr>
+          <p:cNvPr id="11" name="TextBox 10"/>
+          <p:cNvSpPr txBox="1"/>
+          <p:nvPr/>
+        </p:nvSpPr>
+        <p:spPr>
+          <a:xfrm>
+            <a:off x="1234440" y="3991356"/>
+            <a:ext cx="10408615" cy="1030986"/>
+          </a:xfrm>
+          <a:prstGeom prst="rect">
+            <a:avLst/>
+          </a:prstGeom>
+          <a:noFill/>
+        </p:spPr>
+        <p:txBody>
+          <a:bodyPr wrap="square" anchor="t" lIns="0" rIns="0" tIns="0" bIns="0"/>
+          <a:lstStyle/>
+          <a:p>
+            <a:pPr algn="l"/>
+            <a:r>
+              <a:rPr sz="1800" b="0" i="0">
+                <a:solidFill>
+                  <a:srgbClr val="54595D"/>
+                </a:solidFill>
+                <a:latin typeface="Calibri"/>
+              </a:rPr>
+              <a:t>What is escalation?</a:t>
+            </a:r>
+          </a:p>
+          <a:p>
+            <a:r>
+              <a:rPr sz="1800" b="1">
+                <a:solidFill>
+                  <a:srgbClr val="03306E"/>
+                </a:solidFill>
+                <a:latin typeface="Calibri"/>
+              </a:rPr>
+              <a:t>Passing an issue to a higher support line or specialist.</a:t>
+            </a:r>
+          </a:p>
+        </p:txBody>
+      </p:sp>
+      <p:sp>
+        <p:nvSpPr>
+          <p:cNvPr id="12" name="Oval 11"/>
+          <p:cNvSpPr/>
+          <p:nvPr/>
+        </p:nvSpPr>
+        <p:spPr>
+          <a:xfrm>
+            <a:off x="548640" y="5205221"/>
+            <a:ext cx="411480" cy="411480"/>
+          </a:xfrm>
+          <a:prstGeom prst="ellipse">
+            <a:avLst/>
+          </a:prstGeom>
+          <a:solidFill>
+            <a:srgbClr val="4EA1FF"/>
+          </a:solidFill>
+          <a:ln>
+            <a:noFill/>
+          </a:ln>
+          <a:effectLst/>
+        </p:spPr>
+        <p:style>
+          <a:lnRef idx="1">
+            <a:schemeClr val="accent1"/>
+          </a:lnRef>
+          <a:fillRef idx="3">
+            <a:schemeClr val="accent1"/>
+          </a:fillRef>
+          <a:effectRef idx="2">
+            <a:schemeClr val="accent1"/>
+          </a:effectRef>
+          <a:fontRef idx="minor">
+            <a:schemeClr val="lt1"/>
+          </a:fontRef>
+        </p:style>
+        <p:txBody>
+          <a:bodyPr rtlCol="0" anchor="ctr" lIns="0" rIns="0" tIns="0" bIns="0"/>
+          <a:lstStyle/>
+          <a:p>
+            <a:pPr algn="ctr"/>
+            <a:r>
+              <a:rPr sz="1400" b="1">
+                <a:solidFill>
+                  <a:srgbClr val="202122"/>
+                </a:solidFill>
+                <a:latin typeface="Calibri"/>
+              </a:rPr>
+              <a:t>4</a:t>
+            </a:r>
+          </a:p>
+        </p:txBody>
+      </p:sp>
+      <p:sp>
+        <p:nvSpPr>
+          <p:cNvPr id="13" name="TextBox 12"/>
+          <p:cNvSpPr txBox="1"/>
+          <p:nvPr/>
+        </p:nvSpPr>
+        <p:spPr>
+          <a:xfrm>
+            <a:off x="1234440" y="5186933"/>
+            <a:ext cx="10408615" cy="1030986"/>
+          </a:xfrm>
+          <a:prstGeom prst="rect">
+            <a:avLst/>
+          </a:prstGeom>
+          <a:noFill/>
+        </p:spPr>
+        <p:txBody>
+          <a:bodyPr wrap="square" anchor="t" lIns="0" rIns="0" tIns="0" bIns="0"/>
+          <a:lstStyle/>
+          <a:p>
+            <a:pPr algn="l"/>
+            <a:r>
+              <a:rPr sz="1800" b="0" i="0">
+                <a:solidFill>
+                  <a:srgbClr val="54595D"/>
+                </a:solidFill>
+                <a:latin typeface="Calibri"/>
+              </a:rPr>
+              <a:t>Name two CMS functions.</a:t>
+            </a:r>
+          </a:p>
+          <a:p>
+            <a:r>
+              <a:rPr sz="1800" b="1">
+                <a:solidFill>
+                  <a:srgbClr val="03306E"/>
+                </a:solidFill>
+                <a:latin typeface="Calibri"/>
+              </a:rPr>
+              <a:t>Any two of: incident and request, knowledge, change, configuration and asset management.</a:t>
+            </a:r>
+          </a:p>
+        </p:txBody>
+      </p:sp>
+    </p:spTree>
+  </p:cSld>
+  <p:clrMapOvr>
+    <a:masterClrMapping/>
+  </p:clrMapOvr>
+</p:sld>
+</file>
+
+<file path=ppt/slides/slide15.xml><?xml version="1.0" encoding="utf-8"?>
+<p:sld xmlns:a="http://schemas.openxmlformats.org/drawingml/2006/main" xmlns:p="http://schemas.openxmlformats.org/presentationml/2006/main" xmlns:r="http://schemas.openxmlformats.org/officeDocument/2006/relationships">
+  <p:cSld>
+    <p:bg>
+      <p:bgPr>
+        <a:solidFill>
+          <a:srgbClr val="FFFFFF"/>
+        </a:solidFill>
+        <a:effectLst/>
+      </p:bgPr>
+    </p:bg>
+    <p:spTree>
+      <p:nvGrpSpPr>
+        <p:cNvPr id="1" name=""/>
+        <p:cNvGrpSpPr/>
+        <p:nvPr/>
+      </p:nvGrpSpPr>
+      <p:grpSpPr/>
+      <p:sp>
+        <p:nvSpPr>
+          <p:cNvPr id="2" name="TextBox 1"/>
+          <p:cNvSpPr txBox="1"/>
+          <p:nvPr/>
+        </p:nvSpPr>
+        <p:spPr>
+          <a:xfrm>
+            <a:off x="548640" y="320040"/>
+            <a:ext cx="11094415" cy="274320"/>
+          </a:xfrm>
+          <a:prstGeom prst="rect">
+            <a:avLst/>
+          </a:prstGeom>
+          <a:noFill/>
+        </p:spPr>
+        <p:txBody>
+          <a:bodyPr wrap="square" anchor="t" lIns="0" rIns="0" tIns="0" bIns="0"/>
+          <a:lstStyle/>
+          <a:p>
+            <a:pPr algn="l"/>
+            <a:r>
+              <a:rPr sz="1100" b="1" i="0">
+                <a:solidFill>
+                  <a:srgbClr val="54595D"/>
+                </a:solidFill>
+                <a:latin typeface="Calibri"/>
+              </a:rPr>
+              <a:t>DIGITAL SUPPORT  ·  Digital Support Content Area 2</a:t>
+            </a:r>
+          </a:p>
+        </p:txBody>
+      </p:sp>
+      <p:sp>
+        <p:nvSpPr>
+          <p:cNvPr id="3" name="TextBox 2"/>
+          <p:cNvSpPr txBox="1"/>
+          <p:nvPr/>
+        </p:nvSpPr>
+        <p:spPr>
+          <a:xfrm>
+            <a:off x="548640" y="566928"/>
+            <a:ext cx="11094415" cy="822960"/>
+          </a:xfrm>
+          <a:prstGeom prst="rect">
+            <a:avLst/>
+          </a:prstGeom>
+          <a:noFill/>
+        </p:spPr>
+        <p:txBody>
+          <a:bodyPr wrap="square" anchor="ctr" lIns="0" rIns="0" tIns="0" bIns="0"/>
+          <a:lstStyle/>
+          <a:p>
+            <a:pPr algn="l"/>
+            <a:r>
+              <a:rPr sz="3200" b="1" i="0">
+                <a:solidFill>
+                  <a:srgbClr val="03306E"/>
+                </a:solidFill>
+                <a:latin typeface="Cambria"/>
+              </a:rPr>
+              <a:t>Activity: Helpdesk simulation</a:t>
+            </a:r>
+          </a:p>
+        </p:txBody>
+      </p:sp>
+      <p:sp>
+        <p:nvSpPr>
+          <p:cNvPr id="4" name="TextBox 3"/>
+          <p:cNvSpPr txBox="1"/>
+          <p:nvPr/>
+        </p:nvSpPr>
+        <p:spPr>
+          <a:xfrm>
+            <a:off x="548640" y="6446520"/>
+            <a:ext cx="8229600" cy="274320"/>
+          </a:xfrm>
+          <a:prstGeom prst="rect">
+            <a:avLst/>
+          </a:prstGeom>
+          <a:noFill/>
+        </p:spPr>
+        <p:txBody>
+          <a:bodyPr wrap="square" anchor="t" lIns="0" rIns="0" tIns="0" bIns="0"/>
+          <a:lstStyle/>
+          <a:p>
+            <a:pPr algn="l"/>
+            <a:r>
+              <a:rPr sz="1000" b="0" i="0">
+                <a:solidFill>
+                  <a:srgbClr val="54595D"/>
+                </a:solidFill>
+                <a:latin typeface="Calibri"/>
+              </a:rPr>
+              <a:t>Digital Support and Security T Level  ·  End-User Support and Troubleshooting</a:t>
+            </a:r>
+          </a:p>
+        </p:txBody>
+      </p:sp>
+      <p:sp>
+        <p:nvSpPr>
+          <p:cNvPr id="5" name="TextBox 4"/>
+          <p:cNvSpPr txBox="1"/>
+          <p:nvPr/>
+        </p:nvSpPr>
+        <p:spPr>
+          <a:xfrm>
+            <a:off x="10728655" y="6446520"/>
+            <a:ext cx="914400" cy="274320"/>
+          </a:xfrm>
+          <a:prstGeom prst="rect">
+            <a:avLst/>
+          </a:prstGeom>
+          <a:noFill/>
+        </p:spPr>
+        <p:txBody>
+          <a:bodyPr wrap="square" anchor="t" lIns="0" rIns="0" tIns="0" bIns="0"/>
+          <a:lstStyle/>
+          <a:p>
+            <a:pPr algn="r"/>
+            <a:r>
+              <a:rPr sz="1000" b="0" i="0">
+                <a:solidFill>
+                  <a:srgbClr val="54595D"/>
+                </a:solidFill>
+                <a:latin typeface="Calibri"/>
+              </a:rPr>
+              <a:t>15</a:t>
+            </a:r>
+          </a:p>
+        </p:txBody>
+      </p:sp>
+      <p:sp>
+        <p:nvSpPr>
+          <p:cNvPr id="6" name="Rounded Rectangle 5"/>
+          <p:cNvSpPr/>
+          <p:nvPr/>
+        </p:nvSpPr>
+        <p:spPr>
+          <a:xfrm>
+            <a:off x="548640" y="1508760"/>
+            <a:ext cx="2011680" cy="457200"/>
+          </a:xfrm>
+          <a:prstGeom prst="roundRect">
+            <a:avLst>
+              <a:gd name="adj" fmla="val 50000"/>
+            </a:avLst>
+          </a:prstGeom>
+          <a:solidFill>
+            <a:srgbClr val="4EA1FF"/>
+          </a:solidFill>
+          <a:ln>
+            <a:noFill/>
+          </a:ln>
+          <a:effectLst/>
+        </p:spPr>
+        <p:style>
+          <a:lnRef idx="1">
+            <a:schemeClr val="accent1"/>
+          </a:lnRef>
+          <a:fillRef idx="3">
+            <a:schemeClr val="accent1"/>
+          </a:fillRef>
+          <a:effectRef idx="2">
+            <a:schemeClr val="accent1"/>
+          </a:effectRef>
+          <a:fontRef idx="minor">
+            <a:schemeClr val="lt1"/>
+          </a:fontRef>
+        </p:style>
+        <p:txBody>
+          <a:bodyPr rtlCol="0" anchor="ctr"/>
+          <a:lstStyle/>
+          <a:p/>
+        </p:txBody>
+      </p:sp>
+      <p:sp>
+        <p:nvSpPr>
+          <p:cNvPr id="7" name="TextBox 6"/>
+          <p:cNvSpPr txBox="1"/>
+          <p:nvPr/>
+        </p:nvSpPr>
+        <p:spPr>
+          <a:xfrm>
+            <a:off x="548640" y="1508760"/>
+            <a:ext cx="2011680" cy="457200"/>
+          </a:xfrm>
+          <a:prstGeom prst="rect">
+            <a:avLst/>
+          </a:prstGeom>
+          <a:noFill/>
+        </p:spPr>
+        <p:txBody>
+          <a:bodyPr wrap="square" anchor="ctr" lIns="0" rIns="0" tIns="0" bIns="0"/>
+          <a:lstStyle/>
+          <a:p>
+            <a:pPr algn="ctr"/>
+            <a:r>
+              <a:rPr sz="1400" b="1" i="0">
+                <a:solidFill>
+                  <a:srgbClr val="202122"/>
+                </a:solidFill>
+                <a:latin typeface="Calibri"/>
+              </a:rPr>
+              <a:t>35 minutes</a:t>
+            </a:r>
+          </a:p>
+        </p:txBody>
+      </p:sp>
+      <p:sp>
+        <p:nvSpPr>
+          <p:cNvPr id="8" name="TextBox 7"/>
+          <p:cNvSpPr txBox="1"/>
+          <p:nvPr/>
+        </p:nvSpPr>
+        <p:spPr>
+          <a:xfrm>
+            <a:off x="2743200" y="1508760"/>
+            <a:ext cx="4754880" cy="457200"/>
+          </a:xfrm>
+          <a:prstGeom prst="rect">
+            <a:avLst/>
+          </a:prstGeom>
+          <a:noFill/>
+        </p:spPr>
+        <p:txBody>
+          <a:bodyPr wrap="square" anchor="ctr" lIns="0" rIns="0" tIns="0" bIns="0"/>
+          <a:lstStyle/>
+          <a:p>
+            <a:pPr algn="l"/>
+            <a:r>
+              <a:rPr sz="1400" b="0" i="1">
+                <a:solidFill>
+                  <a:srgbClr val="54595D"/>
+                </a:solidFill>
+                <a:latin typeface="Calibri"/>
+              </a:rPr>
+              <a:t>Pairs: user and technician, then swap</a:t>
+            </a:r>
+          </a:p>
+        </p:txBody>
+      </p:sp>
+      <p:sp>
+        <p:nvSpPr>
+          <p:cNvPr id="9" name="Oval 8"/>
+          <p:cNvSpPr/>
+          <p:nvPr/>
+        </p:nvSpPr>
+        <p:spPr>
+          <a:xfrm>
+            <a:off x="548640" y="2482596"/>
+            <a:ext cx="384048" cy="384048"/>
+          </a:xfrm>
+          <a:prstGeom prst="ellipse">
+            <a:avLst/>
+          </a:prstGeom>
+          <a:solidFill>
+            <a:srgbClr val="0645AD"/>
+          </a:solidFill>
+          <a:ln>
+            <a:noFill/>
+          </a:ln>
+          <a:effectLst/>
+        </p:spPr>
+        <p:style>
+          <a:lnRef idx="1">
+            <a:schemeClr val="accent1"/>
+          </a:lnRef>
+          <a:fillRef idx="3">
+            <a:schemeClr val="accent1"/>
+          </a:fillRef>
+          <a:effectRef idx="2">
+            <a:schemeClr val="accent1"/>
+          </a:effectRef>
+          <a:fontRef idx="minor">
+            <a:schemeClr val="lt1"/>
+          </a:fontRef>
+        </p:style>
+        <p:txBody>
+          <a:bodyPr rtlCol="0" anchor="ctr" lIns="0" rIns="0" tIns="0" bIns="0"/>
+          <a:lstStyle/>
+          <a:p>
+            <a:pPr algn="ctr"/>
+            <a:r>
+              <a:rPr sz="1300" b="1">
+                <a:solidFill>
+                  <a:srgbClr val="FFFFFF"/>
+                </a:solidFill>
+                <a:latin typeface="Calibri"/>
+              </a:rPr>
+              <a:t>1</a:t>
+            </a:r>
+          </a:p>
+        </p:txBody>
+      </p:sp>
+      <p:sp>
+        <p:nvSpPr>
+          <p:cNvPr id="10" name="TextBox 9"/>
+          <p:cNvSpPr txBox="1"/>
+          <p:nvPr/>
+        </p:nvSpPr>
+        <p:spPr>
+          <a:xfrm>
+            <a:off x="1143000" y="2240280"/>
+            <a:ext cx="5943600" cy="868680"/>
+          </a:xfrm>
+          <a:prstGeom prst="rect">
+            <a:avLst/>
+          </a:prstGeom>
+          <a:noFill/>
+        </p:spPr>
+        <p:txBody>
+          <a:bodyPr wrap="square" anchor="ctr" lIns="0" rIns="0" tIns="0" bIns="0"/>
+          <a:lstStyle/>
+          <a:p>
+            <a:pPr algn="l"/>
+            <a:r>
+              <a:rPr sz="1700" b="0" i="0">
+                <a:solidFill>
+                  <a:srgbClr val="202122"/>
+                </a:solidFill>
+                <a:latin typeface="Calibri"/>
+              </a:rPr>
+              <a:t>The user takes a fault card and describes only the symptoms.</a:t>
+            </a:r>
+          </a:p>
+        </p:txBody>
+      </p:sp>
+      <p:sp>
+        <p:nvSpPr>
+          <p:cNvPr id="11" name="Oval 10"/>
+          <p:cNvSpPr/>
+          <p:nvPr/>
+        </p:nvSpPr>
+        <p:spPr>
+          <a:xfrm>
+            <a:off x="548640" y="3461004"/>
+            <a:ext cx="384048" cy="384048"/>
+          </a:xfrm>
+          <a:prstGeom prst="ellipse">
+            <a:avLst/>
+          </a:prstGeom>
+          <a:solidFill>
+            <a:srgbClr val="0645AD"/>
+          </a:solidFill>
+          <a:ln>
+            <a:noFill/>
+          </a:ln>
+          <a:effectLst/>
+        </p:spPr>
+        <p:style>
+          <a:lnRef idx="1">
+            <a:schemeClr val="accent1"/>
+          </a:lnRef>
+          <a:fillRef idx="3">
+            <a:schemeClr val="accent1"/>
+          </a:fillRef>
+          <a:effectRef idx="2">
+            <a:schemeClr val="accent1"/>
+          </a:effectRef>
+          <a:fontRef idx="minor">
+            <a:schemeClr val="lt1"/>
+          </a:fontRef>
+        </p:style>
+        <p:txBody>
+          <a:bodyPr rtlCol="0" anchor="ctr" lIns="0" rIns="0" tIns="0" bIns="0"/>
+          <a:lstStyle/>
+          <a:p>
+            <a:pPr algn="ctr"/>
+            <a:r>
+              <a:rPr sz="1300" b="1">
+                <a:solidFill>
+                  <a:srgbClr val="FFFFFF"/>
+                </a:solidFill>
+                <a:latin typeface="Calibri"/>
+              </a:rPr>
+              <a:t>2</a:t>
+            </a:r>
+          </a:p>
+        </p:txBody>
+      </p:sp>
+      <p:sp>
+        <p:nvSpPr>
+          <p:cNvPr id="12" name="TextBox 11"/>
+          <p:cNvSpPr txBox="1"/>
+          <p:nvPr/>
+        </p:nvSpPr>
+        <p:spPr>
+          <a:xfrm>
+            <a:off x="1143000" y="3218688"/>
+            <a:ext cx="5943600" cy="868680"/>
+          </a:xfrm>
+          <a:prstGeom prst="rect">
+            <a:avLst/>
+          </a:prstGeom>
+          <a:noFill/>
+        </p:spPr>
+        <p:txBody>
+          <a:bodyPr wrap="square" anchor="ctr" lIns="0" rIns="0" tIns="0" bIns="0"/>
+          <a:lstStyle/>
+          <a:p>
+            <a:pPr algn="l"/>
+            <a:r>
+              <a:rPr sz="1700" b="0" i="0">
+                <a:solidFill>
+                  <a:srgbClr val="202122"/>
+                </a:solidFill>
+                <a:latin typeface="Calibri"/>
+              </a:rPr>
+              <a:t>The technician follows the troubleshooting method, asking questions.</a:t>
+            </a:r>
+          </a:p>
+        </p:txBody>
+      </p:sp>
+      <p:sp>
+        <p:nvSpPr>
+          <p:cNvPr id="13" name="Oval 12"/>
+          <p:cNvSpPr/>
+          <p:nvPr/>
+        </p:nvSpPr>
+        <p:spPr>
+          <a:xfrm>
+            <a:off x="548640" y="4439412"/>
+            <a:ext cx="384048" cy="384048"/>
+          </a:xfrm>
+          <a:prstGeom prst="ellipse">
+            <a:avLst/>
+          </a:prstGeom>
+          <a:solidFill>
+            <a:srgbClr val="0645AD"/>
+          </a:solidFill>
+          <a:ln>
+            <a:noFill/>
+          </a:ln>
+          <a:effectLst/>
+        </p:spPr>
+        <p:style>
+          <a:lnRef idx="1">
+            <a:schemeClr val="accent1"/>
+          </a:lnRef>
+          <a:fillRef idx="3">
+            <a:schemeClr val="accent1"/>
+          </a:fillRef>
+          <a:effectRef idx="2">
+            <a:schemeClr val="accent1"/>
+          </a:effectRef>
+          <a:fontRef idx="minor">
+            <a:schemeClr val="lt1"/>
+          </a:fontRef>
+        </p:style>
+        <p:txBody>
+          <a:bodyPr rtlCol="0" anchor="ctr" lIns="0" rIns="0" tIns="0" bIns="0"/>
+          <a:lstStyle/>
+          <a:p>
+            <a:pPr algn="ctr"/>
+            <a:r>
+              <a:rPr sz="1300" b="1">
+                <a:solidFill>
+                  <a:srgbClr val="FFFFFF"/>
+                </a:solidFill>
+                <a:latin typeface="Calibri"/>
+              </a:rPr>
+              <a:t>3</a:t>
+            </a:r>
+          </a:p>
+        </p:txBody>
+      </p:sp>
+      <p:sp>
+        <p:nvSpPr>
+          <p:cNvPr id="14" name="TextBox 13"/>
+          <p:cNvSpPr txBox="1"/>
+          <p:nvPr/>
+        </p:nvSpPr>
+        <p:spPr>
+          <a:xfrm>
+            <a:off x="1143000" y="4197096"/>
+            <a:ext cx="5943600" cy="868680"/>
+          </a:xfrm>
+          <a:prstGeom prst="rect">
+            <a:avLst/>
+          </a:prstGeom>
+          <a:noFill/>
+        </p:spPr>
+        <p:txBody>
+          <a:bodyPr wrap="square" anchor="ctr" lIns="0" rIns="0" tIns="0" bIns="0"/>
+          <a:lstStyle/>
+          <a:p>
+            <a:pPr algn="l"/>
+            <a:r>
+              <a:rPr sz="1700" b="0" i="0">
+                <a:solidFill>
+                  <a:srgbClr val="202122"/>
+                </a:solidFill>
+                <a:latin typeface="Calibri"/>
+              </a:rPr>
+              <a:t>The technician logs a full ticket: user, issue, steps, resolution, time taken.</a:t>
+            </a:r>
+          </a:p>
+        </p:txBody>
+      </p:sp>
+      <p:sp>
+        <p:nvSpPr>
+          <p:cNvPr id="15" name="Oval 14"/>
+          <p:cNvSpPr/>
+          <p:nvPr/>
+        </p:nvSpPr>
+        <p:spPr>
+          <a:xfrm>
+            <a:off x="548640" y="5417820"/>
+            <a:ext cx="384048" cy="384048"/>
+          </a:xfrm>
+          <a:prstGeom prst="ellipse">
+            <a:avLst/>
+          </a:prstGeom>
+          <a:solidFill>
+            <a:srgbClr val="0645AD"/>
+          </a:solidFill>
+          <a:ln>
+            <a:noFill/>
+          </a:ln>
+          <a:effectLst/>
+        </p:spPr>
+        <p:style>
+          <a:lnRef idx="1">
+            <a:schemeClr val="accent1"/>
+          </a:lnRef>
+          <a:fillRef idx="3">
+            <a:schemeClr val="accent1"/>
+          </a:fillRef>
+          <a:effectRef idx="2">
+            <a:schemeClr val="accent1"/>
+          </a:effectRef>
+          <a:fontRef idx="minor">
+            <a:schemeClr val="lt1"/>
+          </a:fontRef>
+        </p:style>
+        <p:txBody>
+          <a:bodyPr rtlCol="0" anchor="ctr" lIns="0" rIns="0" tIns="0" bIns="0"/>
+          <a:lstStyle/>
+          <a:p>
+            <a:pPr algn="ctr"/>
+            <a:r>
+              <a:rPr sz="1300" b="1">
+                <a:solidFill>
+                  <a:srgbClr val="FFFFFF"/>
+                </a:solidFill>
+                <a:latin typeface="Calibri"/>
+              </a:rPr>
+              <a:t>4</a:t>
+            </a:r>
+          </a:p>
+        </p:txBody>
+      </p:sp>
+      <p:sp>
+        <p:nvSpPr>
+          <p:cNvPr id="16" name="TextBox 15"/>
+          <p:cNvSpPr txBox="1"/>
+          <p:nvPr/>
+        </p:nvSpPr>
+        <p:spPr>
+          <a:xfrm>
+            <a:off x="1143000" y="5175504"/>
+            <a:ext cx="5943600" cy="868680"/>
+          </a:xfrm>
+          <a:prstGeom prst="rect">
+            <a:avLst/>
+          </a:prstGeom>
+          <a:noFill/>
+        </p:spPr>
+        <p:txBody>
+          <a:bodyPr wrap="square" anchor="ctr" lIns="0" rIns="0" tIns="0" bIns="0"/>
+          <a:lstStyle/>
+          <a:p>
+            <a:pPr algn="l"/>
+            <a:r>
+              <a:rPr sz="1700" b="0" i="0">
+                <a:solidFill>
+                  <a:srgbClr val="202122"/>
+                </a:solidFill>
+                <a:latin typeface="Calibri"/>
+              </a:rPr>
+              <a:t>Swap roles with a new fault card.</a:t>
+            </a:r>
+          </a:p>
+        </p:txBody>
+      </p:sp>
+      <p:sp>
+        <p:nvSpPr>
+          <p:cNvPr id="17" name="Rounded Rectangle 16"/>
+          <p:cNvSpPr/>
+          <p:nvPr/>
+        </p:nvSpPr>
+        <p:spPr>
+          <a:xfrm>
+            <a:off x="7772400" y="1508760"/>
+            <a:ext cx="3867912" cy="4572000"/>
+          </a:xfrm>
+          <a:prstGeom prst="roundRect">
+            <a:avLst>
+              <a:gd name="adj" fmla="val 8000"/>
+            </a:avLst>
+          </a:prstGeom>
+          <a:solidFill>
+            <a:srgbClr val="EAF3FF"/>
+          </a:solidFill>
+          <a:ln>
+            <a:noFill/>
+          </a:ln>
+          <a:effectLst/>
+        </p:spPr>
+        <p:style>
+          <a:lnRef idx="1">
+            <a:schemeClr val="accent1"/>
+          </a:lnRef>
+          <a:fillRef idx="3">
+            <a:schemeClr val="accent1"/>
+          </a:fillRef>
+          <a:effectRef idx="2">
+            <a:schemeClr val="accent1"/>
+          </a:effectRef>
+          <a:fontRef idx="minor">
+            <a:schemeClr val="lt1"/>
+          </a:fontRef>
+        </p:style>
+        <p:txBody>
+          <a:bodyPr rtlCol="0" anchor="ctr"/>
+          <a:lstStyle/>
+          <a:p/>
+        </p:txBody>
+      </p:sp>
+      <p:sp>
+        <p:nvSpPr>
+          <p:cNvPr id="18" name="TextBox 17"/>
+          <p:cNvSpPr txBox="1"/>
+          <p:nvPr/>
+        </p:nvSpPr>
+        <p:spPr>
+          <a:xfrm>
+            <a:off x="8046720" y="1737360"/>
+            <a:ext cx="3291840" cy="365760"/>
+          </a:xfrm>
+          <a:prstGeom prst="rect">
+            <a:avLst/>
+          </a:prstGeom>
+          <a:noFill/>
+        </p:spPr>
+        <p:txBody>
+          <a:bodyPr wrap="square" anchor="t" lIns="0" rIns="0" tIns="0" bIns="0"/>
+          <a:lstStyle/>
+          <a:p>
+            <a:pPr algn="l"/>
+            <a:r>
+              <a:rPr sz="1300" b="1" i="0">
+                <a:solidFill>
+                  <a:srgbClr val="0645AD"/>
+                </a:solidFill>
+                <a:latin typeface="Calibri"/>
+              </a:rPr>
+              <a:t>SUCCESS CRITERIA</a:t>
+            </a:r>
+          </a:p>
+        </p:txBody>
+      </p:sp>
+      <p:sp>
+        <p:nvSpPr>
+          <p:cNvPr id="19" name="TextBox 18"/>
+          <p:cNvSpPr txBox="1"/>
+          <p:nvPr/>
+        </p:nvSpPr>
+        <p:spPr>
+          <a:xfrm>
+            <a:off x="8046720" y="2240280"/>
+            <a:ext cx="3337560" cy="3657600"/>
+          </a:xfrm>
+          <a:prstGeom prst="rect">
+            <a:avLst/>
+          </a:prstGeom>
+          <a:noFill/>
+        </p:spPr>
+        <p:txBody>
+          <a:bodyPr wrap="square" lIns="0" rIns="0" tIns="0" bIns="0">
+            <a:spAutoFit/>
+          </a:bodyPr>
+          <a:lstStyle/>
+          <a:p>
+            <a:pPr marL="274320" indent="-274320">
+              <a:spcAft>
+                <a:spcPts val="810"/>
+              </a:spcAft>
+              <a:buClr>
+                <a:srgbClr val="0645AD"/>
+              </a:buClr>
+              <a:buFont typeface="Arial"/>
+              <a:buChar char="•"/>
+            </a:pPr>
+            <a:r>
+              <a:rPr sz="1800" b="0">
+                <a:solidFill>
+                  <a:srgbClr val="202122"/>
+                </a:solidFill>
+                <a:latin typeface="Calibri"/>
+              </a:rPr>
+              <a:t>Method followed in order</a:t>
+            </a:r>
+          </a:p>
+          <a:p>
+            <a:pPr marL="274320" indent="-274320">
+              <a:spcAft>
+                <a:spcPts val="810"/>
+              </a:spcAft>
+              <a:buClr>
+                <a:srgbClr val="0645AD"/>
+              </a:buClr>
+              <a:buFont typeface="Arial"/>
+              <a:buChar char="•"/>
+            </a:pPr>
+            <a:r>
+              <a:rPr sz="1800" b="0">
+                <a:solidFill>
+                  <a:srgbClr val="202122"/>
+                </a:solidFill>
+                <a:latin typeface="Calibri"/>
+              </a:rPr>
+              <a:t>Ticket is complete and clear</a:t>
+            </a:r>
+          </a:p>
+          <a:p>
+            <a:pPr marL="274320" indent="-274320">
+              <a:spcAft>
+                <a:spcPts val="810"/>
+              </a:spcAft>
+              <a:buClr>
+                <a:srgbClr val="0645AD"/>
+              </a:buClr>
+              <a:buFont typeface="Arial"/>
+              <a:buChar char="•"/>
+            </a:pPr>
+            <a:r>
+              <a:rPr sz="1800" b="0">
+                <a:solidFill>
+                  <a:srgbClr val="202122"/>
+                </a:solidFill>
+                <a:latin typeface="Calibri"/>
+              </a:rPr>
+              <a:t>Preventive action suggested</a:t>
+            </a:r>
+          </a:p>
+        </p:txBody>
+      </p:sp>
+    </p:spTree>
+  </p:cSld>
+  <p:clrMapOvr>
+    <a:masterClrMapping/>
+  </p:clrMapOvr>
+</p:sld>
+</file>
+
+<file path=ppt/slides/slide16.xml><?xml version="1.0" encoding="utf-8"?>
+<p:sld xmlns:a="http://schemas.openxmlformats.org/drawingml/2006/main" xmlns:p="http://schemas.openxmlformats.org/presentationml/2006/main" xmlns:r="http://schemas.openxmlformats.org/officeDocument/2006/relationships">
+  <p:cSld>
+    <p:bg>
+      <p:bgPr>
+        <a:solidFill>
           <a:srgbClr val="03306E"/>
         </a:solidFill>
         <a:effectLst/>
@@ -5369,22 +9487,93 @@
       </p:sp>
       <p:sp>
         <p:nvSpPr>
-          <p:cNvPr id="6" name="Rounded Rectangle 5"/>
+          <p:cNvPr id="6" name="TextBox 5"/>
+          <p:cNvSpPr txBox="1"/>
+          <p:nvPr/>
+        </p:nvSpPr>
+        <p:spPr>
+          <a:xfrm>
+            <a:off x="548640" y="1554480"/>
+            <a:ext cx="6720840" cy="4617720"/>
+          </a:xfrm>
+          <a:prstGeom prst="rect">
+            <a:avLst/>
+          </a:prstGeom>
+          <a:noFill/>
+        </p:spPr>
+        <p:txBody>
+          <a:bodyPr wrap="square" lIns="0" rIns="0" tIns="0" bIns="0">
+            <a:spAutoFit/>
+          </a:bodyPr>
+          <a:lstStyle/>
+          <a:p>
+            <a:pPr>
+              <a:spcAft>
+                <a:spcPts val="1320"/>
+              </a:spcAft>
+            </a:pPr>
+            <a:r>
+              <a:rPr sz="2200" b="0">
+                <a:solidFill>
+                  <a:srgbClr val="202122"/>
+                </a:solidFill>
+                <a:latin typeface="Calibri"/>
+              </a:rPr>
+              <a:t>A service or content management system (CMS) is the support team's central tool.</a:t>
+            </a:r>
+          </a:p>
+          <a:p>
+            <a:pPr>
+              <a:spcAft>
+                <a:spcPts val="1320"/>
+              </a:spcAft>
+            </a:pPr>
+            <a:r>
+              <a:rPr sz="2200" b="0">
+                <a:solidFill>
+                  <a:srgbClr val="202122"/>
+                </a:solidFill>
+                <a:latin typeface="Calibri"/>
+              </a:rPr>
+              <a:t>Incident and request management logs, tracks, opens and closes tickets. Knowledge management collects fixes and spots training needs. Change management supports the rollout of new systems. Configuration and asset management tracks licences, hardware and software requests, and decommissioning.</a:t>
+            </a:r>
+          </a:p>
+          <a:p>
+            <a:pPr>
+              <a:spcAft>
+                <a:spcPts val="1320"/>
+              </a:spcAft>
+            </a:pPr>
+            <a:r>
+              <a:rPr sz="2200" b="0">
+                <a:solidFill>
+                  <a:srgbClr val="202122"/>
+                </a:solidFill>
+                <a:latin typeface="Calibri"/>
+              </a:rPr>
+              <a:t>Because everything is recorded, the team can see trends, share fixes and prove they met their service levels.</a:t>
+            </a:r>
+          </a:p>
+        </p:txBody>
+      </p:sp>
+      <p:sp>
+        <p:nvSpPr>
+          <p:cNvPr id="7" name="Rounded Rectangle 6"/>
           <p:cNvSpPr/>
           <p:nvPr/>
         </p:nvSpPr>
         <p:spPr>
           <a:xfrm>
-            <a:off x="548640" y="1600200"/>
-            <a:ext cx="5410047" cy="2148840"/>
+            <a:off x="7772400" y="1554480"/>
+            <a:ext cx="3867912" cy="4526280"/>
           </a:xfrm>
           <a:prstGeom prst="roundRect">
             <a:avLst>
-              <a:gd name="adj" fmla="val 6000"/>
+              <a:gd name="adj" fmla="val 8000"/>
             </a:avLst>
           </a:prstGeom>
           <a:solidFill>
-            <a:srgbClr val="EAF3FF"/>
+            <a:srgbClr val="03306E"/>
           </a:solidFill>
           <a:ln>
             <a:noFill/>
@@ -5413,14 +9602,14 @@
       </p:sp>
       <p:sp>
         <p:nvSpPr>
-          <p:cNvPr id="7" name="Oval 6"/>
+          <p:cNvPr id="8" name="Oval 7"/>
           <p:cNvSpPr/>
           <p:nvPr/>
         </p:nvSpPr>
         <p:spPr>
           <a:xfrm>
-            <a:off x="777240" y="1828800"/>
-            <a:ext cx="457200" cy="457200"/>
+            <a:off x="8046720" y="1828800"/>
+            <a:ext cx="548640" cy="548640"/>
           </a:xfrm>
           <a:prstGeom prst="ellipse">
             <a:avLst/>
@@ -5453,60 +9642,60 @@
           <a:p>
             <a:pPr algn="ctr"/>
             <a:r>
-              <a:rPr sz="1500" b="1">
+              <a:rPr sz="1300" b="1">
                 <a:solidFill>
                   <a:srgbClr val="202122"/>
                 </a:solidFill>
                 <a:latin typeface="Calibri"/>
               </a:rPr>
-              <a:t>1</a:t>
-            </a:r>
-          </a:p>
-        </p:txBody>
-      </p:sp>
-      <p:sp>
-        <p:nvSpPr>
-          <p:cNvPr id="8" name="TextBox 7"/>
-          <p:cNvSpPr txBox="1"/>
-          <p:nvPr/>
-        </p:nvSpPr>
-        <p:spPr>
-          <a:xfrm>
-            <a:off x="1371600" y="1801368"/>
-            <a:ext cx="4404207" cy="512064"/>
-          </a:xfrm>
-          <a:prstGeom prst="rect">
-            <a:avLst/>
-          </a:prstGeom>
-          <a:noFill/>
-        </p:spPr>
-        <p:txBody>
-          <a:bodyPr wrap="square" anchor="ctr" lIns="0" rIns="0" tIns="0" bIns="0"/>
+              <a:t>e.g.</a:t>
+            </a:r>
+          </a:p>
+        </p:txBody>
+      </p:sp>
+      <p:sp>
+        <p:nvSpPr>
+          <p:cNvPr id="9" name="TextBox 8"/>
+          <p:cNvSpPr txBox="1"/>
+          <p:nvPr/>
+        </p:nvSpPr>
+        <p:spPr>
+          <a:xfrm>
+            <a:off x="8046720" y="2560320"/>
+            <a:ext cx="3291840" cy="365760"/>
+          </a:xfrm>
+          <a:prstGeom prst="rect">
+            <a:avLst/>
+          </a:prstGeom>
+          <a:noFill/>
+        </p:spPr>
+        <p:txBody>
+          <a:bodyPr wrap="square" anchor="t" lIns="0" rIns="0" tIns="0" bIns="0"/>
           <a:lstStyle/>
           <a:p>
             <a:pPr algn="l"/>
             <a:r>
-              <a:rPr sz="1900" b="1" i="0">
-                <a:solidFill>
-                  <a:srgbClr val="03306E"/>
-                </a:solidFill>
-                <a:latin typeface="Calibri"/>
-              </a:rPr>
-              <a:t>Incidents and requests</a:t>
-            </a:r>
-          </a:p>
-        </p:txBody>
-      </p:sp>
-      <p:sp>
-        <p:nvSpPr>
-          <p:cNvPr id="9" name="TextBox 8"/>
-          <p:cNvSpPr txBox="1"/>
-          <p:nvPr/>
-        </p:nvSpPr>
-        <p:spPr>
-          <a:xfrm>
-            <a:off x="777240" y="2468880"/>
-            <a:ext cx="4952847" cy="1143000"/>
+              <a:rPr sz="1300" b="1" i="0">
+                <a:solidFill>
+                  <a:srgbClr val="A9C8F0"/>
+                </a:solidFill>
+                <a:latin typeface="Calibri"/>
+              </a:rPr>
+              <a:t>EXAMPLE</a:t>
+            </a:r>
+          </a:p>
+        </p:txBody>
+      </p:sp>
+      <p:sp>
+        <p:nvSpPr>
+          <p:cNvPr id="10" name="TextBox 9"/>
+          <p:cNvSpPr txBox="1"/>
+          <p:nvPr/>
+        </p:nvSpPr>
+        <p:spPr>
+          <a:xfrm>
+            <a:off x="8046720" y="2971800"/>
+            <a:ext cx="3291840" cy="2971800"/>
           </a:xfrm>
           <a:prstGeom prst="rect">
             <a:avLst/>
@@ -5519,502 +9708,13 @@
           <a:p>
             <a:pPr algn="l"/>
             <a:r>
-              <a:rPr sz="2000" b="0" i="0">
-                <a:solidFill>
-                  <a:srgbClr val="202122"/>
-                </a:solidFill>
-                <a:latin typeface="Calibri"/>
-              </a:rPr>
-              <a:t>Log, track, open and close tickets.</a:t>
-            </a:r>
-          </a:p>
-        </p:txBody>
-      </p:sp>
-      <p:sp>
-        <p:nvSpPr>
-          <p:cNvPr id="10" name="Rounded Rectangle 9"/>
-          <p:cNvSpPr/>
-          <p:nvPr/>
-        </p:nvSpPr>
-        <p:spPr>
-          <a:xfrm>
-            <a:off x="6233007" y="1600200"/>
-            <a:ext cx="5410047" cy="2148840"/>
-          </a:xfrm>
-          <a:prstGeom prst="roundRect">
-            <a:avLst>
-              <a:gd name="adj" fmla="val 6000"/>
-            </a:avLst>
-          </a:prstGeom>
-          <a:solidFill>
-            <a:srgbClr val="EAF3FF"/>
-          </a:solidFill>
-          <a:ln>
-            <a:noFill/>
-          </a:ln>
-          <a:effectLst/>
-        </p:spPr>
-        <p:style>
-          <a:lnRef idx="1">
-            <a:schemeClr val="accent1"/>
-          </a:lnRef>
-          <a:fillRef idx="3">
-            <a:schemeClr val="accent1"/>
-          </a:fillRef>
-          <a:effectRef idx="2">
-            <a:schemeClr val="accent1"/>
-          </a:effectRef>
-          <a:fontRef idx="minor">
-            <a:schemeClr val="lt1"/>
-          </a:fontRef>
-        </p:style>
-        <p:txBody>
-          <a:bodyPr rtlCol="0" anchor="ctr"/>
-          <a:lstStyle/>
-          <a:p/>
-        </p:txBody>
-      </p:sp>
-      <p:sp>
-        <p:nvSpPr>
-          <p:cNvPr id="11" name="Oval 10"/>
-          <p:cNvSpPr/>
-          <p:nvPr/>
-        </p:nvSpPr>
-        <p:spPr>
-          <a:xfrm>
-            <a:off x="6461607" y="1828800"/>
-            <a:ext cx="457200" cy="457200"/>
-          </a:xfrm>
-          <a:prstGeom prst="ellipse">
-            <a:avLst/>
-          </a:prstGeom>
-          <a:solidFill>
-            <a:srgbClr val="4EA1FF"/>
-          </a:solidFill>
-          <a:ln>
-            <a:noFill/>
-          </a:ln>
-          <a:effectLst/>
-        </p:spPr>
-        <p:style>
-          <a:lnRef idx="1">
-            <a:schemeClr val="accent1"/>
-          </a:lnRef>
-          <a:fillRef idx="3">
-            <a:schemeClr val="accent1"/>
-          </a:fillRef>
-          <a:effectRef idx="2">
-            <a:schemeClr val="accent1"/>
-          </a:effectRef>
-          <a:fontRef idx="minor">
-            <a:schemeClr val="lt1"/>
-          </a:fontRef>
-        </p:style>
-        <p:txBody>
-          <a:bodyPr rtlCol="0" anchor="ctr" lIns="0" rIns="0" tIns="0" bIns="0"/>
-          <a:lstStyle/>
-          <a:p>
-            <a:pPr algn="ctr"/>
-            <a:r>
-              <a:rPr sz="1500" b="1">
-                <a:solidFill>
-                  <a:srgbClr val="202122"/>
-                </a:solidFill>
-                <a:latin typeface="Calibri"/>
-              </a:rPr>
-              <a:t>2</a:t>
-            </a:r>
-          </a:p>
-        </p:txBody>
-      </p:sp>
-      <p:sp>
-        <p:nvSpPr>
-          <p:cNvPr id="12" name="TextBox 11"/>
-          <p:cNvSpPr txBox="1"/>
-          <p:nvPr/>
-        </p:nvSpPr>
-        <p:spPr>
-          <a:xfrm>
-            <a:off x="7055967" y="1801368"/>
-            <a:ext cx="4404207" cy="512064"/>
-          </a:xfrm>
-          <a:prstGeom prst="rect">
-            <a:avLst/>
-          </a:prstGeom>
-          <a:noFill/>
-        </p:spPr>
-        <p:txBody>
-          <a:bodyPr wrap="square" anchor="ctr" lIns="0" rIns="0" tIns="0" bIns="0"/>
-          <a:lstStyle/>
-          <a:p>
-            <a:pPr algn="l"/>
-            <a:r>
-              <a:rPr sz="1900" b="1" i="0">
-                <a:solidFill>
-                  <a:srgbClr val="03306E"/>
-                </a:solidFill>
-                <a:latin typeface="Calibri"/>
-              </a:rPr>
-              <a:t>Knowledge</a:t>
-            </a:r>
-          </a:p>
-        </p:txBody>
-      </p:sp>
-      <p:sp>
-        <p:nvSpPr>
-          <p:cNvPr id="13" name="TextBox 12"/>
-          <p:cNvSpPr txBox="1"/>
-          <p:nvPr/>
-        </p:nvSpPr>
-        <p:spPr>
-          <a:xfrm>
-            <a:off x="6461607" y="2468880"/>
-            <a:ext cx="4952847" cy="1143000"/>
-          </a:xfrm>
-          <a:prstGeom prst="rect">
-            <a:avLst/>
-          </a:prstGeom>
-          <a:noFill/>
-        </p:spPr>
-        <p:txBody>
-          <a:bodyPr wrap="square" anchor="t" lIns="0" rIns="0" tIns="0" bIns="0"/>
-          <a:lstStyle/>
-          <a:p>
-            <a:pPr algn="l"/>
-            <a:r>
-              <a:rPr sz="2000" b="0" i="0">
-                <a:solidFill>
-                  <a:srgbClr val="202122"/>
-                </a:solidFill>
-                <a:latin typeface="Calibri"/>
-              </a:rPr>
-              <a:t>Collate support knowledge and spot training needs.</a:t>
-            </a:r>
-          </a:p>
-        </p:txBody>
-      </p:sp>
-      <p:sp>
-        <p:nvSpPr>
-          <p:cNvPr id="14" name="Rounded Rectangle 13"/>
-          <p:cNvSpPr/>
-          <p:nvPr/>
-        </p:nvSpPr>
-        <p:spPr>
-          <a:xfrm>
-            <a:off x="548640" y="4023360"/>
-            <a:ext cx="5410047" cy="2148840"/>
-          </a:xfrm>
-          <a:prstGeom prst="roundRect">
-            <a:avLst>
-              <a:gd name="adj" fmla="val 6000"/>
-            </a:avLst>
-          </a:prstGeom>
-          <a:solidFill>
-            <a:srgbClr val="EAF3FF"/>
-          </a:solidFill>
-          <a:ln>
-            <a:noFill/>
-          </a:ln>
-          <a:effectLst/>
-        </p:spPr>
-        <p:style>
-          <a:lnRef idx="1">
-            <a:schemeClr val="accent1"/>
-          </a:lnRef>
-          <a:fillRef idx="3">
-            <a:schemeClr val="accent1"/>
-          </a:fillRef>
-          <a:effectRef idx="2">
-            <a:schemeClr val="accent1"/>
-          </a:effectRef>
-          <a:fontRef idx="minor">
-            <a:schemeClr val="lt1"/>
-          </a:fontRef>
-        </p:style>
-        <p:txBody>
-          <a:bodyPr rtlCol="0" anchor="ctr"/>
-          <a:lstStyle/>
-          <a:p/>
-        </p:txBody>
-      </p:sp>
-      <p:sp>
-        <p:nvSpPr>
-          <p:cNvPr id="15" name="Oval 14"/>
-          <p:cNvSpPr/>
-          <p:nvPr/>
-        </p:nvSpPr>
-        <p:spPr>
-          <a:xfrm>
-            <a:off x="777240" y="4251960"/>
-            <a:ext cx="457200" cy="457200"/>
-          </a:xfrm>
-          <a:prstGeom prst="ellipse">
-            <a:avLst/>
-          </a:prstGeom>
-          <a:solidFill>
-            <a:srgbClr val="4EA1FF"/>
-          </a:solidFill>
-          <a:ln>
-            <a:noFill/>
-          </a:ln>
-          <a:effectLst/>
-        </p:spPr>
-        <p:style>
-          <a:lnRef idx="1">
-            <a:schemeClr val="accent1"/>
-          </a:lnRef>
-          <a:fillRef idx="3">
-            <a:schemeClr val="accent1"/>
-          </a:fillRef>
-          <a:effectRef idx="2">
-            <a:schemeClr val="accent1"/>
-          </a:effectRef>
-          <a:fontRef idx="minor">
-            <a:schemeClr val="lt1"/>
-          </a:fontRef>
-        </p:style>
-        <p:txBody>
-          <a:bodyPr rtlCol="0" anchor="ctr" lIns="0" rIns="0" tIns="0" bIns="0"/>
-          <a:lstStyle/>
-          <a:p>
-            <a:pPr algn="ctr"/>
-            <a:r>
-              <a:rPr sz="1500" b="1">
-                <a:solidFill>
-                  <a:srgbClr val="202122"/>
-                </a:solidFill>
-                <a:latin typeface="Calibri"/>
-              </a:rPr>
-              <a:t>3</a:t>
-            </a:r>
-          </a:p>
-        </p:txBody>
-      </p:sp>
-      <p:sp>
-        <p:nvSpPr>
-          <p:cNvPr id="16" name="TextBox 15"/>
-          <p:cNvSpPr txBox="1"/>
-          <p:nvPr/>
-        </p:nvSpPr>
-        <p:spPr>
-          <a:xfrm>
-            <a:off x="1371600" y="4224528"/>
-            <a:ext cx="4404207" cy="512064"/>
-          </a:xfrm>
-          <a:prstGeom prst="rect">
-            <a:avLst/>
-          </a:prstGeom>
-          <a:noFill/>
-        </p:spPr>
-        <p:txBody>
-          <a:bodyPr wrap="square" anchor="ctr" lIns="0" rIns="0" tIns="0" bIns="0"/>
-          <a:lstStyle/>
-          <a:p>
-            <a:pPr algn="l"/>
-            <a:r>
-              <a:rPr sz="1900" b="1" i="0">
-                <a:solidFill>
-                  <a:srgbClr val="03306E"/>
-                </a:solidFill>
-                <a:latin typeface="Calibri"/>
-              </a:rPr>
-              <a:t>Change</a:t>
-            </a:r>
-          </a:p>
-        </p:txBody>
-      </p:sp>
-      <p:sp>
-        <p:nvSpPr>
-          <p:cNvPr id="17" name="TextBox 16"/>
-          <p:cNvSpPr txBox="1"/>
-          <p:nvPr/>
-        </p:nvSpPr>
-        <p:spPr>
-          <a:xfrm>
-            <a:off x="777240" y="4892040"/>
-            <a:ext cx="4952847" cy="1143000"/>
-          </a:xfrm>
-          <a:prstGeom prst="rect">
-            <a:avLst/>
-          </a:prstGeom>
-          <a:noFill/>
-        </p:spPr>
-        <p:txBody>
-          <a:bodyPr wrap="square" anchor="t" lIns="0" rIns="0" tIns="0" bIns="0"/>
-          <a:lstStyle/>
-          <a:p>
-            <a:pPr algn="l"/>
-            <a:r>
-              <a:rPr sz="2000" b="0" i="0">
-                <a:solidFill>
-                  <a:srgbClr val="202122"/>
-                </a:solidFill>
-                <a:latin typeface="Calibri"/>
-              </a:rPr>
-              <a:t>Support the rollout of new systems.</a:t>
-            </a:r>
-          </a:p>
-        </p:txBody>
-      </p:sp>
-      <p:sp>
-        <p:nvSpPr>
-          <p:cNvPr id="18" name="Rounded Rectangle 17"/>
-          <p:cNvSpPr/>
-          <p:nvPr/>
-        </p:nvSpPr>
-        <p:spPr>
-          <a:xfrm>
-            <a:off x="6233007" y="4023360"/>
-            <a:ext cx="5410047" cy="2148840"/>
-          </a:xfrm>
-          <a:prstGeom prst="roundRect">
-            <a:avLst>
-              <a:gd name="adj" fmla="val 6000"/>
-            </a:avLst>
-          </a:prstGeom>
-          <a:solidFill>
-            <a:srgbClr val="EAF3FF"/>
-          </a:solidFill>
-          <a:ln>
-            <a:noFill/>
-          </a:ln>
-          <a:effectLst/>
-        </p:spPr>
-        <p:style>
-          <a:lnRef idx="1">
-            <a:schemeClr val="accent1"/>
-          </a:lnRef>
-          <a:fillRef idx="3">
-            <a:schemeClr val="accent1"/>
-          </a:fillRef>
-          <a:effectRef idx="2">
-            <a:schemeClr val="accent1"/>
-          </a:effectRef>
-          <a:fontRef idx="minor">
-            <a:schemeClr val="lt1"/>
-          </a:fontRef>
-        </p:style>
-        <p:txBody>
-          <a:bodyPr rtlCol="0" anchor="ctr"/>
-          <a:lstStyle/>
-          <a:p/>
-        </p:txBody>
-      </p:sp>
-      <p:sp>
-        <p:nvSpPr>
-          <p:cNvPr id="19" name="Oval 18"/>
-          <p:cNvSpPr/>
-          <p:nvPr/>
-        </p:nvSpPr>
-        <p:spPr>
-          <a:xfrm>
-            <a:off x="6461607" y="4251960"/>
-            <a:ext cx="457200" cy="457200"/>
-          </a:xfrm>
-          <a:prstGeom prst="ellipse">
-            <a:avLst/>
-          </a:prstGeom>
-          <a:solidFill>
-            <a:srgbClr val="4EA1FF"/>
-          </a:solidFill>
-          <a:ln>
-            <a:noFill/>
-          </a:ln>
-          <a:effectLst/>
-        </p:spPr>
-        <p:style>
-          <a:lnRef idx="1">
-            <a:schemeClr val="accent1"/>
-          </a:lnRef>
-          <a:fillRef idx="3">
-            <a:schemeClr val="accent1"/>
-          </a:fillRef>
-          <a:effectRef idx="2">
-            <a:schemeClr val="accent1"/>
-          </a:effectRef>
-          <a:fontRef idx="minor">
-            <a:schemeClr val="lt1"/>
-          </a:fontRef>
-        </p:style>
-        <p:txBody>
-          <a:bodyPr rtlCol="0" anchor="ctr" lIns="0" rIns="0" tIns="0" bIns="0"/>
-          <a:lstStyle/>
-          <a:p>
-            <a:pPr algn="ctr"/>
-            <a:r>
-              <a:rPr sz="1500" b="1">
-                <a:solidFill>
-                  <a:srgbClr val="202122"/>
-                </a:solidFill>
-                <a:latin typeface="Calibri"/>
-              </a:rPr>
-              <a:t>4</a:t>
-            </a:r>
-          </a:p>
-        </p:txBody>
-      </p:sp>
-      <p:sp>
-        <p:nvSpPr>
-          <p:cNvPr id="20" name="TextBox 19"/>
-          <p:cNvSpPr txBox="1"/>
-          <p:nvPr/>
-        </p:nvSpPr>
-        <p:spPr>
-          <a:xfrm>
-            <a:off x="7055967" y="4224528"/>
-            <a:ext cx="4404207" cy="512064"/>
-          </a:xfrm>
-          <a:prstGeom prst="rect">
-            <a:avLst/>
-          </a:prstGeom>
-          <a:noFill/>
-        </p:spPr>
-        <p:txBody>
-          <a:bodyPr wrap="square" anchor="ctr" lIns="0" rIns="0" tIns="0" bIns="0"/>
-          <a:lstStyle/>
-          <a:p>
-            <a:pPr algn="l"/>
-            <a:r>
-              <a:rPr sz="1900" b="1" i="0">
-                <a:solidFill>
-                  <a:srgbClr val="03306E"/>
-                </a:solidFill>
-                <a:latin typeface="Calibri"/>
-              </a:rPr>
-              <a:t>Configuration and assets</a:t>
-            </a:r>
-          </a:p>
-        </p:txBody>
-      </p:sp>
-      <p:sp>
-        <p:nvSpPr>
-          <p:cNvPr id="21" name="TextBox 20"/>
-          <p:cNvSpPr txBox="1"/>
-          <p:nvPr/>
-        </p:nvSpPr>
-        <p:spPr>
-          <a:xfrm>
-            <a:off x="6461607" y="4892040"/>
-            <a:ext cx="4952847" cy="1143000"/>
-          </a:xfrm>
-          <a:prstGeom prst="rect">
-            <a:avLst/>
-          </a:prstGeom>
-          <a:noFill/>
-        </p:spPr>
-        <p:txBody>
-          <a:bodyPr wrap="square" anchor="t" lIns="0" rIns="0" tIns="0" bIns="0"/>
-          <a:lstStyle/>
-          <a:p>
-            <a:pPr algn="l"/>
-            <a:r>
-              <a:rPr sz="2000" b="0" i="0">
-                <a:solidFill>
-                  <a:srgbClr val="202122"/>
-                </a:solidFill>
-                <a:latin typeface="Calibri"/>
-              </a:rPr>
-              <a:t>Licences, hardware and software requests, decommissioning.</a:t>
+              <a:rPr sz="1900" b="0" i="0">
+                <a:solidFill>
+                  <a:srgbClr val="FFFFFF"/>
+                </a:solidFill>
+                <a:latin typeface="Cambria"/>
+              </a:rPr>
+              <a:t>The CMS shows 40 tickets about the same VPN error this week: the team writes one knowledge article and fixes the root cause.</a:t>
             </a:r>
           </a:p>
         </p:txBody>
@@ -6106,7 +9806,7 @@
                 </a:solidFill>
                 <a:latin typeface="Cambria"/>
               </a:rPr>
-              <a:t>The troubleshooting method</a:t>
+              <a:t>What the CMS does</a:t>
             </a:r>
           </a:p>
         </p:txBody>
@@ -6179,20 +9879,22 @@
       </p:sp>
       <p:sp>
         <p:nvSpPr>
-          <p:cNvPr id="6" name="Rectangle 5"/>
+          <p:cNvPr id="6" name="Rounded Rectangle 5"/>
           <p:cNvSpPr/>
           <p:nvPr/>
         </p:nvSpPr>
         <p:spPr>
           <a:xfrm>
-            <a:off x="1416024" y="2884932"/>
-            <a:ext cx="9359646" cy="36576"/>
-          </a:xfrm>
-          <a:prstGeom prst="rect">
-            <a:avLst/>
+            <a:off x="548640" y="1600200"/>
+            <a:ext cx="5410047" cy="2148840"/>
+          </a:xfrm>
+          <a:prstGeom prst="roundRect">
+            <a:avLst>
+              <a:gd name="adj" fmla="val 6000"/>
+            </a:avLst>
           </a:prstGeom>
           <a:solidFill>
-            <a:srgbClr val="A9C8F0"/>
+            <a:srgbClr val="EAF3FF"/>
           </a:solidFill>
           <a:ln>
             <a:noFill/>
@@ -6227,8 +9929,8 @@
         </p:nvSpPr>
         <p:spPr>
           <a:xfrm>
-            <a:off x="1095984" y="2583180"/>
-            <a:ext cx="640080" cy="640080"/>
+            <a:off x="777240" y="1828800"/>
+            <a:ext cx="457200" cy="457200"/>
           </a:xfrm>
           <a:prstGeom prst="ellipse">
             <a:avLst/>
@@ -6261,7 +9963,7 @@
           <a:p>
             <a:pPr algn="ctr"/>
             <a:r>
-              <a:rPr sz="2000" b="1">
+              <a:rPr sz="1500" b="1">
                 <a:solidFill>
                   <a:srgbClr val="202122"/>
                 </a:solidFill>
@@ -6280,8 +9982,41 @@
         </p:nvSpPr>
         <p:spPr>
           <a:xfrm>
-            <a:off x="548640" y="3360420"/>
-            <a:ext cx="1734769" cy="731520"/>
+            <a:off x="1371600" y="1801368"/>
+            <a:ext cx="4404207" cy="512064"/>
+          </a:xfrm>
+          <a:prstGeom prst="rect">
+            <a:avLst/>
+          </a:prstGeom>
+          <a:noFill/>
+        </p:spPr>
+        <p:txBody>
+          <a:bodyPr wrap="square" anchor="ctr" lIns="0" rIns="0" tIns="0" bIns="0"/>
+          <a:lstStyle/>
+          <a:p>
+            <a:pPr algn="l"/>
+            <a:r>
+              <a:rPr sz="1900" b="1" i="0">
+                <a:solidFill>
+                  <a:srgbClr val="03306E"/>
+                </a:solidFill>
+                <a:latin typeface="Calibri"/>
+              </a:rPr>
+              <a:t>Incidents and requests</a:t>
+            </a:r>
+          </a:p>
+        </p:txBody>
+      </p:sp>
+      <p:sp>
+        <p:nvSpPr>
+          <p:cNvPr id="9" name="TextBox 8"/>
+          <p:cNvSpPr txBox="1"/>
+          <p:nvPr/>
+        </p:nvSpPr>
+        <p:spPr>
+          <a:xfrm>
+            <a:off x="777240" y="2468880"/>
+            <a:ext cx="4952847" cy="1143000"/>
           </a:xfrm>
           <a:prstGeom prst="rect">
             <a:avLst/>
@@ -6292,29 +10027,29 @@
           <a:bodyPr wrap="square" anchor="t" lIns="0" rIns="0" tIns="0" bIns="0"/>
           <a:lstStyle/>
           <a:p>
-            <a:pPr algn="ctr"/>
-            <a:r>
-              <a:rPr sz="1700" b="1" i="0">
-                <a:solidFill>
-                  <a:srgbClr val="03306E"/>
-                </a:solidFill>
-                <a:latin typeface="Calibri"/>
-              </a:rPr>
-              <a:t>Gather</a:t>
-            </a:r>
-          </a:p>
-        </p:txBody>
-      </p:sp>
-      <p:sp>
-        <p:nvSpPr>
-          <p:cNvPr id="9" name="Rounded Rectangle 8"/>
+            <a:pPr algn="l"/>
+            <a:r>
+              <a:rPr sz="2000" b="0" i="0">
+                <a:solidFill>
+                  <a:srgbClr val="202122"/>
+                </a:solidFill>
+                <a:latin typeface="Calibri"/>
+              </a:rPr>
+              <a:t>Log, track, open and close tickets.</a:t>
+            </a:r>
+          </a:p>
+        </p:txBody>
+      </p:sp>
+      <p:sp>
+        <p:nvSpPr>
+          <p:cNvPr id="10" name="Rounded Rectangle 9"/>
           <p:cNvSpPr/>
           <p:nvPr/>
         </p:nvSpPr>
         <p:spPr>
           <a:xfrm>
-            <a:off x="548640" y="4137660"/>
-            <a:ext cx="1734769" cy="1051560"/>
+            <a:off x="6233007" y="1600200"/>
+            <a:ext cx="5410047" cy="2148840"/>
           </a:xfrm>
           <a:prstGeom prst="roundRect">
             <a:avLst>
@@ -6351,47 +10086,14 @@
       </p:sp>
       <p:sp>
         <p:nvSpPr>
-          <p:cNvPr id="10" name="TextBox 9"/>
-          <p:cNvSpPr txBox="1"/>
-          <p:nvPr/>
-        </p:nvSpPr>
-        <p:spPr>
-          <a:xfrm>
-            <a:off x="685800" y="4274820"/>
-            <a:ext cx="1460449" cy="777239"/>
-          </a:xfrm>
-          <a:prstGeom prst="rect">
-            <a:avLst/>
-          </a:prstGeom>
-          <a:noFill/>
-        </p:spPr>
-        <p:txBody>
-          <a:bodyPr wrap="square" anchor="t" lIns="0" rIns="0" tIns="0" bIns="0"/>
-          <a:lstStyle/>
-          <a:p>
-            <a:pPr algn="l"/>
-            <a:r>
-              <a:rPr sz="1400" b="0" i="0">
-                <a:solidFill>
-                  <a:srgbClr val="202122"/>
-                </a:solidFill>
-                <a:latin typeface="Calibri"/>
-              </a:rPr>
-              <a:t>Investigate the request and likely causes.</a:t>
-            </a:r>
-          </a:p>
-        </p:txBody>
-      </p:sp>
-      <p:sp>
-        <p:nvSpPr>
           <p:cNvPr id="11" name="Oval 10"/>
           <p:cNvSpPr/>
           <p:nvPr/>
         </p:nvSpPr>
         <p:spPr>
           <a:xfrm>
-            <a:off x="2967913" y="2583180"/>
-            <a:ext cx="640080" cy="640080"/>
+            <a:off x="6461607" y="1828800"/>
+            <a:ext cx="457200" cy="457200"/>
           </a:xfrm>
           <a:prstGeom prst="ellipse">
             <a:avLst/>
@@ -6424,7 +10126,7 @@
           <a:p>
             <a:pPr algn="ctr"/>
             <a:r>
-              <a:rPr sz="2000" b="1">
+              <a:rPr sz="1500" b="1">
                 <a:solidFill>
                   <a:srgbClr val="202122"/>
                 </a:solidFill>
@@ -6443,8 +10145,41 @@
         </p:nvSpPr>
         <p:spPr>
           <a:xfrm>
-            <a:off x="2420569" y="3360420"/>
-            <a:ext cx="1734769" cy="731520"/>
+            <a:off x="7055967" y="1801368"/>
+            <a:ext cx="4404207" cy="512064"/>
+          </a:xfrm>
+          <a:prstGeom prst="rect">
+            <a:avLst/>
+          </a:prstGeom>
+          <a:noFill/>
+        </p:spPr>
+        <p:txBody>
+          <a:bodyPr wrap="square" anchor="ctr" lIns="0" rIns="0" tIns="0" bIns="0"/>
+          <a:lstStyle/>
+          <a:p>
+            <a:pPr algn="l"/>
+            <a:r>
+              <a:rPr sz="1900" b="1" i="0">
+                <a:solidFill>
+                  <a:srgbClr val="03306E"/>
+                </a:solidFill>
+                <a:latin typeface="Calibri"/>
+              </a:rPr>
+              <a:t>Knowledge</a:t>
+            </a:r>
+          </a:p>
+        </p:txBody>
+      </p:sp>
+      <p:sp>
+        <p:nvSpPr>
+          <p:cNvPr id="13" name="TextBox 12"/>
+          <p:cNvSpPr txBox="1"/>
+          <p:nvPr/>
+        </p:nvSpPr>
+        <p:spPr>
+          <a:xfrm>
+            <a:off x="6461607" y="2468880"/>
+            <a:ext cx="4952847" cy="1143000"/>
           </a:xfrm>
           <a:prstGeom prst="rect">
             <a:avLst/>
@@ -6455,29 +10190,29 @@
           <a:bodyPr wrap="square" anchor="t" lIns="0" rIns="0" tIns="0" bIns="0"/>
           <a:lstStyle/>
           <a:p>
-            <a:pPr algn="ctr"/>
-            <a:r>
-              <a:rPr sz="1700" b="1" i="0">
-                <a:solidFill>
-                  <a:srgbClr val="03306E"/>
-                </a:solidFill>
-                <a:latin typeface="Calibri"/>
-              </a:rPr>
-              <a:t>Analyse</a:t>
-            </a:r>
-          </a:p>
-        </p:txBody>
-      </p:sp>
-      <p:sp>
-        <p:nvSpPr>
-          <p:cNvPr id="13" name="Rounded Rectangle 12"/>
+            <a:pPr algn="l"/>
+            <a:r>
+              <a:rPr sz="2000" b="0" i="0">
+                <a:solidFill>
+                  <a:srgbClr val="202122"/>
+                </a:solidFill>
+                <a:latin typeface="Calibri"/>
+              </a:rPr>
+              <a:t>Collate support knowledge and spot training needs.</a:t>
+            </a:r>
+          </a:p>
+        </p:txBody>
+      </p:sp>
+      <p:sp>
+        <p:nvSpPr>
+          <p:cNvPr id="14" name="Rounded Rectangle 13"/>
           <p:cNvSpPr/>
           <p:nvPr/>
         </p:nvSpPr>
         <p:spPr>
           <a:xfrm>
-            <a:off x="2420569" y="4137660"/>
-            <a:ext cx="1734769" cy="1051560"/>
+            <a:off x="548640" y="4023360"/>
+            <a:ext cx="5410047" cy="2148840"/>
           </a:xfrm>
           <a:prstGeom prst="roundRect">
             <a:avLst>
@@ -6514,47 +10249,14 @@
       </p:sp>
       <p:sp>
         <p:nvSpPr>
-          <p:cNvPr id="14" name="TextBox 13"/>
-          <p:cNvSpPr txBox="1"/>
-          <p:nvPr/>
-        </p:nvSpPr>
-        <p:spPr>
-          <a:xfrm>
-            <a:off x="2557729" y="4274820"/>
-            <a:ext cx="1460449" cy="777239"/>
-          </a:xfrm>
-          <a:prstGeom prst="rect">
-            <a:avLst/>
-          </a:prstGeom>
-          <a:noFill/>
-        </p:spPr>
-        <p:txBody>
-          <a:bodyPr wrap="square" anchor="t" lIns="0" rIns="0" tIns="0" bIns="0"/>
-          <a:lstStyle/>
-          <a:p>
-            <a:pPr algn="l"/>
-            <a:r>
-              <a:rPr sz="1400" b="0" i="0">
-                <a:solidFill>
-                  <a:srgbClr val="202122"/>
-                </a:solidFill>
-                <a:latin typeface="Calibri"/>
-              </a:rPr>
-              <a:t>Rule out known fixes and causes.</a:t>
-            </a:r>
-          </a:p>
-        </p:txBody>
-      </p:sp>
-      <p:sp>
-        <p:nvSpPr>
           <p:cNvPr id="15" name="Oval 14"/>
           <p:cNvSpPr/>
           <p:nvPr/>
         </p:nvSpPr>
         <p:spPr>
           <a:xfrm>
-            <a:off x="4839843" y="2583180"/>
-            <a:ext cx="640080" cy="640080"/>
+            <a:off x="777240" y="4251960"/>
+            <a:ext cx="457200" cy="457200"/>
           </a:xfrm>
           <a:prstGeom prst="ellipse">
             <a:avLst/>
@@ -6587,7 +10289,7 @@
           <a:p>
             <a:pPr algn="ctr"/>
             <a:r>
-              <a:rPr sz="2000" b="1">
+              <a:rPr sz="1500" b="1">
                 <a:solidFill>
                   <a:srgbClr val="202122"/>
                 </a:solidFill>
@@ -6606,8 +10308,41 @@
         </p:nvSpPr>
         <p:spPr>
           <a:xfrm>
-            <a:off x="4292498" y="3360420"/>
-            <a:ext cx="1734769" cy="731520"/>
+            <a:off x="1371600" y="4224528"/>
+            <a:ext cx="4404207" cy="512064"/>
+          </a:xfrm>
+          <a:prstGeom prst="rect">
+            <a:avLst/>
+          </a:prstGeom>
+          <a:noFill/>
+        </p:spPr>
+        <p:txBody>
+          <a:bodyPr wrap="square" anchor="ctr" lIns="0" rIns="0" tIns="0" bIns="0"/>
+          <a:lstStyle/>
+          <a:p>
+            <a:pPr algn="l"/>
+            <a:r>
+              <a:rPr sz="1900" b="1" i="0">
+                <a:solidFill>
+                  <a:srgbClr val="03306E"/>
+                </a:solidFill>
+                <a:latin typeface="Calibri"/>
+              </a:rPr>
+              <a:t>Change</a:t>
+            </a:r>
+          </a:p>
+        </p:txBody>
+      </p:sp>
+      <p:sp>
+        <p:nvSpPr>
+          <p:cNvPr id="17" name="TextBox 16"/>
+          <p:cNvSpPr txBox="1"/>
+          <p:nvPr/>
+        </p:nvSpPr>
+        <p:spPr>
+          <a:xfrm>
+            <a:off x="777240" y="4892040"/>
+            <a:ext cx="4952847" cy="1143000"/>
           </a:xfrm>
           <a:prstGeom prst="rect">
             <a:avLst/>
@@ -6618,29 +10353,29 @@
           <a:bodyPr wrap="square" anchor="t" lIns="0" rIns="0" tIns="0" bIns="0"/>
           <a:lstStyle/>
           <a:p>
-            <a:pPr algn="ctr"/>
-            <a:r>
-              <a:rPr sz="1700" b="1" i="0">
-                <a:solidFill>
-                  <a:srgbClr val="03306E"/>
-                </a:solidFill>
-                <a:latin typeface="Calibri"/>
-              </a:rPr>
-              <a:t>Test</a:t>
-            </a:r>
-          </a:p>
-        </p:txBody>
-      </p:sp>
-      <p:sp>
-        <p:nvSpPr>
-          <p:cNvPr id="17" name="Rounded Rectangle 16"/>
+            <a:pPr algn="l"/>
+            <a:r>
+              <a:rPr sz="2000" b="0" i="0">
+                <a:solidFill>
+                  <a:srgbClr val="202122"/>
+                </a:solidFill>
+                <a:latin typeface="Calibri"/>
+              </a:rPr>
+              <a:t>Support the rollout of new systems.</a:t>
+            </a:r>
+          </a:p>
+        </p:txBody>
+      </p:sp>
+      <p:sp>
+        <p:nvSpPr>
+          <p:cNvPr id="18" name="Rounded Rectangle 17"/>
           <p:cNvSpPr/>
           <p:nvPr/>
         </p:nvSpPr>
         <p:spPr>
           <a:xfrm>
-            <a:off x="4292498" y="4137660"/>
-            <a:ext cx="1734769" cy="1051560"/>
+            <a:off x="6233007" y="4023360"/>
+            <a:ext cx="5410047" cy="2148840"/>
           </a:xfrm>
           <a:prstGeom prst="roundRect">
             <a:avLst>
@@ -6677,47 +10412,14 @@
       </p:sp>
       <p:sp>
         <p:nvSpPr>
-          <p:cNvPr id="18" name="TextBox 17"/>
-          <p:cNvSpPr txBox="1"/>
-          <p:nvPr/>
-        </p:nvSpPr>
-        <p:spPr>
-          <a:xfrm>
-            <a:off x="4429658" y="4274820"/>
-            <a:ext cx="1460449" cy="777239"/>
-          </a:xfrm>
-          <a:prstGeom prst="rect">
-            <a:avLst/>
-          </a:prstGeom>
-          <a:noFill/>
-        </p:spPr>
-        <p:txBody>
-          <a:bodyPr wrap="square" anchor="t" lIns="0" rIns="0" tIns="0" bIns="0"/>
-          <a:lstStyle/>
-          <a:p>
-            <a:pPr algn="l"/>
-            <a:r>
-              <a:rPr sz="1400" b="0" i="0">
-                <a:solidFill>
-                  <a:srgbClr val="202122"/>
-                </a:solidFill>
-                <a:latin typeface="Calibri"/>
-              </a:rPr>
-              <a:t>Test the remaining possibilities.</a:t>
-            </a:r>
-          </a:p>
-        </p:txBody>
-      </p:sp>
-      <p:sp>
-        <p:nvSpPr>
           <p:cNvPr id="19" name="Oval 18"/>
           <p:cNvSpPr/>
           <p:nvPr/>
         </p:nvSpPr>
         <p:spPr>
           <a:xfrm>
-            <a:off x="6711772" y="2583180"/>
-            <a:ext cx="640080" cy="640080"/>
+            <a:off x="6461607" y="4251960"/>
+            <a:ext cx="457200" cy="457200"/>
           </a:xfrm>
           <a:prstGeom prst="ellipse">
             <a:avLst/>
@@ -6750,7 +10452,7 @@
           <a:p>
             <a:pPr algn="ctr"/>
             <a:r>
-              <a:rPr sz="2000" b="1">
+              <a:rPr sz="1500" b="1">
                 <a:solidFill>
                   <a:srgbClr val="202122"/>
                 </a:solidFill>
@@ -6769,8 +10471,41 @@
         </p:nvSpPr>
         <p:spPr>
           <a:xfrm>
-            <a:off x="6164427" y="3360420"/>
-            <a:ext cx="1734769" cy="731520"/>
+            <a:off x="7055967" y="4224528"/>
+            <a:ext cx="4404207" cy="512064"/>
+          </a:xfrm>
+          <a:prstGeom prst="rect">
+            <a:avLst/>
+          </a:prstGeom>
+          <a:noFill/>
+        </p:spPr>
+        <p:txBody>
+          <a:bodyPr wrap="square" anchor="ctr" lIns="0" rIns="0" tIns="0" bIns="0"/>
+          <a:lstStyle/>
+          <a:p>
+            <a:pPr algn="l"/>
+            <a:r>
+              <a:rPr sz="1900" b="1" i="0">
+                <a:solidFill>
+                  <a:srgbClr val="03306E"/>
+                </a:solidFill>
+                <a:latin typeface="Calibri"/>
+              </a:rPr>
+              <a:t>Configuration and assets</a:t>
+            </a:r>
+          </a:p>
+        </p:txBody>
+      </p:sp>
+      <p:sp>
+        <p:nvSpPr>
+          <p:cNvPr id="21" name="TextBox 20"/>
+          <p:cNvSpPr txBox="1"/>
+          <p:nvPr/>
+        </p:nvSpPr>
+        <p:spPr>
+          <a:xfrm>
+            <a:off x="6461607" y="4892040"/>
+            <a:ext cx="4952847" cy="1143000"/>
           </a:xfrm>
           <a:prstGeom prst="rect">
             <a:avLst/>
@@ -6781,418 +10516,15 @@
           <a:bodyPr wrap="square" anchor="t" lIns="0" rIns="0" tIns="0" bIns="0"/>
           <a:lstStyle/>
           <a:p>
-            <a:pPr algn="ctr"/>
-            <a:r>
-              <a:rPr sz="1700" b="1" i="0">
-                <a:solidFill>
-                  <a:srgbClr val="03306E"/>
-                </a:solidFill>
-                <a:latin typeface="Calibri"/>
-              </a:rPr>
-              <a:t>Resolve</a:t>
-            </a:r>
-          </a:p>
-        </p:txBody>
-      </p:sp>
-      <p:sp>
-        <p:nvSpPr>
-          <p:cNvPr id="21" name="Rounded Rectangle 20"/>
-          <p:cNvSpPr/>
-          <p:nvPr/>
-        </p:nvSpPr>
-        <p:spPr>
-          <a:xfrm>
-            <a:off x="6164427" y="4137660"/>
-            <a:ext cx="1734769" cy="1051560"/>
-          </a:xfrm>
-          <a:prstGeom prst="roundRect">
-            <a:avLst>
-              <a:gd name="adj" fmla="val 6000"/>
-            </a:avLst>
-          </a:prstGeom>
-          <a:solidFill>
-            <a:srgbClr val="EAF3FF"/>
-          </a:solidFill>
-          <a:ln>
-            <a:noFill/>
-          </a:ln>
-          <a:effectLst/>
-        </p:spPr>
-        <p:style>
-          <a:lnRef idx="1">
-            <a:schemeClr val="accent1"/>
-          </a:lnRef>
-          <a:fillRef idx="3">
-            <a:schemeClr val="accent1"/>
-          </a:fillRef>
-          <a:effectRef idx="2">
-            <a:schemeClr val="accent1"/>
-          </a:effectRef>
-          <a:fontRef idx="minor">
-            <a:schemeClr val="lt1"/>
-          </a:fontRef>
-        </p:style>
-        <p:txBody>
-          <a:bodyPr rtlCol="0" anchor="ctr"/>
-          <a:lstStyle/>
-          <a:p/>
-        </p:txBody>
-      </p:sp>
-      <p:sp>
-        <p:nvSpPr>
-          <p:cNvPr id="22" name="TextBox 21"/>
-          <p:cNvSpPr txBox="1"/>
-          <p:nvPr/>
-        </p:nvSpPr>
-        <p:spPr>
-          <a:xfrm>
-            <a:off x="6301587" y="4274820"/>
-            <a:ext cx="1460449" cy="777239"/>
-          </a:xfrm>
-          <a:prstGeom prst="rect">
-            <a:avLst/>
-          </a:prstGeom>
-          <a:noFill/>
-        </p:spPr>
-        <p:txBody>
-          <a:bodyPr wrap="square" anchor="t" lIns="0" rIns="0" tIns="0" bIns="0"/>
-          <a:lstStyle/>
-          <a:p>
             <a:pPr algn="l"/>
             <a:r>
-              <a:rPr sz="1400" b="0" i="0">
+              <a:rPr sz="2000" b="0" i="0">
                 <a:solidFill>
                   <a:srgbClr val="202122"/>
                 </a:solidFill>
                 <a:latin typeface="Calibri"/>
               </a:rPr>
-              <a:t>Back up, fix, test, repeat until solved.</a:t>
-            </a:r>
-          </a:p>
-        </p:txBody>
-      </p:sp>
-      <p:sp>
-        <p:nvSpPr>
-          <p:cNvPr id="23" name="Oval 22"/>
-          <p:cNvSpPr/>
-          <p:nvPr/>
-        </p:nvSpPr>
-        <p:spPr>
-          <a:xfrm>
-            <a:off x="8583701" y="2583180"/>
-            <a:ext cx="640080" cy="640080"/>
-          </a:xfrm>
-          <a:prstGeom prst="ellipse">
-            <a:avLst/>
-          </a:prstGeom>
-          <a:solidFill>
-            <a:srgbClr val="4EA1FF"/>
-          </a:solidFill>
-          <a:ln>
-            <a:noFill/>
-          </a:ln>
-          <a:effectLst/>
-        </p:spPr>
-        <p:style>
-          <a:lnRef idx="1">
-            <a:schemeClr val="accent1"/>
-          </a:lnRef>
-          <a:fillRef idx="3">
-            <a:schemeClr val="accent1"/>
-          </a:fillRef>
-          <a:effectRef idx="2">
-            <a:schemeClr val="accent1"/>
-          </a:effectRef>
-          <a:fontRef idx="minor">
-            <a:schemeClr val="lt1"/>
-          </a:fontRef>
-        </p:style>
-        <p:txBody>
-          <a:bodyPr rtlCol="0" anchor="ctr" lIns="0" rIns="0" tIns="0" bIns="0"/>
-          <a:lstStyle/>
-          <a:p>
-            <a:pPr algn="ctr"/>
-            <a:r>
-              <a:rPr sz="2000" b="1">
-                <a:solidFill>
-                  <a:srgbClr val="202122"/>
-                </a:solidFill>
-                <a:latin typeface="Calibri"/>
-              </a:rPr>
-              <a:t>5</a:t>
-            </a:r>
-          </a:p>
-        </p:txBody>
-      </p:sp>
-      <p:sp>
-        <p:nvSpPr>
-          <p:cNvPr id="24" name="TextBox 23"/>
-          <p:cNvSpPr txBox="1"/>
-          <p:nvPr/>
-        </p:nvSpPr>
-        <p:spPr>
-          <a:xfrm>
-            <a:off x="8036356" y="3360420"/>
-            <a:ext cx="1734769" cy="731520"/>
-          </a:xfrm>
-          <a:prstGeom prst="rect">
-            <a:avLst/>
-          </a:prstGeom>
-          <a:noFill/>
-        </p:spPr>
-        <p:txBody>
-          <a:bodyPr wrap="square" anchor="t" lIns="0" rIns="0" tIns="0" bIns="0"/>
-          <a:lstStyle/>
-          <a:p>
-            <a:pPr algn="ctr"/>
-            <a:r>
-              <a:rPr sz="1700" b="1" i="0">
-                <a:solidFill>
-                  <a:srgbClr val="03306E"/>
-                </a:solidFill>
-                <a:latin typeface="Calibri"/>
-              </a:rPr>
-              <a:t>Document</a:t>
-            </a:r>
-          </a:p>
-        </p:txBody>
-      </p:sp>
-      <p:sp>
-        <p:nvSpPr>
-          <p:cNvPr id="25" name="Rounded Rectangle 24"/>
-          <p:cNvSpPr/>
-          <p:nvPr/>
-        </p:nvSpPr>
-        <p:spPr>
-          <a:xfrm>
-            <a:off x="8036356" y="4137660"/>
-            <a:ext cx="1734769" cy="1051560"/>
-          </a:xfrm>
-          <a:prstGeom prst="roundRect">
-            <a:avLst>
-              <a:gd name="adj" fmla="val 6000"/>
-            </a:avLst>
-          </a:prstGeom>
-          <a:solidFill>
-            <a:srgbClr val="EAF3FF"/>
-          </a:solidFill>
-          <a:ln>
-            <a:noFill/>
-          </a:ln>
-          <a:effectLst/>
-        </p:spPr>
-        <p:style>
-          <a:lnRef idx="1">
-            <a:schemeClr val="accent1"/>
-          </a:lnRef>
-          <a:fillRef idx="3">
-            <a:schemeClr val="accent1"/>
-          </a:fillRef>
-          <a:effectRef idx="2">
-            <a:schemeClr val="accent1"/>
-          </a:effectRef>
-          <a:fontRef idx="minor">
-            <a:schemeClr val="lt1"/>
-          </a:fontRef>
-        </p:style>
-        <p:txBody>
-          <a:bodyPr rtlCol="0" anchor="ctr"/>
-          <a:lstStyle/>
-          <a:p/>
-        </p:txBody>
-      </p:sp>
-      <p:sp>
-        <p:nvSpPr>
-          <p:cNvPr id="26" name="TextBox 25"/>
-          <p:cNvSpPr txBox="1"/>
-          <p:nvPr/>
-        </p:nvSpPr>
-        <p:spPr>
-          <a:xfrm>
-            <a:off x="8173516" y="4274820"/>
-            <a:ext cx="1460449" cy="777239"/>
-          </a:xfrm>
-          <a:prstGeom prst="rect">
-            <a:avLst/>
-          </a:prstGeom>
-          <a:noFill/>
-        </p:spPr>
-        <p:txBody>
-          <a:bodyPr wrap="square" anchor="t" lIns="0" rIns="0" tIns="0" bIns="0"/>
-          <a:lstStyle/>
-          <a:p>
-            <a:pPr algn="l"/>
-            <a:r>
-              <a:rPr sz="1400" b="0" i="0">
-                <a:solidFill>
-                  <a:srgbClr val="202122"/>
-                </a:solidFill>
-                <a:latin typeface="Calibri"/>
-              </a:rPr>
-              <a:t>Record cause and solution in the CMS.</a:t>
-            </a:r>
-          </a:p>
-        </p:txBody>
-      </p:sp>
-      <p:sp>
-        <p:nvSpPr>
-          <p:cNvPr id="27" name="Oval 26"/>
-          <p:cNvSpPr/>
-          <p:nvPr/>
-        </p:nvSpPr>
-        <p:spPr>
-          <a:xfrm>
-            <a:off x="10455630" y="2583180"/>
-            <a:ext cx="640080" cy="640080"/>
-          </a:xfrm>
-          <a:prstGeom prst="ellipse">
-            <a:avLst/>
-          </a:prstGeom>
-          <a:solidFill>
-            <a:srgbClr val="4EA1FF"/>
-          </a:solidFill>
-          <a:ln>
-            <a:noFill/>
-          </a:ln>
-          <a:effectLst/>
-        </p:spPr>
-        <p:style>
-          <a:lnRef idx="1">
-            <a:schemeClr val="accent1"/>
-          </a:lnRef>
-          <a:fillRef idx="3">
-            <a:schemeClr val="accent1"/>
-          </a:fillRef>
-          <a:effectRef idx="2">
-            <a:schemeClr val="accent1"/>
-          </a:effectRef>
-          <a:fontRef idx="minor">
-            <a:schemeClr val="lt1"/>
-          </a:fontRef>
-        </p:style>
-        <p:txBody>
-          <a:bodyPr rtlCol="0" anchor="ctr" lIns="0" rIns="0" tIns="0" bIns="0"/>
-          <a:lstStyle/>
-          <a:p>
-            <a:pPr algn="ctr"/>
-            <a:r>
-              <a:rPr sz="2000" b="1">
-                <a:solidFill>
-                  <a:srgbClr val="202122"/>
-                </a:solidFill>
-                <a:latin typeface="Calibri"/>
-              </a:rPr>
-              <a:t>6</a:t>
-            </a:r>
-          </a:p>
-        </p:txBody>
-      </p:sp>
-      <p:sp>
-        <p:nvSpPr>
-          <p:cNvPr id="28" name="TextBox 27"/>
-          <p:cNvSpPr txBox="1"/>
-          <p:nvPr/>
-        </p:nvSpPr>
-        <p:spPr>
-          <a:xfrm>
-            <a:off x="9908286" y="3360420"/>
-            <a:ext cx="1734769" cy="731520"/>
-          </a:xfrm>
-          <a:prstGeom prst="rect">
-            <a:avLst/>
-          </a:prstGeom>
-          <a:noFill/>
-        </p:spPr>
-        <p:txBody>
-          <a:bodyPr wrap="square" anchor="t" lIns="0" rIns="0" tIns="0" bIns="0"/>
-          <a:lstStyle/>
-          <a:p>
-            <a:pPr algn="ctr"/>
-            <a:r>
-              <a:rPr sz="1700" b="1" i="0">
-                <a:solidFill>
-                  <a:srgbClr val="03306E"/>
-                </a:solidFill>
-                <a:latin typeface="Calibri"/>
-              </a:rPr>
-              <a:t>Prevent</a:t>
-            </a:r>
-          </a:p>
-        </p:txBody>
-      </p:sp>
-      <p:sp>
-        <p:nvSpPr>
-          <p:cNvPr id="29" name="Rounded Rectangle 28"/>
-          <p:cNvSpPr/>
-          <p:nvPr/>
-        </p:nvSpPr>
-        <p:spPr>
-          <a:xfrm>
-            <a:off x="9908286" y="4137660"/>
-            <a:ext cx="1734769" cy="1051560"/>
-          </a:xfrm>
-          <a:prstGeom prst="roundRect">
-            <a:avLst>
-              <a:gd name="adj" fmla="val 6000"/>
-            </a:avLst>
-          </a:prstGeom>
-          <a:solidFill>
-            <a:srgbClr val="EAF3FF"/>
-          </a:solidFill>
-          <a:ln>
-            <a:noFill/>
-          </a:ln>
-          <a:effectLst/>
-        </p:spPr>
-        <p:style>
-          <a:lnRef idx="1">
-            <a:schemeClr val="accent1"/>
-          </a:lnRef>
-          <a:fillRef idx="3">
-            <a:schemeClr val="accent1"/>
-          </a:fillRef>
-          <a:effectRef idx="2">
-            <a:schemeClr val="accent1"/>
-          </a:effectRef>
-          <a:fontRef idx="minor">
-            <a:schemeClr val="lt1"/>
-          </a:fontRef>
-        </p:style>
-        <p:txBody>
-          <a:bodyPr rtlCol="0" anchor="ctr"/>
-          <a:lstStyle/>
-          <a:p/>
-        </p:txBody>
-      </p:sp>
-      <p:sp>
-        <p:nvSpPr>
-          <p:cNvPr id="30" name="TextBox 29"/>
-          <p:cNvSpPr txBox="1"/>
-          <p:nvPr/>
-        </p:nvSpPr>
-        <p:spPr>
-          <a:xfrm>
-            <a:off x="10045446" y="4274820"/>
-            <a:ext cx="1460449" cy="777239"/>
-          </a:xfrm>
-          <a:prstGeom prst="rect">
-            <a:avLst/>
-          </a:prstGeom>
-          <a:noFill/>
-        </p:spPr>
-        <p:txBody>
-          <a:bodyPr wrap="square" anchor="t" lIns="0" rIns="0" tIns="0" bIns="0"/>
-          <a:lstStyle/>
-          <a:p>
-            <a:pPr algn="l"/>
-            <a:r>
-              <a:rPr sz="1400" b="0" i="0">
-                <a:solidFill>
-                  <a:srgbClr val="202122"/>
-                </a:solidFill>
-                <a:latin typeface="Calibri"/>
-              </a:rPr>
-              <a:t>Apply controls so it does not recur.</a:t>
+              <a:t>Licences, hardware and software requests, decommissioning.</a:t>
             </a:r>
           </a:p>
         </p:txBody>
@@ -7284,7 +10616,7 @@
                 </a:solidFill>
                 <a:latin typeface="Cambria"/>
               </a:rPr>
-              <a:t>Support processes</a:t>
+              <a:t>Quick check: What the CMS does</a:t>
             </a:r>
           </a:p>
         </p:txBody>
@@ -7357,58 +10689,14 @@
       </p:sp>
       <p:sp>
         <p:nvSpPr>
-          <p:cNvPr id="6" name="Rounded Rectangle 5"/>
+          <p:cNvPr id="6" name="Oval 5"/>
           <p:cNvSpPr/>
           <p:nvPr/>
         </p:nvSpPr>
         <p:spPr>
           <a:xfrm>
-            <a:off x="548640" y="1600200"/>
-            <a:ext cx="3515258" cy="2148840"/>
-          </a:xfrm>
-          <a:prstGeom prst="roundRect">
-            <a:avLst>
-              <a:gd name="adj" fmla="val 6000"/>
-            </a:avLst>
-          </a:prstGeom>
-          <a:solidFill>
-            <a:srgbClr val="EAF3FF"/>
-          </a:solidFill>
-          <a:ln>
-            <a:noFill/>
-          </a:ln>
-          <a:effectLst/>
-        </p:spPr>
-        <p:style>
-          <a:lnRef idx="1">
-            <a:schemeClr val="accent1"/>
-          </a:lnRef>
-          <a:fillRef idx="3">
-            <a:schemeClr val="accent1"/>
-          </a:fillRef>
-          <a:effectRef idx="2">
-            <a:schemeClr val="accent1"/>
-          </a:effectRef>
-          <a:fontRef idx="minor">
-            <a:schemeClr val="lt1"/>
-          </a:fontRef>
-        </p:style>
-        <p:txBody>
-          <a:bodyPr rtlCol="0" anchor="ctr"/>
-          <a:lstStyle/>
-          <a:p/>
-        </p:txBody>
-      </p:sp>
-      <p:sp>
-        <p:nvSpPr>
-          <p:cNvPr id="7" name="Oval 6"/>
-          <p:cNvSpPr/>
-          <p:nvPr/>
-        </p:nvSpPr>
-        <p:spPr>
-          <a:xfrm>
-            <a:off x="777240" y="1828800"/>
-            <a:ext cx="457200" cy="457200"/>
+            <a:off x="548640" y="1691640"/>
+            <a:ext cx="502920" cy="502920"/>
           </a:xfrm>
           <a:prstGeom prst="ellipse">
             <a:avLst/>
@@ -7441,7 +10729,7 @@
           <a:p>
             <a:pPr algn="ctr"/>
             <a:r>
-              <a:rPr sz="1500" b="1">
+              <a:rPr sz="1600" b="1">
                 <a:solidFill>
                   <a:srgbClr val="202122"/>
                 </a:solidFill>
@@ -7454,124 +10742,47 @@
       </p:sp>
       <p:sp>
         <p:nvSpPr>
-          <p:cNvPr id="8" name="TextBox 7"/>
-          <p:cNvSpPr txBox="1"/>
-          <p:nvPr/>
-        </p:nvSpPr>
-        <p:spPr>
-          <a:xfrm>
-            <a:off x="1371600" y="1801368"/>
-            <a:ext cx="2509418" cy="512064"/>
-          </a:xfrm>
-          <a:prstGeom prst="rect">
-            <a:avLst/>
-          </a:prstGeom>
-          <a:noFill/>
-        </p:spPr>
-        <p:txBody>
-          <a:bodyPr wrap="square" anchor="ctr" lIns="0" rIns="0" tIns="0" bIns="0"/>
+          <p:cNvPr id="7" name="TextBox 6"/>
+          <p:cNvSpPr txBox="1"/>
+          <p:nvPr/>
+        </p:nvSpPr>
+        <p:spPr>
+          <a:xfrm>
+            <a:off x="1371600" y="1645920"/>
+            <a:ext cx="10271455" cy="1188720"/>
+          </a:xfrm>
+          <a:prstGeom prst="rect">
+            <a:avLst/>
+          </a:prstGeom>
+          <a:noFill/>
+        </p:spPr>
+        <p:txBody>
+          <a:bodyPr wrap="square" anchor="t" lIns="0" rIns="0" tIns="0" bIns="0"/>
           <a:lstStyle/>
           <a:p>
             <a:pPr algn="l"/>
             <a:r>
-              <a:rPr sz="1900" b="1" i="0">
-                <a:solidFill>
-                  <a:srgbClr val="03306E"/>
-                </a:solidFill>
-                <a:latin typeface="Calibri"/>
-              </a:rPr>
-              <a:t>Accounts</a:t>
-            </a:r>
-          </a:p>
-        </p:txBody>
-      </p:sp>
-      <p:sp>
-        <p:nvSpPr>
-          <p:cNvPr id="9" name="TextBox 8"/>
-          <p:cNvSpPr txBox="1"/>
-          <p:nvPr/>
-        </p:nvSpPr>
-        <p:spPr>
-          <a:xfrm>
-            <a:off x="777240" y="2468880"/>
-            <a:ext cx="3058058" cy="1143000"/>
-          </a:xfrm>
-          <a:prstGeom prst="rect">
-            <a:avLst/>
-          </a:prstGeom>
-          <a:noFill/>
-        </p:spPr>
-        <p:txBody>
-          <a:bodyPr wrap="square" anchor="t" lIns="0" rIns="0" tIns="0" bIns="0"/>
-          <a:lstStyle/>
-          <a:p>
-            <a:pPr algn="l"/>
-            <a:r>
-              <a:rPr sz="2000" b="0" i="0">
+              <a:rPr sz="2400" b="0" i="0">
                 <a:solidFill>
                   <a:srgbClr val="202122"/>
                 </a:solidFill>
                 <a:latin typeface="Calibri"/>
               </a:rPr>
-              <a:t>Add and remove users, set access hours.</a:t>
-            </a:r>
-          </a:p>
-        </p:txBody>
-      </p:sp>
-      <p:sp>
-        <p:nvSpPr>
-          <p:cNvPr id="10" name="Rounded Rectangle 9"/>
+              <a:t>Name two CMS functions.</a:t>
+            </a:r>
+          </a:p>
+        </p:txBody>
+      </p:sp>
+      <p:sp>
+        <p:nvSpPr>
+          <p:cNvPr id="8" name="Oval 7"/>
           <p:cNvSpPr/>
           <p:nvPr/>
         </p:nvSpPr>
         <p:spPr>
           <a:xfrm>
-            <a:off x="4338218" y="1600200"/>
-            <a:ext cx="3515258" cy="2148840"/>
-          </a:xfrm>
-          <a:prstGeom prst="roundRect">
-            <a:avLst>
-              <a:gd name="adj" fmla="val 6000"/>
-            </a:avLst>
-          </a:prstGeom>
-          <a:solidFill>
-            <a:srgbClr val="EAF3FF"/>
-          </a:solidFill>
-          <a:ln>
-            <a:noFill/>
-          </a:ln>
-          <a:effectLst/>
-        </p:spPr>
-        <p:style>
-          <a:lnRef idx="1">
-            <a:schemeClr val="accent1"/>
-          </a:lnRef>
-          <a:fillRef idx="3">
-            <a:schemeClr val="accent1"/>
-          </a:fillRef>
-          <a:effectRef idx="2">
-            <a:schemeClr val="accent1"/>
-          </a:effectRef>
-          <a:fontRef idx="minor">
-            <a:schemeClr val="lt1"/>
-          </a:fontRef>
-        </p:style>
-        <p:txBody>
-          <a:bodyPr rtlCol="0" anchor="ctr"/>
-          <a:lstStyle/>
-          <a:p/>
-        </p:txBody>
-      </p:sp>
-      <p:sp>
-        <p:nvSpPr>
-          <p:cNvPr id="11" name="Oval 10"/>
-          <p:cNvSpPr/>
-          <p:nvPr/>
-        </p:nvSpPr>
-        <p:spPr>
-          <a:xfrm>
-            <a:off x="4566818" y="1828800"/>
-            <a:ext cx="457200" cy="457200"/>
+            <a:off x="548640" y="3108960"/>
+            <a:ext cx="502920" cy="502920"/>
           </a:xfrm>
           <a:prstGeom prst="ellipse">
             <a:avLst/>
@@ -7604,7 +10815,7 @@
           <a:p>
             <a:pPr algn="ctr"/>
             <a:r>
-              <a:rPr sz="1500" b="1">
+              <a:rPr sz="1600" b="1">
                 <a:solidFill>
                   <a:srgbClr val="202122"/>
                 </a:solidFill>
@@ -7617,124 +10828,47 @@
       </p:sp>
       <p:sp>
         <p:nvSpPr>
-          <p:cNvPr id="12" name="TextBox 11"/>
-          <p:cNvSpPr txBox="1"/>
-          <p:nvPr/>
-        </p:nvSpPr>
-        <p:spPr>
-          <a:xfrm>
-            <a:off x="5161178" y="1801368"/>
-            <a:ext cx="2509418" cy="512064"/>
-          </a:xfrm>
-          <a:prstGeom prst="rect">
-            <a:avLst/>
-          </a:prstGeom>
-          <a:noFill/>
-        </p:spPr>
-        <p:txBody>
-          <a:bodyPr wrap="square" anchor="ctr" lIns="0" rIns="0" tIns="0" bIns="0"/>
+          <p:cNvPr id="9" name="TextBox 8"/>
+          <p:cNvSpPr txBox="1"/>
+          <p:nvPr/>
+        </p:nvSpPr>
+        <p:spPr>
+          <a:xfrm>
+            <a:off x="1371600" y="3063240"/>
+            <a:ext cx="10271455" cy="1188720"/>
+          </a:xfrm>
+          <a:prstGeom prst="rect">
+            <a:avLst/>
+          </a:prstGeom>
+          <a:noFill/>
+        </p:spPr>
+        <p:txBody>
+          <a:bodyPr wrap="square" anchor="t" lIns="0" rIns="0" tIns="0" bIns="0"/>
           <a:lstStyle/>
           <a:p>
             <a:pPr algn="l"/>
             <a:r>
-              <a:rPr sz="1900" b="1" i="0">
-                <a:solidFill>
-                  <a:srgbClr val="03306E"/>
-                </a:solidFill>
-                <a:latin typeface="Calibri"/>
-              </a:rPr>
-              <a:t>Passwords</a:t>
-            </a:r>
-          </a:p>
-        </p:txBody>
-      </p:sp>
-      <p:sp>
-        <p:nvSpPr>
-          <p:cNvPr id="13" name="TextBox 12"/>
-          <p:cNvSpPr txBox="1"/>
-          <p:nvPr/>
-        </p:nvSpPr>
-        <p:spPr>
-          <a:xfrm>
-            <a:off x="4566818" y="2468880"/>
-            <a:ext cx="3058058" cy="1143000"/>
-          </a:xfrm>
-          <a:prstGeom prst="rect">
-            <a:avLst/>
-          </a:prstGeom>
-          <a:noFill/>
-        </p:spPr>
-        <p:txBody>
-          <a:bodyPr wrap="square" anchor="t" lIns="0" rIns="0" tIns="0" bIns="0"/>
-          <a:lstStyle/>
-          <a:p>
-            <a:pPr algn="l"/>
-            <a:r>
-              <a:rPr sz="2000" b="0" i="0">
+              <a:rPr sz="2400" b="0" i="0">
                 <a:solidFill>
                   <a:srgbClr val="202122"/>
                 </a:solidFill>
                 <a:latin typeface="Calibri"/>
               </a:rPr>
-              <a:t>Complexity, expiry, forced resets.</a:t>
-            </a:r>
-          </a:p>
-        </p:txBody>
-      </p:sp>
-      <p:sp>
-        <p:nvSpPr>
-          <p:cNvPr id="14" name="Rounded Rectangle 13"/>
+              <a:t>Why record every ticket?</a:t>
+            </a:r>
+          </a:p>
+        </p:txBody>
+      </p:sp>
+      <p:sp>
+        <p:nvSpPr>
+          <p:cNvPr id="10" name="Oval 9"/>
           <p:cNvSpPr/>
           <p:nvPr/>
         </p:nvSpPr>
         <p:spPr>
           <a:xfrm>
-            <a:off x="8127796" y="1600200"/>
-            <a:ext cx="3515258" cy="2148840"/>
-          </a:xfrm>
-          <a:prstGeom prst="roundRect">
-            <a:avLst>
-              <a:gd name="adj" fmla="val 6000"/>
-            </a:avLst>
-          </a:prstGeom>
-          <a:solidFill>
-            <a:srgbClr val="EAF3FF"/>
-          </a:solidFill>
-          <a:ln>
-            <a:noFill/>
-          </a:ln>
-          <a:effectLst/>
-        </p:spPr>
-        <p:style>
-          <a:lnRef idx="1">
-            <a:schemeClr val="accent1"/>
-          </a:lnRef>
-          <a:fillRef idx="3">
-            <a:schemeClr val="accent1"/>
-          </a:fillRef>
-          <a:effectRef idx="2">
-            <a:schemeClr val="accent1"/>
-          </a:effectRef>
-          <a:fontRef idx="minor">
-            <a:schemeClr val="lt1"/>
-          </a:fontRef>
-        </p:style>
-        <p:txBody>
-          <a:bodyPr rtlCol="0" anchor="ctr"/>
-          <a:lstStyle/>
-          <a:p/>
-        </p:txBody>
-      </p:sp>
-      <p:sp>
-        <p:nvSpPr>
-          <p:cNvPr id="15" name="Oval 14"/>
-          <p:cNvSpPr/>
-          <p:nvPr/>
-        </p:nvSpPr>
-        <p:spPr>
-          <a:xfrm>
-            <a:off x="8356396" y="1828800"/>
-            <a:ext cx="457200" cy="457200"/>
+            <a:off x="548640" y="4526280"/>
+            <a:ext cx="502920" cy="502920"/>
           </a:xfrm>
           <a:prstGeom prst="ellipse">
             <a:avLst/>
@@ -7767,7 +10901,7 @@
           <a:p>
             <a:pPr algn="ctr"/>
             <a:r>
-              <a:rPr sz="1500" b="1">
+              <a:rPr sz="1600" b="1">
                 <a:solidFill>
                   <a:srgbClr val="202122"/>
                 </a:solidFill>
@@ -7780,47 +10914,47 @@
       </p:sp>
       <p:sp>
         <p:nvSpPr>
-          <p:cNvPr id="16" name="TextBox 15"/>
-          <p:cNvSpPr txBox="1"/>
-          <p:nvPr/>
-        </p:nvSpPr>
-        <p:spPr>
-          <a:xfrm>
-            <a:off x="8950756" y="1801368"/>
-            <a:ext cx="2509418" cy="512064"/>
-          </a:xfrm>
-          <a:prstGeom prst="rect">
-            <a:avLst/>
-          </a:prstGeom>
-          <a:noFill/>
-        </p:spPr>
-        <p:txBody>
-          <a:bodyPr wrap="square" anchor="ctr" lIns="0" rIns="0" tIns="0" bIns="0"/>
+          <p:cNvPr id="11" name="TextBox 10"/>
+          <p:cNvSpPr txBox="1"/>
+          <p:nvPr/>
+        </p:nvSpPr>
+        <p:spPr>
+          <a:xfrm>
+            <a:off x="1371600" y="4480560"/>
+            <a:ext cx="10271455" cy="1188720"/>
+          </a:xfrm>
+          <a:prstGeom prst="rect">
+            <a:avLst/>
+          </a:prstGeom>
+          <a:noFill/>
+        </p:spPr>
+        <p:txBody>
+          <a:bodyPr wrap="square" anchor="t" lIns="0" rIns="0" tIns="0" bIns="0"/>
           <a:lstStyle/>
           <a:p>
             <a:pPr algn="l"/>
             <a:r>
-              <a:rPr sz="1900" b="1" i="0">
-                <a:solidFill>
-                  <a:srgbClr val="03306E"/>
-                </a:solidFill>
-                <a:latin typeface="Calibri"/>
-              </a:rPr>
-              <a:t>Permissions</a:t>
-            </a:r>
-          </a:p>
-        </p:txBody>
-      </p:sp>
-      <p:sp>
-        <p:nvSpPr>
-          <p:cNvPr id="17" name="TextBox 16"/>
-          <p:cNvSpPr txBox="1"/>
-          <p:nvPr/>
-        </p:nvSpPr>
-        <p:spPr>
-          <a:xfrm>
-            <a:off x="8356396" y="2468880"/>
-            <a:ext cx="3058058" cy="1143000"/>
+              <a:rPr sz="2400" b="0" i="0">
+                <a:solidFill>
+                  <a:srgbClr val="202122"/>
+                </a:solidFill>
+                <a:latin typeface="Calibri"/>
+              </a:rPr>
+              <a:t>What does asset management track?</a:t>
+            </a:r>
+          </a:p>
+        </p:txBody>
+      </p:sp>
+      <p:sp>
+        <p:nvSpPr>
+          <p:cNvPr id="12" name="TextBox 11"/>
+          <p:cNvSpPr txBox="1"/>
+          <p:nvPr/>
+        </p:nvSpPr>
+        <p:spPr>
+          <a:xfrm>
+            <a:off x="548640" y="5852160"/>
+            <a:ext cx="11094415" cy="365760"/>
           </a:xfrm>
           <a:prstGeom prst="rect">
             <a:avLst/>
@@ -7833,502 +10967,13 @@
           <a:p>
             <a:pPr algn="l"/>
             <a:r>
-              <a:rPr sz="2000" b="0" i="0">
-                <a:solidFill>
-                  <a:srgbClr val="202122"/>
-                </a:solidFill>
-                <a:latin typeface="Calibri"/>
-              </a:rPr>
-              <a:t>Resource access, group policy, shared resources.</a:t>
-            </a:r>
-          </a:p>
-        </p:txBody>
-      </p:sp>
-      <p:sp>
-        <p:nvSpPr>
-          <p:cNvPr id="18" name="Rounded Rectangle 17"/>
-          <p:cNvSpPr/>
-          <p:nvPr/>
-        </p:nvSpPr>
-        <p:spPr>
-          <a:xfrm>
-            <a:off x="548640" y="4023360"/>
-            <a:ext cx="3515258" cy="2148840"/>
-          </a:xfrm>
-          <a:prstGeom prst="roundRect">
-            <a:avLst>
-              <a:gd name="adj" fmla="val 6000"/>
-            </a:avLst>
-          </a:prstGeom>
-          <a:solidFill>
-            <a:srgbClr val="EAF3FF"/>
-          </a:solidFill>
-          <a:ln>
-            <a:noFill/>
-          </a:ln>
-          <a:effectLst/>
-        </p:spPr>
-        <p:style>
-          <a:lnRef idx="1">
-            <a:schemeClr val="accent1"/>
-          </a:lnRef>
-          <a:fillRef idx="3">
-            <a:schemeClr val="accent1"/>
-          </a:fillRef>
-          <a:effectRef idx="2">
-            <a:schemeClr val="accent1"/>
-          </a:effectRef>
-          <a:fontRef idx="minor">
-            <a:schemeClr val="lt1"/>
-          </a:fontRef>
-        </p:style>
-        <p:txBody>
-          <a:bodyPr rtlCol="0" anchor="ctr"/>
-          <a:lstStyle/>
-          <a:p/>
-        </p:txBody>
-      </p:sp>
-      <p:sp>
-        <p:nvSpPr>
-          <p:cNvPr id="19" name="Oval 18"/>
-          <p:cNvSpPr/>
-          <p:nvPr/>
-        </p:nvSpPr>
-        <p:spPr>
-          <a:xfrm>
-            <a:off x="777240" y="4251960"/>
-            <a:ext cx="457200" cy="457200"/>
-          </a:xfrm>
-          <a:prstGeom prst="ellipse">
-            <a:avLst/>
-          </a:prstGeom>
-          <a:solidFill>
-            <a:srgbClr val="4EA1FF"/>
-          </a:solidFill>
-          <a:ln>
-            <a:noFill/>
-          </a:ln>
-          <a:effectLst/>
-        </p:spPr>
-        <p:style>
-          <a:lnRef idx="1">
-            <a:schemeClr val="accent1"/>
-          </a:lnRef>
-          <a:fillRef idx="3">
-            <a:schemeClr val="accent1"/>
-          </a:fillRef>
-          <a:effectRef idx="2">
-            <a:schemeClr val="accent1"/>
-          </a:effectRef>
-          <a:fontRef idx="minor">
-            <a:schemeClr val="lt1"/>
-          </a:fontRef>
-        </p:style>
-        <p:txBody>
-          <a:bodyPr rtlCol="0" anchor="ctr" lIns="0" rIns="0" tIns="0" bIns="0"/>
-          <a:lstStyle/>
-          <a:p>
-            <a:pPr algn="ctr"/>
-            <a:r>
-              <a:rPr sz="1500" b="1">
-                <a:solidFill>
-                  <a:srgbClr val="202122"/>
-                </a:solidFill>
-                <a:latin typeface="Calibri"/>
-              </a:rPr>
-              <a:t>4</a:t>
-            </a:r>
-          </a:p>
-        </p:txBody>
-      </p:sp>
-      <p:sp>
-        <p:nvSpPr>
-          <p:cNvPr id="20" name="TextBox 19"/>
-          <p:cNvSpPr txBox="1"/>
-          <p:nvPr/>
-        </p:nvSpPr>
-        <p:spPr>
-          <a:xfrm>
-            <a:off x="1371600" y="4224528"/>
-            <a:ext cx="2509418" cy="512064"/>
-          </a:xfrm>
-          <a:prstGeom prst="rect">
-            <a:avLst/>
-          </a:prstGeom>
-          <a:noFill/>
-        </p:spPr>
-        <p:txBody>
-          <a:bodyPr wrap="square" anchor="ctr" lIns="0" rIns="0" tIns="0" bIns="0"/>
-          <a:lstStyle/>
-          <a:p>
-            <a:pPr algn="l"/>
-            <a:r>
-              <a:rPr sz="1900" b="1" i="0">
-                <a:solidFill>
-                  <a:srgbClr val="03306E"/>
-                </a:solidFill>
-                <a:latin typeface="Calibri"/>
-              </a:rPr>
-              <a:t>Software</a:t>
-            </a:r>
-          </a:p>
-        </p:txBody>
-      </p:sp>
-      <p:sp>
-        <p:nvSpPr>
-          <p:cNvPr id="21" name="TextBox 20"/>
-          <p:cNvSpPr txBox="1"/>
-          <p:nvPr/>
-        </p:nvSpPr>
-        <p:spPr>
-          <a:xfrm>
-            <a:off x="777240" y="4892040"/>
-            <a:ext cx="3058058" cy="1143000"/>
-          </a:xfrm>
-          <a:prstGeom prst="rect">
-            <a:avLst/>
-          </a:prstGeom>
-          <a:noFill/>
-        </p:spPr>
-        <p:txBody>
-          <a:bodyPr wrap="square" anchor="t" lIns="0" rIns="0" tIns="0" bIns="0"/>
-          <a:lstStyle/>
-          <a:p>
-            <a:pPr algn="l"/>
-            <a:r>
-              <a:rPr sz="2000" b="0" i="0">
-                <a:solidFill>
-                  <a:srgbClr val="202122"/>
-                </a:solidFill>
-                <a:latin typeface="Calibri"/>
-              </a:rPr>
-              <a:t>Installation and deployment, connecting to remote resources.</a:t>
-            </a:r>
-          </a:p>
-        </p:txBody>
-      </p:sp>
-      <p:sp>
-        <p:nvSpPr>
-          <p:cNvPr id="22" name="Rounded Rectangle 21"/>
-          <p:cNvSpPr/>
-          <p:nvPr/>
-        </p:nvSpPr>
-        <p:spPr>
-          <a:xfrm>
-            <a:off x="4338218" y="4023360"/>
-            <a:ext cx="3515258" cy="2148840"/>
-          </a:xfrm>
-          <a:prstGeom prst="roundRect">
-            <a:avLst>
-              <a:gd name="adj" fmla="val 6000"/>
-            </a:avLst>
-          </a:prstGeom>
-          <a:solidFill>
-            <a:srgbClr val="EAF3FF"/>
-          </a:solidFill>
-          <a:ln>
-            <a:noFill/>
-          </a:ln>
-          <a:effectLst/>
-        </p:spPr>
-        <p:style>
-          <a:lnRef idx="1">
-            <a:schemeClr val="accent1"/>
-          </a:lnRef>
-          <a:fillRef idx="3">
-            <a:schemeClr val="accent1"/>
-          </a:fillRef>
-          <a:effectRef idx="2">
-            <a:schemeClr val="accent1"/>
-          </a:effectRef>
-          <a:fontRef idx="minor">
-            <a:schemeClr val="lt1"/>
-          </a:fontRef>
-        </p:style>
-        <p:txBody>
-          <a:bodyPr rtlCol="0" anchor="ctr"/>
-          <a:lstStyle/>
-          <a:p/>
-        </p:txBody>
-      </p:sp>
-      <p:sp>
-        <p:nvSpPr>
-          <p:cNvPr id="23" name="Oval 22"/>
-          <p:cNvSpPr/>
-          <p:nvPr/>
-        </p:nvSpPr>
-        <p:spPr>
-          <a:xfrm>
-            <a:off x="4566818" y="4251960"/>
-            <a:ext cx="457200" cy="457200"/>
-          </a:xfrm>
-          <a:prstGeom prst="ellipse">
-            <a:avLst/>
-          </a:prstGeom>
-          <a:solidFill>
-            <a:srgbClr val="4EA1FF"/>
-          </a:solidFill>
-          <a:ln>
-            <a:noFill/>
-          </a:ln>
-          <a:effectLst/>
-        </p:spPr>
-        <p:style>
-          <a:lnRef idx="1">
-            <a:schemeClr val="accent1"/>
-          </a:lnRef>
-          <a:fillRef idx="3">
-            <a:schemeClr val="accent1"/>
-          </a:fillRef>
-          <a:effectRef idx="2">
-            <a:schemeClr val="accent1"/>
-          </a:effectRef>
-          <a:fontRef idx="minor">
-            <a:schemeClr val="lt1"/>
-          </a:fontRef>
-        </p:style>
-        <p:txBody>
-          <a:bodyPr rtlCol="0" anchor="ctr" lIns="0" rIns="0" tIns="0" bIns="0"/>
-          <a:lstStyle/>
-          <a:p>
-            <a:pPr algn="ctr"/>
-            <a:r>
-              <a:rPr sz="1500" b="1">
-                <a:solidFill>
-                  <a:srgbClr val="202122"/>
-                </a:solidFill>
-                <a:latin typeface="Calibri"/>
-              </a:rPr>
-              <a:t>5</a:t>
-            </a:r>
-          </a:p>
-        </p:txBody>
-      </p:sp>
-      <p:sp>
-        <p:nvSpPr>
-          <p:cNvPr id="24" name="TextBox 23"/>
-          <p:cNvSpPr txBox="1"/>
-          <p:nvPr/>
-        </p:nvSpPr>
-        <p:spPr>
-          <a:xfrm>
-            <a:off x="5161178" y="4224528"/>
-            <a:ext cx="2509418" cy="512064"/>
-          </a:xfrm>
-          <a:prstGeom prst="rect">
-            <a:avLst/>
-          </a:prstGeom>
-          <a:noFill/>
-        </p:spPr>
-        <p:txBody>
-          <a:bodyPr wrap="square" anchor="ctr" lIns="0" rIns="0" tIns="0" bIns="0"/>
-          <a:lstStyle/>
-          <a:p>
-            <a:pPr algn="l"/>
-            <a:r>
-              <a:rPr sz="1900" b="1" i="0">
-                <a:solidFill>
-                  <a:srgbClr val="03306E"/>
-                </a:solidFill>
-                <a:latin typeface="Calibri"/>
-              </a:rPr>
-              <a:t>Faults</a:t>
-            </a:r>
-          </a:p>
-        </p:txBody>
-      </p:sp>
-      <p:sp>
-        <p:nvSpPr>
-          <p:cNvPr id="25" name="TextBox 24"/>
-          <p:cNvSpPr txBox="1"/>
-          <p:nvPr/>
-        </p:nvSpPr>
-        <p:spPr>
-          <a:xfrm>
-            <a:off x="4566818" y="4892040"/>
-            <a:ext cx="3058058" cy="1143000"/>
-          </a:xfrm>
-          <a:prstGeom prst="rect">
-            <a:avLst/>
-          </a:prstGeom>
-          <a:noFill/>
-        </p:spPr>
-        <p:txBody>
-          <a:bodyPr wrap="square" anchor="t" lIns="0" rIns="0" tIns="0" bIns="0"/>
-          <a:lstStyle/>
-          <a:p>
-            <a:pPr algn="l"/>
-            <a:r>
-              <a:rPr sz="2000" b="0" i="0">
-                <a:solidFill>
-                  <a:srgbClr val="202122"/>
-                </a:solidFill>
-                <a:latin typeface="Calibri"/>
-              </a:rPr>
-              <a:t>Identify, escalate from first to third line, use known fixes.</a:t>
-            </a:r>
-          </a:p>
-        </p:txBody>
-      </p:sp>
-      <p:sp>
-        <p:nvSpPr>
-          <p:cNvPr id="26" name="Rounded Rectangle 25"/>
-          <p:cNvSpPr/>
-          <p:nvPr/>
-        </p:nvSpPr>
-        <p:spPr>
-          <a:xfrm>
-            <a:off x="8127796" y="4023360"/>
-            <a:ext cx="3515258" cy="2148840"/>
-          </a:xfrm>
-          <a:prstGeom prst="roundRect">
-            <a:avLst>
-              <a:gd name="adj" fmla="val 6000"/>
-            </a:avLst>
-          </a:prstGeom>
-          <a:solidFill>
-            <a:srgbClr val="EAF3FF"/>
-          </a:solidFill>
-          <a:ln>
-            <a:noFill/>
-          </a:ln>
-          <a:effectLst/>
-        </p:spPr>
-        <p:style>
-          <a:lnRef idx="1">
-            <a:schemeClr val="accent1"/>
-          </a:lnRef>
-          <a:fillRef idx="3">
-            <a:schemeClr val="accent1"/>
-          </a:fillRef>
-          <a:effectRef idx="2">
-            <a:schemeClr val="accent1"/>
-          </a:effectRef>
-          <a:fontRef idx="minor">
-            <a:schemeClr val="lt1"/>
-          </a:fontRef>
-        </p:style>
-        <p:txBody>
-          <a:bodyPr rtlCol="0" anchor="ctr"/>
-          <a:lstStyle/>
-          <a:p/>
-        </p:txBody>
-      </p:sp>
-      <p:sp>
-        <p:nvSpPr>
-          <p:cNvPr id="27" name="Oval 26"/>
-          <p:cNvSpPr/>
-          <p:nvPr/>
-        </p:nvSpPr>
-        <p:spPr>
-          <a:xfrm>
-            <a:off x="8356396" y="4251960"/>
-            <a:ext cx="457200" cy="457200"/>
-          </a:xfrm>
-          <a:prstGeom prst="ellipse">
-            <a:avLst/>
-          </a:prstGeom>
-          <a:solidFill>
-            <a:srgbClr val="4EA1FF"/>
-          </a:solidFill>
-          <a:ln>
-            <a:noFill/>
-          </a:ln>
-          <a:effectLst/>
-        </p:spPr>
-        <p:style>
-          <a:lnRef idx="1">
-            <a:schemeClr val="accent1"/>
-          </a:lnRef>
-          <a:fillRef idx="3">
-            <a:schemeClr val="accent1"/>
-          </a:fillRef>
-          <a:effectRef idx="2">
-            <a:schemeClr val="accent1"/>
-          </a:effectRef>
-          <a:fontRef idx="minor">
-            <a:schemeClr val="lt1"/>
-          </a:fontRef>
-        </p:style>
-        <p:txBody>
-          <a:bodyPr rtlCol="0" anchor="ctr" lIns="0" rIns="0" tIns="0" bIns="0"/>
-          <a:lstStyle/>
-          <a:p>
-            <a:pPr algn="ctr"/>
-            <a:r>
-              <a:rPr sz="1500" b="1">
-                <a:solidFill>
-                  <a:srgbClr val="202122"/>
-                </a:solidFill>
-                <a:latin typeface="Calibri"/>
-              </a:rPr>
-              <a:t>6</a:t>
-            </a:r>
-          </a:p>
-        </p:txBody>
-      </p:sp>
-      <p:sp>
-        <p:nvSpPr>
-          <p:cNvPr id="28" name="TextBox 27"/>
-          <p:cNvSpPr txBox="1"/>
-          <p:nvPr/>
-        </p:nvSpPr>
-        <p:spPr>
-          <a:xfrm>
-            <a:off x="8950756" y="4224528"/>
-            <a:ext cx="2509418" cy="512064"/>
-          </a:xfrm>
-          <a:prstGeom prst="rect">
-            <a:avLst/>
-          </a:prstGeom>
-          <a:noFill/>
-        </p:spPr>
-        <p:txBody>
-          <a:bodyPr wrap="square" anchor="ctr" lIns="0" rIns="0" tIns="0" bIns="0"/>
-          <a:lstStyle/>
-          <a:p>
-            <a:pPr algn="l"/>
-            <a:r>
-              <a:rPr sz="1900" b="1" i="0">
-                <a:solidFill>
-                  <a:srgbClr val="03306E"/>
-                </a:solidFill>
-                <a:latin typeface="Calibri"/>
-              </a:rPr>
-              <a:t>Knowledge</a:t>
-            </a:r>
-          </a:p>
-        </p:txBody>
-      </p:sp>
-      <p:sp>
-        <p:nvSpPr>
-          <p:cNvPr id="29" name="TextBox 28"/>
-          <p:cNvSpPr txBox="1"/>
-          <p:nvPr/>
-        </p:nvSpPr>
-        <p:spPr>
-          <a:xfrm>
-            <a:off x="8356396" y="4892040"/>
-            <a:ext cx="3058058" cy="1143000"/>
-          </a:xfrm>
-          <a:prstGeom prst="rect">
-            <a:avLst/>
-          </a:prstGeom>
-          <a:noFill/>
-        </p:spPr>
-        <p:txBody>
-          <a:bodyPr wrap="square" anchor="t" lIns="0" rIns="0" tIns="0" bIns="0"/>
-          <a:lstStyle/>
-          <a:p>
-            <a:pPr algn="l"/>
-            <a:r>
-              <a:rPr sz="2000" b="0" i="0">
-                <a:solidFill>
-                  <a:srgbClr val="202122"/>
-                </a:solidFill>
-                <a:latin typeface="Calibri"/>
-              </a:rPr>
-              <a:t>Documentation, SOPs, asset management and auditing.</a:t>
+              <a:rPr sz="1300" b="0" i="1">
+                <a:solidFill>
+                  <a:srgbClr val="54595D"/>
+                </a:solidFill>
+                <a:latin typeface="Calibri"/>
+              </a:rPr>
+              <a:t>Answer on mini whiteboards or in your book. Answers are in the speaker notes.</a:t>
             </a:r>
           </a:p>
         </p:txBody>
@@ -8420,7 +11065,7 @@
                 </a:solidFill>
                 <a:latin typeface="Cambria"/>
               </a:rPr>
-              <a:t>Monitoring and operating systems</a:t>
+              <a:t>The troubleshooting method</a:t>
             </a:r>
           </a:p>
         </p:txBody>
@@ -8499,8 +11144,8 @@
         </p:nvSpPr>
         <p:spPr>
           <a:xfrm>
-            <a:off x="548640" y="1600200"/>
-            <a:ext cx="6675120" cy="4572000"/>
+            <a:off x="548640" y="1554480"/>
+            <a:ext cx="6720840" cy="4617720"/>
           </a:xfrm>
           <a:prstGeom prst="rect">
             <a:avLst/>
@@ -8513,108 +11158,44 @@
           </a:bodyPr>
           <a:lstStyle/>
           <a:p>
-            <a:pPr marL="274320" indent="-274320">
+            <a:pPr>
               <a:spcAft>
-                <a:spcPts val="1080"/>
+                <a:spcPts val="1320"/>
               </a:spcAft>
-              <a:buClr>
-                <a:srgbClr val="0645AD"/>
-              </a:buClr>
-              <a:buFont typeface="Arial"/>
-              <a:buChar char="•"/>
             </a:pPr>
             <a:r>
-              <a:rPr sz="2400" b="0">
+              <a:rPr sz="2200" b="0">
                 <a:solidFill>
                   <a:srgbClr val="202122"/>
                 </a:solidFill>
                 <a:latin typeface="Calibri"/>
               </a:rPr>
-              <a:t>Analyse performance of hardware, software, databases, networks and people.</a:t>
-            </a:r>
-          </a:p>
-          <a:p>
-            <a:pPr marL="274320" indent="-274320">
+              <a:t>A structured method stops you guessing.</a:t>
+            </a:r>
+          </a:p>
+          <a:p>
+            <a:pPr>
               <a:spcAft>
-                <a:spcPts val="1080"/>
+                <a:spcPts val="1320"/>
               </a:spcAft>
-              <a:buClr>
-                <a:srgbClr val="0645AD"/>
-              </a:buClr>
-              <a:buFont typeface="Arial"/>
-              <a:buChar char="•"/>
             </a:pPr>
             <a:r>
-              <a:rPr sz="2400" b="0">
+              <a:rPr sz="2200" b="1">
                 <a:solidFill>
                   <a:srgbClr val="202122"/>
                 </a:solidFill>
                 <a:latin typeface="Calibri"/>
               </a:rPr>
-              <a:t>Monitor security controls (firewalls, anti-virus) and network traffic.</a:t>
-            </a:r>
-          </a:p>
-          <a:p>
-            <a:pPr marL="274320" indent="-274320">
-              <a:spcAft>
-                <a:spcPts val="1080"/>
-              </a:spcAft>
-              <a:buClr>
-                <a:srgbClr val="0645AD"/>
-              </a:buClr>
-              <a:buFont typeface="Arial"/>
-              <a:buChar char="•"/>
-            </a:pPr>
-            <a:r>
-              <a:rPr sz="2400" b="0">
+              <a:t>Gather information:</a:t>
+            </a:r>
+            <a:r>
+              <a:rPr sz="2200" b="0">
                 <a:solidFill>
                   <a:srgbClr val="202122"/>
                 </a:solidFill>
                 <a:latin typeface="Calibri"/>
               </a:rPr>
-              <a:t>Track licences and log and tag assets.</a:t>
-            </a:r>
-          </a:p>
-          <a:p>
-            <a:pPr marL="274320" indent="-274320">
-              <a:spcAft>
-                <a:spcPts val="1080"/>
-              </a:spcAft>
-              <a:buClr>
-                <a:srgbClr val="0645AD"/>
-              </a:buClr>
-              <a:buFont typeface="Arial"/>
-              <a:buChar char="•"/>
-            </a:pPr>
-            <a:r>
-              <a:rPr sz="2400" b="0">
-                <a:solidFill>
-                  <a:srgbClr val="202122"/>
-                </a:solidFill>
-                <a:latin typeface="Calibri"/>
-              </a:rPr>
-              <a:t>Create, update and communicate tickets; support users remotely.</a:t>
-            </a:r>
-          </a:p>
-          <a:p>
-            <a:pPr marL="274320" indent="-274320">
-              <a:spcAft>
-                <a:spcPts val="1080"/>
-              </a:spcAft>
-              <a:buClr>
-                <a:srgbClr val="0645AD"/>
-              </a:buClr>
-              <a:buFont typeface="Arial"/>
-              <a:buChar char="•"/>
-            </a:pPr>
-            <a:r>
-              <a:rPr sz="2400" b="0">
-                <a:solidFill>
-                  <a:srgbClr val="202122"/>
-                </a:solidFill>
-                <a:latin typeface="Calibri"/>
-              </a:rPr>
-              <a:t>Review user feedback critically.</a:t>
+              <a:t> what exactly happened, when, and what changed? Analyse the problem: rule out known fixes and common causes. Test the remaining possibilities one at a time. Resolve it: back up data, apply the fix, test it and repeat until it's solved. Document the cause and fix in the CMS. Prevent it recurring with a lasting control.</a:t>
             </a:r>
           </a:p>
         </p:txBody>
@@ -8627,8 +11208,8 @@
         </p:nvSpPr>
         <p:spPr>
           <a:xfrm>
-            <a:off x="7772400" y="1600200"/>
-            <a:ext cx="3867912" cy="4434840"/>
+            <a:off x="7772400" y="1554480"/>
+            <a:ext cx="3867912" cy="4526280"/>
           </a:xfrm>
           <a:prstGeom prst="roundRect">
             <a:avLst>
@@ -8671,7 +11252,7 @@
         </p:nvSpPr>
         <p:spPr>
           <a:xfrm>
-            <a:off x="8046720" y="1874519"/>
+            <a:off x="8046720" y="1828800"/>
             <a:ext cx="548640" cy="548640"/>
           </a:xfrm>
           <a:prstGeom prst="ellipse">
@@ -8705,13 +11286,13 @@
           <a:p>
             <a:pPr algn="ctr"/>
             <a:r>
-              <a:rPr sz="2000" b="1">
+              <a:rPr sz="1300" b="1">
                 <a:solidFill>
                   <a:srgbClr val="202122"/>
                 </a:solidFill>
                 <a:latin typeface="Calibri"/>
               </a:rPr>
-              <a:t>!</a:t>
+              <a:t>e.g.</a:t>
             </a:r>
           </a:p>
         </p:txBody>
@@ -8724,7 +11305,7 @@
         </p:nvSpPr>
         <p:spPr>
           <a:xfrm>
-            <a:off x="8046720" y="2606040"/>
+            <a:off x="8046720" y="2560320"/>
             <a:ext cx="3291840" cy="365760"/>
           </a:xfrm>
           <a:prstGeom prst="rect">
@@ -8744,7 +11325,7 @@
                 </a:solidFill>
                 <a:latin typeface="Calibri"/>
               </a:rPr>
-              <a:t>KEY IDEA</a:t>
+              <a:t>EXAMPLE</a:t>
             </a:r>
           </a:p>
         </p:txBody>
@@ -8757,8 +11338,8 @@
         </p:nvSpPr>
         <p:spPr>
           <a:xfrm>
-            <a:off x="8046720" y="3017520"/>
-            <a:ext cx="3291840" cy="2926080"/>
+            <a:off x="8046720" y="2971800"/>
+            <a:ext cx="3291840" cy="2971800"/>
           </a:xfrm>
           <a:prstGeom prst="rect">
             <a:avLst/>
@@ -8771,13 +11352,13 @@
           <a:p>
             <a:pPr algn="l"/>
             <a:r>
-              <a:rPr sz="2200" b="0" i="0">
+              <a:rPr sz="1900" b="0" i="0">
                 <a:solidFill>
                   <a:srgbClr val="FFFFFF"/>
                 </a:solidFill>
                 <a:latin typeface="Cambria"/>
               </a:rPr>
-              <a:t>Record and summarise findings clearly using correct technical terms, so they can shape future policy.</a:t>
+              <a:t>'The internet is broken' turns out, after questions, to be one website failing on one PC. Clearing the DNS cache fixes it; the cause is documented.</a:t>
             </a:r>
           </a:p>
         </p:txBody>
@@ -8869,7 +11450,7 @@
                 </a:solidFill>
                 <a:latin typeface="Cambria"/>
               </a:rPr>
-              <a:t>Check your understanding</a:t>
+              <a:t>The troubleshooting method</a:t>
             </a:r>
           </a:p>
         </p:txBody>
@@ -8942,14 +11523,56 @@
       </p:sp>
       <p:sp>
         <p:nvSpPr>
-          <p:cNvPr id="6" name="Oval 5"/>
+          <p:cNvPr id="6" name="Rectangle 5"/>
           <p:cNvSpPr/>
           <p:nvPr/>
         </p:nvSpPr>
         <p:spPr>
           <a:xfrm>
-            <a:off x="548640" y="1618488"/>
-            <a:ext cx="411480" cy="411480"/>
+            <a:off x="1416024" y="2884932"/>
+            <a:ext cx="9359646" cy="36576"/>
+          </a:xfrm>
+          <a:prstGeom prst="rect">
+            <a:avLst/>
+          </a:prstGeom>
+          <a:solidFill>
+            <a:srgbClr val="A9C8F0"/>
+          </a:solidFill>
+          <a:ln>
+            <a:noFill/>
+          </a:ln>
+          <a:effectLst/>
+        </p:spPr>
+        <p:style>
+          <a:lnRef idx="1">
+            <a:schemeClr val="accent1"/>
+          </a:lnRef>
+          <a:fillRef idx="3">
+            <a:schemeClr val="accent1"/>
+          </a:fillRef>
+          <a:effectRef idx="2">
+            <a:schemeClr val="accent1"/>
+          </a:effectRef>
+          <a:fontRef idx="minor">
+            <a:schemeClr val="lt1"/>
+          </a:fontRef>
+        </p:style>
+        <p:txBody>
+          <a:bodyPr rtlCol="0" anchor="ctr"/>
+          <a:lstStyle/>
+          <a:p/>
+        </p:txBody>
+      </p:sp>
+      <p:sp>
+        <p:nvSpPr>
+          <p:cNvPr id="7" name="Oval 6"/>
+          <p:cNvSpPr/>
+          <p:nvPr/>
+        </p:nvSpPr>
+        <p:spPr>
+          <a:xfrm>
+            <a:off x="1095984" y="2583180"/>
+            <a:ext cx="640080" cy="640080"/>
           </a:xfrm>
           <a:prstGeom prst="ellipse">
             <a:avLst/>
@@ -8982,7 +11605,7 @@
           <a:p>
             <a:pPr algn="ctr"/>
             <a:r>
-              <a:rPr sz="1400" b="1">
+              <a:rPr sz="2000" b="1">
                 <a:solidFill>
                   <a:srgbClr val="202122"/>
                 </a:solidFill>
@@ -8995,14 +11618,14 @@
       </p:sp>
       <p:sp>
         <p:nvSpPr>
-          <p:cNvPr id="7" name="TextBox 6"/>
-          <p:cNvSpPr txBox="1"/>
-          <p:nvPr/>
-        </p:nvSpPr>
-        <p:spPr>
-          <a:xfrm>
-            <a:off x="1234440" y="1600200"/>
-            <a:ext cx="10408615" cy="1030986"/>
+          <p:cNvPr id="8" name="TextBox 7"/>
+          <p:cNvSpPr txBox="1"/>
+          <p:nvPr/>
+        </p:nvSpPr>
+        <p:spPr>
+          <a:xfrm>
+            <a:off x="548640" y="3360420"/>
+            <a:ext cx="1734769" cy="731520"/>
           </a:xfrm>
           <a:prstGeom prst="rect">
             <a:avLst/>
@@ -9013,29 +11636,106 @@
           <a:bodyPr wrap="square" anchor="t" lIns="0" rIns="0" tIns="0" bIns="0"/>
           <a:lstStyle/>
           <a:p>
+            <a:pPr algn="ctr"/>
+            <a:r>
+              <a:rPr sz="1700" b="1" i="0">
+                <a:solidFill>
+                  <a:srgbClr val="03306E"/>
+                </a:solidFill>
+                <a:latin typeface="Calibri"/>
+              </a:rPr>
+              <a:t>Gather</a:t>
+            </a:r>
+          </a:p>
+        </p:txBody>
+      </p:sp>
+      <p:sp>
+        <p:nvSpPr>
+          <p:cNvPr id="9" name="Rounded Rectangle 8"/>
+          <p:cNvSpPr/>
+          <p:nvPr/>
+        </p:nvSpPr>
+        <p:spPr>
+          <a:xfrm>
+            <a:off x="548640" y="4137660"/>
+            <a:ext cx="1734769" cy="1051560"/>
+          </a:xfrm>
+          <a:prstGeom prst="roundRect">
+            <a:avLst>
+              <a:gd name="adj" fmla="val 6000"/>
+            </a:avLst>
+          </a:prstGeom>
+          <a:solidFill>
+            <a:srgbClr val="EAF3FF"/>
+          </a:solidFill>
+          <a:ln>
+            <a:noFill/>
+          </a:ln>
+          <a:effectLst/>
+        </p:spPr>
+        <p:style>
+          <a:lnRef idx="1">
+            <a:schemeClr val="accent1"/>
+          </a:lnRef>
+          <a:fillRef idx="3">
+            <a:schemeClr val="accent1"/>
+          </a:fillRef>
+          <a:effectRef idx="2">
+            <a:schemeClr val="accent1"/>
+          </a:effectRef>
+          <a:fontRef idx="minor">
+            <a:schemeClr val="lt1"/>
+          </a:fontRef>
+        </p:style>
+        <p:txBody>
+          <a:bodyPr rtlCol="0" anchor="ctr"/>
+          <a:lstStyle/>
+          <a:p/>
+        </p:txBody>
+      </p:sp>
+      <p:sp>
+        <p:nvSpPr>
+          <p:cNvPr id="10" name="TextBox 9"/>
+          <p:cNvSpPr txBox="1"/>
+          <p:nvPr/>
+        </p:nvSpPr>
+        <p:spPr>
+          <a:xfrm>
+            <a:off x="685800" y="4274820"/>
+            <a:ext cx="1460449" cy="777239"/>
+          </a:xfrm>
+          <a:prstGeom prst="rect">
+            <a:avLst/>
+          </a:prstGeom>
+          <a:noFill/>
+        </p:spPr>
+        <p:txBody>
+          <a:bodyPr wrap="square" anchor="t" lIns="0" rIns="0" tIns="0" bIns="0"/>
+          <a:lstStyle/>
+          <a:p>
             <a:pPr algn="l"/>
             <a:r>
-              <a:rPr sz="2200" b="0" i="0">
+              <a:rPr sz="1400" b="0" i="0">
                 <a:solidFill>
                   <a:srgbClr val="202122"/>
                 </a:solidFill>
                 <a:latin typeface="Calibri"/>
               </a:rPr>
-              <a:t>What is the first step of the troubleshooting method?</a:t>
-            </a:r>
-          </a:p>
-        </p:txBody>
-      </p:sp>
-      <p:sp>
-        <p:nvSpPr>
-          <p:cNvPr id="8" name="Oval 7"/>
+              <a:t>Investigate the request and likely causes.</a:t>
+            </a:r>
+          </a:p>
+        </p:txBody>
+      </p:sp>
+      <p:sp>
+        <p:nvSpPr>
+          <p:cNvPr id="11" name="Oval 10"/>
           <p:cNvSpPr/>
           <p:nvPr/>
         </p:nvSpPr>
         <p:spPr>
           <a:xfrm>
-            <a:off x="548640" y="2814066"/>
-            <a:ext cx="411480" cy="411480"/>
+            <a:off x="2967913" y="2583180"/>
+            <a:ext cx="640080" cy="640080"/>
           </a:xfrm>
           <a:prstGeom prst="ellipse">
             <a:avLst/>
@@ -9068,7 +11768,7 @@
           <a:p>
             <a:pPr algn="ctr"/>
             <a:r>
-              <a:rPr sz="1400" b="1">
+              <a:rPr sz="2000" b="1">
                 <a:solidFill>
                   <a:srgbClr val="202122"/>
                 </a:solidFill>
@@ -9081,14 +11781,14 @@
       </p:sp>
       <p:sp>
         <p:nvSpPr>
-          <p:cNvPr id="9" name="TextBox 8"/>
-          <p:cNvSpPr txBox="1"/>
-          <p:nvPr/>
-        </p:nvSpPr>
-        <p:spPr>
-          <a:xfrm>
-            <a:off x="1234440" y="2795778"/>
-            <a:ext cx="10408615" cy="1030986"/>
+          <p:cNvPr id="12" name="TextBox 11"/>
+          <p:cNvSpPr txBox="1"/>
+          <p:nvPr/>
+        </p:nvSpPr>
+        <p:spPr>
+          <a:xfrm>
+            <a:off x="2420569" y="3360420"/>
+            <a:ext cx="1734769" cy="731520"/>
           </a:xfrm>
           <a:prstGeom prst="rect">
             <a:avLst/>
@@ -9099,29 +11799,106 @@
           <a:bodyPr wrap="square" anchor="t" lIns="0" rIns="0" tIns="0" bIns="0"/>
           <a:lstStyle/>
           <a:p>
+            <a:pPr algn="ctr"/>
+            <a:r>
+              <a:rPr sz="1700" b="1" i="0">
+                <a:solidFill>
+                  <a:srgbClr val="03306E"/>
+                </a:solidFill>
+                <a:latin typeface="Calibri"/>
+              </a:rPr>
+              <a:t>Analyse</a:t>
+            </a:r>
+          </a:p>
+        </p:txBody>
+      </p:sp>
+      <p:sp>
+        <p:nvSpPr>
+          <p:cNvPr id="13" name="Rounded Rectangle 12"/>
+          <p:cNvSpPr/>
+          <p:nvPr/>
+        </p:nvSpPr>
+        <p:spPr>
+          <a:xfrm>
+            <a:off x="2420569" y="4137660"/>
+            <a:ext cx="1734769" cy="1051560"/>
+          </a:xfrm>
+          <a:prstGeom prst="roundRect">
+            <a:avLst>
+              <a:gd name="adj" fmla="val 6000"/>
+            </a:avLst>
+          </a:prstGeom>
+          <a:solidFill>
+            <a:srgbClr val="EAF3FF"/>
+          </a:solidFill>
+          <a:ln>
+            <a:noFill/>
+          </a:ln>
+          <a:effectLst/>
+        </p:spPr>
+        <p:style>
+          <a:lnRef idx="1">
+            <a:schemeClr val="accent1"/>
+          </a:lnRef>
+          <a:fillRef idx="3">
+            <a:schemeClr val="accent1"/>
+          </a:fillRef>
+          <a:effectRef idx="2">
+            <a:schemeClr val="accent1"/>
+          </a:effectRef>
+          <a:fontRef idx="minor">
+            <a:schemeClr val="lt1"/>
+          </a:fontRef>
+        </p:style>
+        <p:txBody>
+          <a:bodyPr rtlCol="0" anchor="ctr"/>
+          <a:lstStyle/>
+          <a:p/>
+        </p:txBody>
+      </p:sp>
+      <p:sp>
+        <p:nvSpPr>
+          <p:cNvPr id="14" name="TextBox 13"/>
+          <p:cNvSpPr txBox="1"/>
+          <p:nvPr/>
+        </p:nvSpPr>
+        <p:spPr>
+          <a:xfrm>
+            <a:off x="2557729" y="4274820"/>
+            <a:ext cx="1460449" cy="777239"/>
+          </a:xfrm>
+          <a:prstGeom prst="rect">
+            <a:avLst/>
+          </a:prstGeom>
+          <a:noFill/>
+        </p:spPr>
+        <p:txBody>
+          <a:bodyPr wrap="square" anchor="t" lIns="0" rIns="0" tIns="0" bIns="0"/>
+          <a:lstStyle/>
+          <a:p>
             <a:pPr algn="l"/>
             <a:r>
-              <a:rPr sz="2200" b="0" i="0">
+              <a:rPr sz="1400" b="0" i="0">
                 <a:solidFill>
                   <a:srgbClr val="202122"/>
                 </a:solidFill>
                 <a:latin typeface="Calibri"/>
               </a:rPr>
-              <a:t>Why back up before implementing a fix?</a:t>
-            </a:r>
-          </a:p>
-        </p:txBody>
-      </p:sp>
-      <p:sp>
-        <p:nvSpPr>
-          <p:cNvPr id="10" name="Oval 9"/>
+              <a:t>Rule out known fixes and causes.</a:t>
+            </a:r>
+          </a:p>
+        </p:txBody>
+      </p:sp>
+      <p:sp>
+        <p:nvSpPr>
+          <p:cNvPr id="15" name="Oval 14"/>
           <p:cNvSpPr/>
           <p:nvPr/>
         </p:nvSpPr>
         <p:spPr>
           <a:xfrm>
-            <a:off x="548640" y="4009644"/>
-            <a:ext cx="411480" cy="411480"/>
+            <a:off x="4839843" y="2583180"/>
+            <a:ext cx="640080" cy="640080"/>
           </a:xfrm>
           <a:prstGeom prst="ellipse">
             <a:avLst/>
@@ -9154,7 +11931,7 @@
           <a:p>
             <a:pPr algn="ctr"/>
             <a:r>
-              <a:rPr sz="1400" b="1">
+              <a:rPr sz="2000" b="1">
                 <a:solidFill>
                   <a:srgbClr val="202122"/>
                 </a:solidFill>
@@ -9167,14 +11944,14 @@
       </p:sp>
       <p:sp>
         <p:nvSpPr>
-          <p:cNvPr id="11" name="TextBox 10"/>
-          <p:cNvSpPr txBox="1"/>
-          <p:nvPr/>
-        </p:nvSpPr>
-        <p:spPr>
-          <a:xfrm>
-            <a:off x="1234440" y="3991356"/>
-            <a:ext cx="10408615" cy="1030986"/>
+          <p:cNvPr id="16" name="TextBox 15"/>
+          <p:cNvSpPr txBox="1"/>
+          <p:nvPr/>
+        </p:nvSpPr>
+        <p:spPr>
+          <a:xfrm>
+            <a:off x="4292498" y="3360420"/>
+            <a:ext cx="1734769" cy="731520"/>
           </a:xfrm>
           <a:prstGeom prst="rect">
             <a:avLst/>
@@ -9185,29 +11962,106 @@
           <a:bodyPr wrap="square" anchor="t" lIns="0" rIns="0" tIns="0" bIns="0"/>
           <a:lstStyle/>
           <a:p>
+            <a:pPr algn="ctr"/>
+            <a:r>
+              <a:rPr sz="1700" b="1" i="0">
+                <a:solidFill>
+                  <a:srgbClr val="03306E"/>
+                </a:solidFill>
+                <a:latin typeface="Calibri"/>
+              </a:rPr>
+              <a:t>Test</a:t>
+            </a:r>
+          </a:p>
+        </p:txBody>
+      </p:sp>
+      <p:sp>
+        <p:nvSpPr>
+          <p:cNvPr id="17" name="Rounded Rectangle 16"/>
+          <p:cNvSpPr/>
+          <p:nvPr/>
+        </p:nvSpPr>
+        <p:spPr>
+          <a:xfrm>
+            <a:off x="4292498" y="4137660"/>
+            <a:ext cx="1734769" cy="1051560"/>
+          </a:xfrm>
+          <a:prstGeom prst="roundRect">
+            <a:avLst>
+              <a:gd name="adj" fmla="val 6000"/>
+            </a:avLst>
+          </a:prstGeom>
+          <a:solidFill>
+            <a:srgbClr val="EAF3FF"/>
+          </a:solidFill>
+          <a:ln>
+            <a:noFill/>
+          </a:ln>
+          <a:effectLst/>
+        </p:spPr>
+        <p:style>
+          <a:lnRef idx="1">
+            <a:schemeClr val="accent1"/>
+          </a:lnRef>
+          <a:fillRef idx="3">
+            <a:schemeClr val="accent1"/>
+          </a:fillRef>
+          <a:effectRef idx="2">
+            <a:schemeClr val="accent1"/>
+          </a:effectRef>
+          <a:fontRef idx="minor">
+            <a:schemeClr val="lt1"/>
+          </a:fontRef>
+        </p:style>
+        <p:txBody>
+          <a:bodyPr rtlCol="0" anchor="ctr"/>
+          <a:lstStyle/>
+          <a:p/>
+        </p:txBody>
+      </p:sp>
+      <p:sp>
+        <p:nvSpPr>
+          <p:cNvPr id="18" name="TextBox 17"/>
+          <p:cNvSpPr txBox="1"/>
+          <p:nvPr/>
+        </p:nvSpPr>
+        <p:spPr>
+          <a:xfrm>
+            <a:off x="4429658" y="4274820"/>
+            <a:ext cx="1460449" cy="777239"/>
+          </a:xfrm>
+          <a:prstGeom prst="rect">
+            <a:avLst/>
+          </a:prstGeom>
+          <a:noFill/>
+        </p:spPr>
+        <p:txBody>
+          <a:bodyPr wrap="square" anchor="t" lIns="0" rIns="0" tIns="0" bIns="0"/>
+          <a:lstStyle/>
+          <a:p>
             <a:pPr algn="l"/>
             <a:r>
-              <a:rPr sz="2200" b="0" i="0">
+              <a:rPr sz="1400" b="0" i="0">
                 <a:solidFill>
                   <a:srgbClr val="202122"/>
                 </a:solidFill>
                 <a:latin typeface="Calibri"/>
               </a:rPr>
-              <a:t>What is escalation?</a:t>
-            </a:r>
-          </a:p>
-        </p:txBody>
-      </p:sp>
-      <p:sp>
-        <p:nvSpPr>
-          <p:cNvPr id="12" name="Oval 11"/>
+              <a:t>Test the remaining possibilities.</a:t>
+            </a:r>
+          </a:p>
+        </p:txBody>
+      </p:sp>
+      <p:sp>
+        <p:nvSpPr>
+          <p:cNvPr id="19" name="Oval 18"/>
           <p:cNvSpPr/>
           <p:nvPr/>
         </p:nvSpPr>
         <p:spPr>
           <a:xfrm>
-            <a:off x="548640" y="5205221"/>
-            <a:ext cx="411480" cy="411480"/>
+            <a:off x="6711772" y="2583180"/>
+            <a:ext cx="640080" cy="640080"/>
           </a:xfrm>
           <a:prstGeom prst="ellipse">
             <a:avLst/>
@@ -9240,7 +12094,7 @@
           <a:p>
             <a:pPr algn="ctr"/>
             <a:r>
-              <a:rPr sz="1400" b="1">
+              <a:rPr sz="2000" b="1">
                 <a:solidFill>
                   <a:srgbClr val="202122"/>
                 </a:solidFill>
@@ -9253,14 +12107,14 @@
       </p:sp>
       <p:sp>
         <p:nvSpPr>
-          <p:cNvPr id="13" name="TextBox 12"/>
-          <p:cNvSpPr txBox="1"/>
-          <p:nvPr/>
-        </p:nvSpPr>
-        <p:spPr>
-          <a:xfrm>
-            <a:off x="1234440" y="5186933"/>
-            <a:ext cx="10408615" cy="1030986"/>
+          <p:cNvPr id="20" name="TextBox 19"/>
+          <p:cNvSpPr txBox="1"/>
+          <p:nvPr/>
+        </p:nvSpPr>
+        <p:spPr>
+          <a:xfrm>
+            <a:off x="6164427" y="3360420"/>
+            <a:ext cx="1734769" cy="731520"/>
           </a:xfrm>
           <a:prstGeom prst="rect">
             <a:avLst/>
@@ -9271,15 +12125,418 @@
           <a:bodyPr wrap="square" anchor="t" lIns="0" rIns="0" tIns="0" bIns="0"/>
           <a:lstStyle/>
           <a:p>
+            <a:pPr algn="ctr"/>
+            <a:r>
+              <a:rPr sz="1700" b="1" i="0">
+                <a:solidFill>
+                  <a:srgbClr val="03306E"/>
+                </a:solidFill>
+                <a:latin typeface="Calibri"/>
+              </a:rPr>
+              <a:t>Resolve</a:t>
+            </a:r>
+          </a:p>
+        </p:txBody>
+      </p:sp>
+      <p:sp>
+        <p:nvSpPr>
+          <p:cNvPr id="21" name="Rounded Rectangle 20"/>
+          <p:cNvSpPr/>
+          <p:nvPr/>
+        </p:nvSpPr>
+        <p:spPr>
+          <a:xfrm>
+            <a:off x="6164427" y="4137660"/>
+            <a:ext cx="1734769" cy="1051560"/>
+          </a:xfrm>
+          <a:prstGeom prst="roundRect">
+            <a:avLst>
+              <a:gd name="adj" fmla="val 6000"/>
+            </a:avLst>
+          </a:prstGeom>
+          <a:solidFill>
+            <a:srgbClr val="EAF3FF"/>
+          </a:solidFill>
+          <a:ln>
+            <a:noFill/>
+          </a:ln>
+          <a:effectLst/>
+        </p:spPr>
+        <p:style>
+          <a:lnRef idx="1">
+            <a:schemeClr val="accent1"/>
+          </a:lnRef>
+          <a:fillRef idx="3">
+            <a:schemeClr val="accent1"/>
+          </a:fillRef>
+          <a:effectRef idx="2">
+            <a:schemeClr val="accent1"/>
+          </a:effectRef>
+          <a:fontRef idx="minor">
+            <a:schemeClr val="lt1"/>
+          </a:fontRef>
+        </p:style>
+        <p:txBody>
+          <a:bodyPr rtlCol="0" anchor="ctr"/>
+          <a:lstStyle/>
+          <a:p/>
+        </p:txBody>
+      </p:sp>
+      <p:sp>
+        <p:nvSpPr>
+          <p:cNvPr id="22" name="TextBox 21"/>
+          <p:cNvSpPr txBox="1"/>
+          <p:nvPr/>
+        </p:nvSpPr>
+        <p:spPr>
+          <a:xfrm>
+            <a:off x="6301587" y="4274820"/>
+            <a:ext cx="1460449" cy="777239"/>
+          </a:xfrm>
+          <a:prstGeom prst="rect">
+            <a:avLst/>
+          </a:prstGeom>
+          <a:noFill/>
+        </p:spPr>
+        <p:txBody>
+          <a:bodyPr wrap="square" anchor="t" lIns="0" rIns="0" tIns="0" bIns="0"/>
+          <a:lstStyle/>
+          <a:p>
             <a:pPr algn="l"/>
             <a:r>
-              <a:rPr sz="2200" b="0" i="0">
+              <a:rPr sz="1400" b="0" i="0">
                 <a:solidFill>
                   <a:srgbClr val="202122"/>
                 </a:solidFill>
                 <a:latin typeface="Calibri"/>
               </a:rPr>
-              <a:t>Name two CMS functions.</a:t>
+              <a:t>Back up, fix, test, repeat until solved.</a:t>
+            </a:r>
+          </a:p>
+        </p:txBody>
+      </p:sp>
+      <p:sp>
+        <p:nvSpPr>
+          <p:cNvPr id="23" name="Oval 22"/>
+          <p:cNvSpPr/>
+          <p:nvPr/>
+        </p:nvSpPr>
+        <p:spPr>
+          <a:xfrm>
+            <a:off x="8583701" y="2583180"/>
+            <a:ext cx="640080" cy="640080"/>
+          </a:xfrm>
+          <a:prstGeom prst="ellipse">
+            <a:avLst/>
+          </a:prstGeom>
+          <a:solidFill>
+            <a:srgbClr val="4EA1FF"/>
+          </a:solidFill>
+          <a:ln>
+            <a:noFill/>
+          </a:ln>
+          <a:effectLst/>
+        </p:spPr>
+        <p:style>
+          <a:lnRef idx="1">
+            <a:schemeClr val="accent1"/>
+          </a:lnRef>
+          <a:fillRef idx="3">
+            <a:schemeClr val="accent1"/>
+          </a:fillRef>
+          <a:effectRef idx="2">
+            <a:schemeClr val="accent1"/>
+          </a:effectRef>
+          <a:fontRef idx="minor">
+            <a:schemeClr val="lt1"/>
+          </a:fontRef>
+        </p:style>
+        <p:txBody>
+          <a:bodyPr rtlCol="0" anchor="ctr" lIns="0" rIns="0" tIns="0" bIns="0"/>
+          <a:lstStyle/>
+          <a:p>
+            <a:pPr algn="ctr"/>
+            <a:r>
+              <a:rPr sz="2000" b="1">
+                <a:solidFill>
+                  <a:srgbClr val="202122"/>
+                </a:solidFill>
+                <a:latin typeface="Calibri"/>
+              </a:rPr>
+              <a:t>5</a:t>
+            </a:r>
+          </a:p>
+        </p:txBody>
+      </p:sp>
+      <p:sp>
+        <p:nvSpPr>
+          <p:cNvPr id="24" name="TextBox 23"/>
+          <p:cNvSpPr txBox="1"/>
+          <p:nvPr/>
+        </p:nvSpPr>
+        <p:spPr>
+          <a:xfrm>
+            <a:off x="8036356" y="3360420"/>
+            <a:ext cx="1734769" cy="731520"/>
+          </a:xfrm>
+          <a:prstGeom prst="rect">
+            <a:avLst/>
+          </a:prstGeom>
+          <a:noFill/>
+        </p:spPr>
+        <p:txBody>
+          <a:bodyPr wrap="square" anchor="t" lIns="0" rIns="0" tIns="0" bIns="0"/>
+          <a:lstStyle/>
+          <a:p>
+            <a:pPr algn="ctr"/>
+            <a:r>
+              <a:rPr sz="1700" b="1" i="0">
+                <a:solidFill>
+                  <a:srgbClr val="03306E"/>
+                </a:solidFill>
+                <a:latin typeface="Calibri"/>
+              </a:rPr>
+              <a:t>Document</a:t>
+            </a:r>
+          </a:p>
+        </p:txBody>
+      </p:sp>
+      <p:sp>
+        <p:nvSpPr>
+          <p:cNvPr id="25" name="Rounded Rectangle 24"/>
+          <p:cNvSpPr/>
+          <p:nvPr/>
+        </p:nvSpPr>
+        <p:spPr>
+          <a:xfrm>
+            <a:off x="8036356" y="4137660"/>
+            <a:ext cx="1734769" cy="1051560"/>
+          </a:xfrm>
+          <a:prstGeom prst="roundRect">
+            <a:avLst>
+              <a:gd name="adj" fmla="val 6000"/>
+            </a:avLst>
+          </a:prstGeom>
+          <a:solidFill>
+            <a:srgbClr val="EAF3FF"/>
+          </a:solidFill>
+          <a:ln>
+            <a:noFill/>
+          </a:ln>
+          <a:effectLst/>
+        </p:spPr>
+        <p:style>
+          <a:lnRef idx="1">
+            <a:schemeClr val="accent1"/>
+          </a:lnRef>
+          <a:fillRef idx="3">
+            <a:schemeClr val="accent1"/>
+          </a:fillRef>
+          <a:effectRef idx="2">
+            <a:schemeClr val="accent1"/>
+          </a:effectRef>
+          <a:fontRef idx="minor">
+            <a:schemeClr val="lt1"/>
+          </a:fontRef>
+        </p:style>
+        <p:txBody>
+          <a:bodyPr rtlCol="0" anchor="ctr"/>
+          <a:lstStyle/>
+          <a:p/>
+        </p:txBody>
+      </p:sp>
+      <p:sp>
+        <p:nvSpPr>
+          <p:cNvPr id="26" name="TextBox 25"/>
+          <p:cNvSpPr txBox="1"/>
+          <p:nvPr/>
+        </p:nvSpPr>
+        <p:spPr>
+          <a:xfrm>
+            <a:off x="8173516" y="4274820"/>
+            <a:ext cx="1460449" cy="777239"/>
+          </a:xfrm>
+          <a:prstGeom prst="rect">
+            <a:avLst/>
+          </a:prstGeom>
+          <a:noFill/>
+        </p:spPr>
+        <p:txBody>
+          <a:bodyPr wrap="square" anchor="t" lIns="0" rIns="0" tIns="0" bIns="0"/>
+          <a:lstStyle/>
+          <a:p>
+            <a:pPr algn="l"/>
+            <a:r>
+              <a:rPr sz="1400" b="0" i="0">
+                <a:solidFill>
+                  <a:srgbClr val="202122"/>
+                </a:solidFill>
+                <a:latin typeface="Calibri"/>
+              </a:rPr>
+              <a:t>Record cause and solution in the CMS.</a:t>
+            </a:r>
+          </a:p>
+        </p:txBody>
+      </p:sp>
+      <p:sp>
+        <p:nvSpPr>
+          <p:cNvPr id="27" name="Oval 26"/>
+          <p:cNvSpPr/>
+          <p:nvPr/>
+        </p:nvSpPr>
+        <p:spPr>
+          <a:xfrm>
+            <a:off x="10455630" y="2583180"/>
+            <a:ext cx="640080" cy="640080"/>
+          </a:xfrm>
+          <a:prstGeom prst="ellipse">
+            <a:avLst/>
+          </a:prstGeom>
+          <a:solidFill>
+            <a:srgbClr val="4EA1FF"/>
+          </a:solidFill>
+          <a:ln>
+            <a:noFill/>
+          </a:ln>
+          <a:effectLst/>
+        </p:spPr>
+        <p:style>
+          <a:lnRef idx="1">
+            <a:schemeClr val="accent1"/>
+          </a:lnRef>
+          <a:fillRef idx="3">
+            <a:schemeClr val="accent1"/>
+          </a:fillRef>
+          <a:effectRef idx="2">
+            <a:schemeClr val="accent1"/>
+          </a:effectRef>
+          <a:fontRef idx="minor">
+            <a:schemeClr val="lt1"/>
+          </a:fontRef>
+        </p:style>
+        <p:txBody>
+          <a:bodyPr rtlCol="0" anchor="ctr" lIns="0" rIns="0" tIns="0" bIns="0"/>
+          <a:lstStyle/>
+          <a:p>
+            <a:pPr algn="ctr"/>
+            <a:r>
+              <a:rPr sz="2000" b="1">
+                <a:solidFill>
+                  <a:srgbClr val="202122"/>
+                </a:solidFill>
+                <a:latin typeface="Calibri"/>
+              </a:rPr>
+              <a:t>6</a:t>
+            </a:r>
+          </a:p>
+        </p:txBody>
+      </p:sp>
+      <p:sp>
+        <p:nvSpPr>
+          <p:cNvPr id="28" name="TextBox 27"/>
+          <p:cNvSpPr txBox="1"/>
+          <p:nvPr/>
+        </p:nvSpPr>
+        <p:spPr>
+          <a:xfrm>
+            <a:off x="9908286" y="3360420"/>
+            <a:ext cx="1734769" cy="731520"/>
+          </a:xfrm>
+          <a:prstGeom prst="rect">
+            <a:avLst/>
+          </a:prstGeom>
+          <a:noFill/>
+        </p:spPr>
+        <p:txBody>
+          <a:bodyPr wrap="square" anchor="t" lIns="0" rIns="0" tIns="0" bIns="0"/>
+          <a:lstStyle/>
+          <a:p>
+            <a:pPr algn="ctr"/>
+            <a:r>
+              <a:rPr sz="1700" b="1" i="0">
+                <a:solidFill>
+                  <a:srgbClr val="03306E"/>
+                </a:solidFill>
+                <a:latin typeface="Calibri"/>
+              </a:rPr>
+              <a:t>Prevent</a:t>
+            </a:r>
+          </a:p>
+        </p:txBody>
+      </p:sp>
+      <p:sp>
+        <p:nvSpPr>
+          <p:cNvPr id="29" name="Rounded Rectangle 28"/>
+          <p:cNvSpPr/>
+          <p:nvPr/>
+        </p:nvSpPr>
+        <p:spPr>
+          <a:xfrm>
+            <a:off x="9908286" y="4137660"/>
+            <a:ext cx="1734769" cy="1051560"/>
+          </a:xfrm>
+          <a:prstGeom prst="roundRect">
+            <a:avLst>
+              <a:gd name="adj" fmla="val 6000"/>
+            </a:avLst>
+          </a:prstGeom>
+          <a:solidFill>
+            <a:srgbClr val="EAF3FF"/>
+          </a:solidFill>
+          <a:ln>
+            <a:noFill/>
+          </a:ln>
+          <a:effectLst/>
+        </p:spPr>
+        <p:style>
+          <a:lnRef idx="1">
+            <a:schemeClr val="accent1"/>
+          </a:lnRef>
+          <a:fillRef idx="3">
+            <a:schemeClr val="accent1"/>
+          </a:fillRef>
+          <a:effectRef idx="2">
+            <a:schemeClr val="accent1"/>
+          </a:effectRef>
+          <a:fontRef idx="minor">
+            <a:schemeClr val="lt1"/>
+          </a:fontRef>
+        </p:style>
+        <p:txBody>
+          <a:bodyPr rtlCol="0" anchor="ctr"/>
+          <a:lstStyle/>
+          <a:p/>
+        </p:txBody>
+      </p:sp>
+      <p:sp>
+        <p:nvSpPr>
+          <p:cNvPr id="30" name="TextBox 29"/>
+          <p:cNvSpPr txBox="1"/>
+          <p:nvPr/>
+        </p:nvSpPr>
+        <p:spPr>
+          <a:xfrm>
+            <a:off x="10045446" y="4274820"/>
+            <a:ext cx="1460449" cy="777239"/>
+          </a:xfrm>
+          <a:prstGeom prst="rect">
+            <a:avLst/>
+          </a:prstGeom>
+          <a:noFill/>
+        </p:spPr>
+        <p:txBody>
+          <a:bodyPr wrap="square" anchor="t" lIns="0" rIns="0" tIns="0" bIns="0"/>
+          <a:lstStyle/>
+          <a:p>
+            <a:pPr algn="l"/>
+            <a:r>
+              <a:rPr sz="1400" b="0" i="0">
+                <a:solidFill>
+                  <a:srgbClr val="202122"/>
+                </a:solidFill>
+                <a:latin typeface="Calibri"/>
+              </a:rPr>
+              <a:t>Apply controls so it does not recur.</a:t>
             </a:r>
           </a:p>
         </p:txBody>
@@ -9371,7 +12628,7 @@
                 </a:solidFill>
                 <a:latin typeface="Cambria"/>
               </a:rPr>
-              <a:t>Answers</a:t>
+              <a:t>Quick check: The troubleshooting method</a:t>
             </a:r>
           </a:p>
         </p:txBody>
@@ -9450,8 +12707,8 @@
         </p:nvSpPr>
         <p:spPr>
           <a:xfrm>
-            <a:off x="548640" y="1618488"/>
-            <a:ext cx="411480" cy="411480"/>
+            <a:off x="548640" y="1691640"/>
+            <a:ext cx="502920" cy="502920"/>
           </a:xfrm>
           <a:prstGeom prst="ellipse">
             <a:avLst/>
@@ -9484,7 +12741,7 @@
           <a:p>
             <a:pPr algn="ctr"/>
             <a:r>
-              <a:rPr sz="1400" b="1">
+              <a:rPr sz="1600" b="1">
                 <a:solidFill>
                   <a:srgbClr val="202122"/>
                 </a:solidFill>
@@ -9503,8 +12760,8 @@
         </p:nvSpPr>
         <p:spPr>
           <a:xfrm>
-            <a:off x="1234440" y="1600200"/>
-            <a:ext cx="10408615" cy="1030986"/>
+            <a:off x="1371600" y="1645920"/>
+            <a:ext cx="10271455" cy="1188720"/>
           </a:xfrm>
           <a:prstGeom prst="rect">
             <a:avLst/>
@@ -9517,24 +12774,13 @@
           <a:p>
             <a:pPr algn="l"/>
             <a:r>
-              <a:rPr sz="1800" b="0" i="0">
-                <a:solidFill>
-                  <a:srgbClr val="54595D"/>
-                </a:solidFill>
-                <a:latin typeface="Calibri"/>
-              </a:rPr>
-              <a:t>What is the first step of the troubleshooting method?</a:t>
-            </a:r>
-          </a:p>
-          <a:p>
-            <a:r>
-              <a:rPr sz="1800" b="1">
-                <a:solidFill>
-                  <a:srgbClr val="03306E"/>
-                </a:solidFill>
-                <a:latin typeface="Calibri"/>
-              </a:rPr>
-              <a:t>Gather information.</a:t>
+              <a:rPr sz="2400" b="0" i="0">
+                <a:solidFill>
+                  <a:srgbClr val="202122"/>
+                </a:solidFill>
+                <a:latin typeface="Calibri"/>
+              </a:rPr>
+              <a:t>What is the first step?</a:t>
             </a:r>
           </a:p>
         </p:txBody>
@@ -9547,8 +12793,8 @@
         </p:nvSpPr>
         <p:spPr>
           <a:xfrm>
-            <a:off x="548640" y="2814066"/>
-            <a:ext cx="411480" cy="411480"/>
+            <a:off x="548640" y="3108960"/>
+            <a:ext cx="502920" cy="502920"/>
           </a:xfrm>
           <a:prstGeom prst="ellipse">
             <a:avLst/>
@@ -9581,7 +12827,7 @@
           <a:p>
             <a:pPr algn="ctr"/>
             <a:r>
-              <a:rPr sz="1400" b="1">
+              <a:rPr sz="1600" b="1">
                 <a:solidFill>
                   <a:srgbClr val="202122"/>
                 </a:solidFill>
@@ -9600,8 +12846,8 @@
         </p:nvSpPr>
         <p:spPr>
           <a:xfrm>
-            <a:off x="1234440" y="2795778"/>
-            <a:ext cx="10408615" cy="1030986"/>
+            <a:off x="1371600" y="3063240"/>
+            <a:ext cx="10271455" cy="1188720"/>
           </a:xfrm>
           <a:prstGeom prst="rect">
             <a:avLst/>
@@ -9614,24 +12860,13 @@
           <a:p>
             <a:pPr algn="l"/>
             <a:r>
-              <a:rPr sz="1800" b="0" i="0">
-                <a:solidFill>
-                  <a:srgbClr val="54595D"/>
-                </a:solidFill>
-                <a:latin typeface="Calibri"/>
-              </a:rPr>
-              <a:t>Why back up before implementing a fix?</a:t>
-            </a:r>
-          </a:p>
-          <a:p>
-            <a:r>
-              <a:rPr sz="1800" b="1">
-                <a:solidFill>
-                  <a:srgbClr val="03306E"/>
-                </a:solidFill>
-                <a:latin typeface="Calibri"/>
-              </a:rPr>
-              <a:t>So data can be restored if the fix causes problems.</a:t>
+              <a:rPr sz="2400" b="0" i="0">
+                <a:solidFill>
+                  <a:srgbClr val="202122"/>
+                </a:solidFill>
+                <a:latin typeface="Calibri"/>
+              </a:rPr>
+              <a:t>Why test one possibility at a time?</a:t>
             </a:r>
           </a:p>
         </p:txBody>
@@ -9644,8 +12879,8 @@
         </p:nvSpPr>
         <p:spPr>
           <a:xfrm>
-            <a:off x="548640" y="4009644"/>
-            <a:ext cx="411480" cy="411480"/>
+            <a:off x="548640" y="4526280"/>
+            <a:ext cx="502920" cy="502920"/>
           </a:xfrm>
           <a:prstGeom prst="ellipse">
             <a:avLst/>
@@ -9678,7 +12913,7 @@
           <a:p>
             <a:pPr algn="ctr"/>
             <a:r>
-              <a:rPr sz="1400" b="1">
+              <a:rPr sz="1600" b="1">
                 <a:solidFill>
                   <a:srgbClr val="202122"/>
                 </a:solidFill>
@@ -9697,8 +12932,8 @@
         </p:nvSpPr>
         <p:spPr>
           <a:xfrm>
-            <a:off x="1234440" y="3991356"/>
-            <a:ext cx="10408615" cy="1030986"/>
+            <a:off x="1371600" y="4480560"/>
+            <a:ext cx="10271455" cy="1188720"/>
           </a:xfrm>
           <a:prstGeom prst="rect">
             <a:avLst/>
@@ -9711,121 +12946,46 @@
           <a:p>
             <a:pPr algn="l"/>
             <a:r>
-              <a:rPr sz="1800" b="0" i="0">
+              <a:rPr sz="2400" b="0" i="0">
+                <a:solidFill>
+                  <a:srgbClr val="202122"/>
+                </a:solidFill>
+                <a:latin typeface="Calibri"/>
+              </a:rPr>
+              <a:t>Why document the fix?</a:t>
+            </a:r>
+          </a:p>
+        </p:txBody>
+      </p:sp>
+      <p:sp>
+        <p:nvSpPr>
+          <p:cNvPr id="12" name="TextBox 11"/>
+          <p:cNvSpPr txBox="1"/>
+          <p:nvPr/>
+        </p:nvSpPr>
+        <p:spPr>
+          <a:xfrm>
+            <a:off x="548640" y="5852160"/>
+            <a:ext cx="11094415" cy="365760"/>
+          </a:xfrm>
+          <a:prstGeom prst="rect">
+            <a:avLst/>
+          </a:prstGeom>
+          <a:noFill/>
+        </p:spPr>
+        <p:txBody>
+          <a:bodyPr wrap="square" anchor="t" lIns="0" rIns="0" tIns="0" bIns="0"/>
+          <a:lstStyle/>
+          <a:p>
+            <a:pPr algn="l"/>
+            <a:r>
+              <a:rPr sz="1300" b="0" i="1">
                 <a:solidFill>
                   <a:srgbClr val="54595D"/>
                 </a:solidFill>
                 <a:latin typeface="Calibri"/>
               </a:rPr>
-              <a:t>What is escalation?</a:t>
-            </a:r>
-          </a:p>
-          <a:p>
-            <a:r>
-              <a:rPr sz="1800" b="1">
-                <a:solidFill>
-                  <a:srgbClr val="03306E"/>
-                </a:solidFill>
-                <a:latin typeface="Calibri"/>
-              </a:rPr>
-              <a:t>Passing an issue to a higher support line or specialist.</a:t>
-            </a:r>
-          </a:p>
-        </p:txBody>
-      </p:sp>
-      <p:sp>
-        <p:nvSpPr>
-          <p:cNvPr id="12" name="Oval 11"/>
-          <p:cNvSpPr/>
-          <p:nvPr/>
-        </p:nvSpPr>
-        <p:spPr>
-          <a:xfrm>
-            <a:off x="548640" y="5205221"/>
-            <a:ext cx="411480" cy="411480"/>
-          </a:xfrm>
-          <a:prstGeom prst="ellipse">
-            <a:avLst/>
-          </a:prstGeom>
-          <a:solidFill>
-            <a:srgbClr val="4EA1FF"/>
-          </a:solidFill>
-          <a:ln>
-            <a:noFill/>
-          </a:ln>
-          <a:effectLst/>
-        </p:spPr>
-        <p:style>
-          <a:lnRef idx="1">
-            <a:schemeClr val="accent1"/>
-          </a:lnRef>
-          <a:fillRef idx="3">
-            <a:schemeClr val="accent1"/>
-          </a:fillRef>
-          <a:effectRef idx="2">
-            <a:schemeClr val="accent1"/>
-          </a:effectRef>
-          <a:fontRef idx="minor">
-            <a:schemeClr val="lt1"/>
-          </a:fontRef>
-        </p:style>
-        <p:txBody>
-          <a:bodyPr rtlCol="0" anchor="ctr" lIns="0" rIns="0" tIns="0" bIns="0"/>
-          <a:lstStyle/>
-          <a:p>
-            <a:pPr algn="ctr"/>
-            <a:r>
-              <a:rPr sz="1400" b="1">
-                <a:solidFill>
-                  <a:srgbClr val="202122"/>
-                </a:solidFill>
-                <a:latin typeface="Calibri"/>
-              </a:rPr>
-              <a:t>4</a:t>
-            </a:r>
-          </a:p>
-        </p:txBody>
-      </p:sp>
-      <p:sp>
-        <p:nvSpPr>
-          <p:cNvPr id="13" name="TextBox 12"/>
-          <p:cNvSpPr txBox="1"/>
-          <p:nvPr/>
-        </p:nvSpPr>
-        <p:spPr>
-          <a:xfrm>
-            <a:off x="1234440" y="5186933"/>
-            <a:ext cx="10408615" cy="1030986"/>
-          </a:xfrm>
-          <a:prstGeom prst="rect">
-            <a:avLst/>
-          </a:prstGeom>
-          <a:noFill/>
-        </p:spPr>
-        <p:txBody>
-          <a:bodyPr wrap="square" anchor="t" lIns="0" rIns="0" tIns="0" bIns="0"/>
-          <a:lstStyle/>
-          <a:p>
-            <a:pPr algn="l"/>
-            <a:r>
-              <a:rPr sz="1800" b="0" i="0">
-                <a:solidFill>
-                  <a:srgbClr val="54595D"/>
-                </a:solidFill>
-                <a:latin typeface="Calibri"/>
-              </a:rPr>
-              <a:t>Name two CMS functions.</a:t>
-            </a:r>
-          </a:p>
-          <a:p>
-            <a:r>
-              <a:rPr sz="1800" b="1">
-                <a:solidFill>
-                  <a:srgbClr val="03306E"/>
-                </a:solidFill>
-                <a:latin typeface="Calibri"/>
-              </a:rPr>
-              <a:t>Any two of: incident and request, knowledge, change, configuration and asset management.</a:t>
+              <a:t>Answer on mini whiteboards or in your book. Answers are in the speaker notes.</a:t>
             </a:r>
           </a:p>
         </p:txBody>
@@ -9917,7 +13077,7 @@
                 </a:solidFill>
                 <a:latin typeface="Cambria"/>
               </a:rPr>
-              <a:t>Activity: Helpdesk simulation</a:t>
+              <a:t>Support processes</a:t>
             </a:r>
           </a:p>
         </p:txBody>
@@ -9990,19 +13150,166 @@
       </p:sp>
       <p:sp>
         <p:nvSpPr>
-          <p:cNvPr id="6" name="Rounded Rectangle 5"/>
+          <p:cNvPr id="6" name="TextBox 5"/>
+          <p:cNvSpPr txBox="1"/>
+          <p:nvPr/>
+        </p:nvSpPr>
+        <p:spPr>
+          <a:xfrm>
+            <a:off x="548640" y="1554480"/>
+            <a:ext cx="6720840" cy="4617720"/>
+          </a:xfrm>
+          <a:prstGeom prst="rect">
+            <a:avLst/>
+          </a:prstGeom>
+          <a:noFill/>
+        </p:spPr>
+        <p:txBody>
+          <a:bodyPr wrap="square" lIns="0" rIns="0" tIns="0" bIns="0">
+            <a:spAutoFit/>
+          </a:bodyPr>
+          <a:lstStyle/>
+          <a:p>
+            <a:pPr>
+              <a:spcAft>
+                <a:spcPts val="1260"/>
+              </a:spcAft>
+            </a:pPr>
+            <a:r>
+              <a:rPr sz="2100" b="0">
+                <a:solidFill>
+                  <a:srgbClr val="202122"/>
+                </a:solidFill>
+                <a:latin typeface="Calibri"/>
+              </a:rPr>
+              <a:t>Day-to-day support covers a lot of routine work.</a:t>
+            </a:r>
+          </a:p>
+          <a:p>
+            <a:pPr>
+              <a:spcAft>
+                <a:spcPts val="1260"/>
+              </a:spcAft>
+            </a:pPr>
+            <a:r>
+              <a:rPr sz="2100" b="1">
+                <a:solidFill>
+                  <a:srgbClr val="202122"/>
+                </a:solidFill>
+                <a:latin typeface="Calibri"/>
+              </a:rPr>
+              <a:t>User management:</a:t>
+            </a:r>
+            <a:r>
+              <a:rPr sz="2100" b="0">
+                <a:solidFill>
+                  <a:srgbClr val="202122"/>
+                </a:solidFill>
+                <a:latin typeface="Calibri"/>
+              </a:rPr>
+              <a:t> adding and removing accounts and setting access hours. Password management: complexity, expiry and forced resets. Permissions: access to resources, Group Policy and shared folders. Software installation and connecting users to remote resources.</a:t>
+            </a:r>
+          </a:p>
+          <a:p>
+            <a:pPr>
+              <a:spcAft>
+                <a:spcPts val="1260"/>
+              </a:spcAft>
+            </a:pPr>
+            <a:r>
+              <a:rPr sz="2100" b="1">
+                <a:solidFill>
+                  <a:srgbClr val="202122"/>
+                </a:solidFill>
+                <a:latin typeface="Calibri"/>
+              </a:rPr>
+              <a:t>Fault identification and escalation:</a:t>
+            </a:r>
+            <a:r>
+              <a:rPr sz="2100" b="0">
+                <a:solidFill>
+                  <a:srgbClr val="202122"/>
+                </a:solidFill>
+                <a:latin typeface="Calibri"/>
+              </a:rPr>
+              <a:t> first line handles common issues, second line deeper technical problems, third line specialists and suppliers.</a:t>
+            </a:r>
+          </a:p>
+          <a:p>
+            <a:pPr>
+              <a:spcAft>
+                <a:spcPts val="1260"/>
+              </a:spcAft>
+            </a:pPr>
+            <a:r>
+              <a:rPr sz="2100" b="0">
+                <a:solidFill>
+                  <a:srgbClr val="202122"/>
+                </a:solidFill>
+                <a:latin typeface="Calibri"/>
+              </a:rPr>
+              <a:t>Plus documentation, known fixes, standard operating procedures, and asset management and auditing.</a:t>
+            </a:r>
+          </a:p>
+        </p:txBody>
+      </p:sp>
+      <p:sp>
+        <p:nvSpPr>
+          <p:cNvPr id="7" name="Rounded Rectangle 6"/>
           <p:cNvSpPr/>
           <p:nvPr/>
         </p:nvSpPr>
         <p:spPr>
           <a:xfrm>
-            <a:off x="548640" y="1508760"/>
-            <a:ext cx="2011680" cy="457200"/>
+            <a:off x="7772400" y="1554480"/>
+            <a:ext cx="3867912" cy="4526280"/>
           </a:xfrm>
           <a:prstGeom prst="roundRect">
             <a:avLst>
-              <a:gd name="adj" fmla="val 50000"/>
+              <a:gd name="adj" fmla="val 8000"/>
             </a:avLst>
+          </a:prstGeom>
+          <a:solidFill>
+            <a:srgbClr val="03306E"/>
+          </a:solidFill>
+          <a:ln>
+            <a:noFill/>
+          </a:ln>
+          <a:effectLst/>
+        </p:spPr>
+        <p:style>
+          <a:lnRef idx="1">
+            <a:schemeClr val="accent1"/>
+          </a:lnRef>
+          <a:fillRef idx="3">
+            <a:schemeClr val="accent1"/>
+          </a:fillRef>
+          <a:effectRef idx="2">
+            <a:schemeClr val="accent1"/>
+          </a:effectRef>
+          <a:fontRef idx="minor">
+            <a:schemeClr val="lt1"/>
+          </a:fontRef>
+        </p:style>
+        <p:txBody>
+          <a:bodyPr rtlCol="0" anchor="ctr"/>
+          <a:lstStyle/>
+          <a:p/>
+        </p:txBody>
+      </p:sp>
+      <p:sp>
+        <p:nvSpPr>
+          <p:cNvPr id="8" name="Oval 7"/>
+          <p:cNvSpPr/>
+          <p:nvPr/>
+        </p:nvSpPr>
+        <p:spPr>
+          <a:xfrm>
+            <a:off x="8046720" y="1828800"/>
+            <a:ext cx="548640" cy="548640"/>
+          </a:xfrm>
+          <a:prstGeom prst="ellipse">
+            <a:avLst/>
           </a:prstGeom>
           <a:solidFill>
             <a:srgbClr val="4EA1FF"/>
@@ -10027,580 +13334,84 @@
           </a:fontRef>
         </p:style>
         <p:txBody>
-          <a:bodyPr rtlCol="0" anchor="ctr"/>
-          <a:lstStyle/>
-          <a:p/>
-        </p:txBody>
-      </p:sp>
-      <p:sp>
-        <p:nvSpPr>
-          <p:cNvPr id="7" name="TextBox 6"/>
-          <p:cNvSpPr txBox="1"/>
-          <p:nvPr/>
-        </p:nvSpPr>
-        <p:spPr>
-          <a:xfrm>
-            <a:off x="548640" y="1508760"/>
-            <a:ext cx="2011680" cy="457200"/>
-          </a:xfrm>
-          <a:prstGeom prst="rect">
-            <a:avLst/>
-          </a:prstGeom>
-          <a:noFill/>
-        </p:spPr>
-        <p:txBody>
-          <a:bodyPr wrap="square" anchor="ctr" lIns="0" rIns="0" tIns="0" bIns="0"/>
+          <a:bodyPr rtlCol="0" anchor="ctr" lIns="0" rIns="0" tIns="0" bIns="0"/>
           <a:lstStyle/>
           <a:p>
             <a:pPr algn="ctr"/>
             <a:r>
-              <a:rPr sz="1400" b="1" i="0">
+              <a:rPr sz="1300" b="1">
                 <a:solidFill>
                   <a:srgbClr val="202122"/>
                 </a:solidFill>
                 <a:latin typeface="Calibri"/>
               </a:rPr>
-              <a:t>35 minutes</a:t>
-            </a:r>
-          </a:p>
-        </p:txBody>
-      </p:sp>
-      <p:sp>
-        <p:nvSpPr>
-          <p:cNvPr id="8" name="TextBox 7"/>
-          <p:cNvSpPr txBox="1"/>
-          <p:nvPr/>
-        </p:nvSpPr>
-        <p:spPr>
-          <a:xfrm>
-            <a:off x="2743200" y="1508760"/>
-            <a:ext cx="4754880" cy="457200"/>
-          </a:xfrm>
-          <a:prstGeom prst="rect">
-            <a:avLst/>
-          </a:prstGeom>
-          <a:noFill/>
-        </p:spPr>
-        <p:txBody>
-          <a:bodyPr wrap="square" anchor="ctr" lIns="0" rIns="0" tIns="0" bIns="0"/>
+              <a:t>e.g.</a:t>
+            </a:r>
+          </a:p>
+        </p:txBody>
+      </p:sp>
+      <p:sp>
+        <p:nvSpPr>
+          <p:cNvPr id="9" name="TextBox 8"/>
+          <p:cNvSpPr txBox="1"/>
+          <p:nvPr/>
+        </p:nvSpPr>
+        <p:spPr>
+          <a:xfrm>
+            <a:off x="8046720" y="2560320"/>
+            <a:ext cx="3291840" cy="365760"/>
+          </a:xfrm>
+          <a:prstGeom prst="rect">
+            <a:avLst/>
+          </a:prstGeom>
+          <a:noFill/>
+        </p:spPr>
+        <p:txBody>
+          <a:bodyPr wrap="square" anchor="t" lIns="0" rIns="0" tIns="0" bIns="0"/>
           <a:lstStyle/>
           <a:p>
             <a:pPr algn="l"/>
             <a:r>
-              <a:rPr sz="1400" b="0" i="1">
-                <a:solidFill>
-                  <a:srgbClr val="54595D"/>
-                </a:solidFill>
-                <a:latin typeface="Calibri"/>
-              </a:rPr>
-              <a:t>Pairs: user and technician, then swap</a:t>
-            </a:r>
-          </a:p>
-        </p:txBody>
-      </p:sp>
-      <p:sp>
-        <p:nvSpPr>
-          <p:cNvPr id="9" name="Oval 8"/>
-          <p:cNvSpPr/>
-          <p:nvPr/>
-        </p:nvSpPr>
-        <p:spPr>
-          <a:xfrm>
-            <a:off x="548640" y="2482596"/>
-            <a:ext cx="384048" cy="384048"/>
-          </a:xfrm>
-          <a:prstGeom prst="ellipse">
-            <a:avLst/>
-          </a:prstGeom>
-          <a:solidFill>
-            <a:srgbClr val="0645AD"/>
-          </a:solidFill>
-          <a:ln>
-            <a:noFill/>
-          </a:ln>
-          <a:effectLst/>
-        </p:spPr>
-        <p:style>
-          <a:lnRef idx="1">
-            <a:schemeClr val="accent1"/>
-          </a:lnRef>
-          <a:fillRef idx="3">
-            <a:schemeClr val="accent1"/>
-          </a:fillRef>
-          <a:effectRef idx="2">
-            <a:schemeClr val="accent1"/>
-          </a:effectRef>
-          <a:fontRef idx="minor">
-            <a:schemeClr val="lt1"/>
-          </a:fontRef>
-        </p:style>
-        <p:txBody>
-          <a:bodyPr rtlCol="0" anchor="ctr" lIns="0" rIns="0" tIns="0" bIns="0"/>
-          <a:lstStyle/>
-          <a:p>
-            <a:pPr algn="ctr"/>
-            <a:r>
-              <a:rPr sz="1300" b="1">
+              <a:rPr sz="1300" b="1" i="0">
+                <a:solidFill>
+                  <a:srgbClr val="A9C8F0"/>
+                </a:solidFill>
+                <a:latin typeface="Calibri"/>
+              </a:rPr>
+              <a:t>EXAMPLE</a:t>
+            </a:r>
+          </a:p>
+        </p:txBody>
+      </p:sp>
+      <p:sp>
+        <p:nvSpPr>
+          <p:cNvPr id="10" name="TextBox 9"/>
+          <p:cNvSpPr txBox="1"/>
+          <p:nvPr/>
+        </p:nvSpPr>
+        <p:spPr>
+          <a:xfrm>
+            <a:off x="8046720" y="2971800"/>
+            <a:ext cx="3291840" cy="2971800"/>
+          </a:xfrm>
+          <a:prstGeom prst="rect">
+            <a:avLst/>
+          </a:prstGeom>
+          <a:noFill/>
+        </p:spPr>
+        <p:txBody>
+          <a:bodyPr wrap="square" anchor="t" lIns="0" rIns="0" tIns="0" bIns="0"/>
+          <a:lstStyle/>
+          <a:p>
+            <a:pPr algn="l"/>
+            <a:r>
+              <a:rPr sz="1900" b="0" i="0">
                 <a:solidFill>
                   <a:srgbClr val="FFFFFF"/>
                 </a:solidFill>
-                <a:latin typeface="Calibri"/>
-              </a:rPr>
-              <a:t>1</a:t>
-            </a:r>
-          </a:p>
-        </p:txBody>
-      </p:sp>
-      <p:sp>
-        <p:nvSpPr>
-          <p:cNvPr id="10" name="TextBox 9"/>
-          <p:cNvSpPr txBox="1"/>
-          <p:nvPr/>
-        </p:nvSpPr>
-        <p:spPr>
-          <a:xfrm>
-            <a:off x="1143000" y="2240280"/>
-            <a:ext cx="5943600" cy="868680"/>
-          </a:xfrm>
-          <a:prstGeom prst="rect">
-            <a:avLst/>
-          </a:prstGeom>
-          <a:noFill/>
-        </p:spPr>
-        <p:txBody>
-          <a:bodyPr wrap="square" anchor="ctr" lIns="0" rIns="0" tIns="0" bIns="0"/>
-          <a:lstStyle/>
-          <a:p>
-            <a:pPr algn="l"/>
-            <a:r>
-              <a:rPr sz="1700" b="0" i="0">
-                <a:solidFill>
-                  <a:srgbClr val="202122"/>
-                </a:solidFill>
-                <a:latin typeface="Calibri"/>
-              </a:rPr>
-              <a:t>The user takes a fault card and describes only the symptoms.</a:t>
-            </a:r>
-          </a:p>
-        </p:txBody>
-      </p:sp>
-      <p:sp>
-        <p:nvSpPr>
-          <p:cNvPr id="11" name="Oval 10"/>
-          <p:cNvSpPr/>
-          <p:nvPr/>
-        </p:nvSpPr>
-        <p:spPr>
-          <a:xfrm>
-            <a:off x="548640" y="3461004"/>
-            <a:ext cx="384048" cy="384048"/>
-          </a:xfrm>
-          <a:prstGeom prst="ellipse">
-            <a:avLst/>
-          </a:prstGeom>
-          <a:solidFill>
-            <a:srgbClr val="0645AD"/>
-          </a:solidFill>
-          <a:ln>
-            <a:noFill/>
-          </a:ln>
-          <a:effectLst/>
-        </p:spPr>
-        <p:style>
-          <a:lnRef idx="1">
-            <a:schemeClr val="accent1"/>
-          </a:lnRef>
-          <a:fillRef idx="3">
-            <a:schemeClr val="accent1"/>
-          </a:fillRef>
-          <a:effectRef idx="2">
-            <a:schemeClr val="accent1"/>
-          </a:effectRef>
-          <a:fontRef idx="minor">
-            <a:schemeClr val="lt1"/>
-          </a:fontRef>
-        </p:style>
-        <p:txBody>
-          <a:bodyPr rtlCol="0" anchor="ctr" lIns="0" rIns="0" tIns="0" bIns="0"/>
-          <a:lstStyle/>
-          <a:p>
-            <a:pPr algn="ctr"/>
-            <a:r>
-              <a:rPr sz="1300" b="1">
-                <a:solidFill>
-                  <a:srgbClr val="FFFFFF"/>
-                </a:solidFill>
-                <a:latin typeface="Calibri"/>
-              </a:rPr>
-              <a:t>2</a:t>
-            </a:r>
-          </a:p>
-        </p:txBody>
-      </p:sp>
-      <p:sp>
-        <p:nvSpPr>
-          <p:cNvPr id="12" name="TextBox 11"/>
-          <p:cNvSpPr txBox="1"/>
-          <p:nvPr/>
-        </p:nvSpPr>
-        <p:spPr>
-          <a:xfrm>
-            <a:off x="1143000" y="3218688"/>
-            <a:ext cx="5943600" cy="868680"/>
-          </a:xfrm>
-          <a:prstGeom prst="rect">
-            <a:avLst/>
-          </a:prstGeom>
-          <a:noFill/>
-        </p:spPr>
-        <p:txBody>
-          <a:bodyPr wrap="square" anchor="ctr" lIns="0" rIns="0" tIns="0" bIns="0"/>
-          <a:lstStyle/>
-          <a:p>
-            <a:pPr algn="l"/>
-            <a:r>
-              <a:rPr sz="1700" b="0" i="0">
-                <a:solidFill>
-                  <a:srgbClr val="202122"/>
-                </a:solidFill>
-                <a:latin typeface="Calibri"/>
-              </a:rPr>
-              <a:t>The technician follows the troubleshooting method, asking questions.</a:t>
-            </a:r>
-          </a:p>
-        </p:txBody>
-      </p:sp>
-      <p:sp>
-        <p:nvSpPr>
-          <p:cNvPr id="13" name="Oval 12"/>
-          <p:cNvSpPr/>
-          <p:nvPr/>
-        </p:nvSpPr>
-        <p:spPr>
-          <a:xfrm>
-            <a:off x="548640" y="4439412"/>
-            <a:ext cx="384048" cy="384048"/>
-          </a:xfrm>
-          <a:prstGeom prst="ellipse">
-            <a:avLst/>
-          </a:prstGeom>
-          <a:solidFill>
-            <a:srgbClr val="0645AD"/>
-          </a:solidFill>
-          <a:ln>
-            <a:noFill/>
-          </a:ln>
-          <a:effectLst/>
-        </p:spPr>
-        <p:style>
-          <a:lnRef idx="1">
-            <a:schemeClr val="accent1"/>
-          </a:lnRef>
-          <a:fillRef idx="3">
-            <a:schemeClr val="accent1"/>
-          </a:fillRef>
-          <a:effectRef idx="2">
-            <a:schemeClr val="accent1"/>
-          </a:effectRef>
-          <a:fontRef idx="minor">
-            <a:schemeClr val="lt1"/>
-          </a:fontRef>
-        </p:style>
-        <p:txBody>
-          <a:bodyPr rtlCol="0" anchor="ctr" lIns="0" rIns="0" tIns="0" bIns="0"/>
-          <a:lstStyle/>
-          <a:p>
-            <a:pPr algn="ctr"/>
-            <a:r>
-              <a:rPr sz="1300" b="1">
-                <a:solidFill>
-                  <a:srgbClr val="FFFFFF"/>
-                </a:solidFill>
-                <a:latin typeface="Calibri"/>
-              </a:rPr>
-              <a:t>3</a:t>
-            </a:r>
-          </a:p>
-        </p:txBody>
-      </p:sp>
-      <p:sp>
-        <p:nvSpPr>
-          <p:cNvPr id="14" name="TextBox 13"/>
-          <p:cNvSpPr txBox="1"/>
-          <p:nvPr/>
-        </p:nvSpPr>
-        <p:spPr>
-          <a:xfrm>
-            <a:off x="1143000" y="4197096"/>
-            <a:ext cx="5943600" cy="868680"/>
-          </a:xfrm>
-          <a:prstGeom prst="rect">
-            <a:avLst/>
-          </a:prstGeom>
-          <a:noFill/>
-        </p:spPr>
-        <p:txBody>
-          <a:bodyPr wrap="square" anchor="ctr" lIns="0" rIns="0" tIns="0" bIns="0"/>
-          <a:lstStyle/>
-          <a:p>
-            <a:pPr algn="l"/>
-            <a:r>
-              <a:rPr sz="1700" b="0" i="0">
-                <a:solidFill>
-                  <a:srgbClr val="202122"/>
-                </a:solidFill>
-                <a:latin typeface="Calibri"/>
-              </a:rPr>
-              <a:t>The technician logs a full ticket: user, issue, steps, resolution, time taken.</a:t>
-            </a:r>
-          </a:p>
-        </p:txBody>
-      </p:sp>
-      <p:sp>
-        <p:nvSpPr>
-          <p:cNvPr id="15" name="Oval 14"/>
-          <p:cNvSpPr/>
-          <p:nvPr/>
-        </p:nvSpPr>
-        <p:spPr>
-          <a:xfrm>
-            <a:off x="548640" y="5417820"/>
-            <a:ext cx="384048" cy="384048"/>
-          </a:xfrm>
-          <a:prstGeom prst="ellipse">
-            <a:avLst/>
-          </a:prstGeom>
-          <a:solidFill>
-            <a:srgbClr val="0645AD"/>
-          </a:solidFill>
-          <a:ln>
-            <a:noFill/>
-          </a:ln>
-          <a:effectLst/>
-        </p:spPr>
-        <p:style>
-          <a:lnRef idx="1">
-            <a:schemeClr val="accent1"/>
-          </a:lnRef>
-          <a:fillRef idx="3">
-            <a:schemeClr val="accent1"/>
-          </a:fillRef>
-          <a:effectRef idx="2">
-            <a:schemeClr val="accent1"/>
-          </a:effectRef>
-          <a:fontRef idx="minor">
-            <a:schemeClr val="lt1"/>
-          </a:fontRef>
-        </p:style>
-        <p:txBody>
-          <a:bodyPr rtlCol="0" anchor="ctr" lIns="0" rIns="0" tIns="0" bIns="0"/>
-          <a:lstStyle/>
-          <a:p>
-            <a:pPr algn="ctr"/>
-            <a:r>
-              <a:rPr sz="1300" b="1">
-                <a:solidFill>
-                  <a:srgbClr val="FFFFFF"/>
-                </a:solidFill>
-                <a:latin typeface="Calibri"/>
-              </a:rPr>
-              <a:t>4</a:t>
-            </a:r>
-          </a:p>
-        </p:txBody>
-      </p:sp>
-      <p:sp>
-        <p:nvSpPr>
-          <p:cNvPr id="16" name="TextBox 15"/>
-          <p:cNvSpPr txBox="1"/>
-          <p:nvPr/>
-        </p:nvSpPr>
-        <p:spPr>
-          <a:xfrm>
-            <a:off x="1143000" y="5175504"/>
-            <a:ext cx="5943600" cy="868680"/>
-          </a:xfrm>
-          <a:prstGeom prst="rect">
-            <a:avLst/>
-          </a:prstGeom>
-          <a:noFill/>
-        </p:spPr>
-        <p:txBody>
-          <a:bodyPr wrap="square" anchor="ctr" lIns="0" rIns="0" tIns="0" bIns="0"/>
-          <a:lstStyle/>
-          <a:p>
-            <a:pPr algn="l"/>
-            <a:r>
-              <a:rPr sz="1700" b="0" i="0">
-                <a:solidFill>
-                  <a:srgbClr val="202122"/>
-                </a:solidFill>
-                <a:latin typeface="Calibri"/>
-              </a:rPr>
-              <a:t>Swap roles with a new fault card.</a:t>
-            </a:r>
-          </a:p>
-        </p:txBody>
-      </p:sp>
-      <p:sp>
-        <p:nvSpPr>
-          <p:cNvPr id="17" name="Rounded Rectangle 16"/>
-          <p:cNvSpPr/>
-          <p:nvPr/>
-        </p:nvSpPr>
-        <p:spPr>
-          <a:xfrm>
-            <a:off x="7772400" y="1508760"/>
-            <a:ext cx="3867912" cy="4572000"/>
-          </a:xfrm>
-          <a:prstGeom prst="roundRect">
-            <a:avLst>
-              <a:gd name="adj" fmla="val 8000"/>
-            </a:avLst>
-          </a:prstGeom>
-          <a:solidFill>
-            <a:srgbClr val="EAF3FF"/>
-          </a:solidFill>
-          <a:ln>
-            <a:noFill/>
-          </a:ln>
-          <a:effectLst/>
-        </p:spPr>
-        <p:style>
-          <a:lnRef idx="1">
-            <a:schemeClr val="accent1"/>
-          </a:lnRef>
-          <a:fillRef idx="3">
-            <a:schemeClr val="accent1"/>
-          </a:fillRef>
-          <a:effectRef idx="2">
-            <a:schemeClr val="accent1"/>
-          </a:effectRef>
-          <a:fontRef idx="minor">
-            <a:schemeClr val="lt1"/>
-          </a:fontRef>
-        </p:style>
-        <p:txBody>
-          <a:bodyPr rtlCol="0" anchor="ctr"/>
-          <a:lstStyle/>
-          <a:p/>
-        </p:txBody>
-      </p:sp>
-      <p:sp>
-        <p:nvSpPr>
-          <p:cNvPr id="18" name="TextBox 17"/>
-          <p:cNvSpPr txBox="1"/>
-          <p:nvPr/>
-        </p:nvSpPr>
-        <p:spPr>
-          <a:xfrm>
-            <a:off x="8046720" y="1737360"/>
-            <a:ext cx="3291840" cy="365760"/>
-          </a:xfrm>
-          <a:prstGeom prst="rect">
-            <a:avLst/>
-          </a:prstGeom>
-          <a:noFill/>
-        </p:spPr>
-        <p:txBody>
-          <a:bodyPr wrap="square" anchor="t" lIns="0" rIns="0" tIns="0" bIns="0"/>
-          <a:lstStyle/>
-          <a:p>
-            <a:pPr algn="l"/>
-            <a:r>
-              <a:rPr sz="1300" b="1" i="0">
-                <a:solidFill>
-                  <a:srgbClr val="0645AD"/>
-                </a:solidFill>
-                <a:latin typeface="Calibri"/>
-              </a:rPr>
-              <a:t>SUCCESS CRITERIA</a:t>
-            </a:r>
-          </a:p>
-        </p:txBody>
-      </p:sp>
-      <p:sp>
-        <p:nvSpPr>
-          <p:cNvPr id="19" name="TextBox 18"/>
-          <p:cNvSpPr txBox="1"/>
-          <p:nvPr/>
-        </p:nvSpPr>
-        <p:spPr>
-          <a:xfrm>
-            <a:off x="8046720" y="2240280"/>
-            <a:ext cx="3337560" cy="3657600"/>
-          </a:xfrm>
-          <a:prstGeom prst="rect">
-            <a:avLst/>
-          </a:prstGeom>
-          <a:noFill/>
-        </p:spPr>
-        <p:txBody>
-          <a:bodyPr wrap="square" lIns="0" rIns="0" tIns="0" bIns="0">
-            <a:spAutoFit/>
-          </a:bodyPr>
-          <a:lstStyle/>
-          <a:p>
-            <a:pPr marL="274320" indent="-274320">
-              <a:spcAft>
-                <a:spcPts val="810"/>
-              </a:spcAft>
-              <a:buClr>
-                <a:srgbClr val="0645AD"/>
-              </a:buClr>
-              <a:buFont typeface="Arial"/>
-              <a:buChar char="•"/>
-            </a:pPr>
-            <a:r>
-              <a:rPr sz="1800" b="0">
-                <a:solidFill>
-                  <a:srgbClr val="202122"/>
-                </a:solidFill>
-                <a:latin typeface="Calibri"/>
-              </a:rPr>
-              <a:t>Method followed in order</a:t>
-            </a:r>
-          </a:p>
-          <a:p>
-            <a:pPr marL="274320" indent="-274320">
-              <a:spcAft>
-                <a:spcPts val="810"/>
-              </a:spcAft>
-              <a:buClr>
-                <a:srgbClr val="0645AD"/>
-              </a:buClr>
-              <a:buFont typeface="Arial"/>
-              <a:buChar char="•"/>
-            </a:pPr>
-            <a:r>
-              <a:rPr sz="1800" b="0">
-                <a:solidFill>
-                  <a:srgbClr val="202122"/>
-                </a:solidFill>
-                <a:latin typeface="Calibri"/>
-              </a:rPr>
-              <a:t>Ticket is complete and clear</a:t>
-            </a:r>
-          </a:p>
-          <a:p>
-            <a:pPr marL="274320" indent="-274320">
-              <a:spcAft>
-                <a:spcPts val="810"/>
-              </a:spcAft>
-              <a:buClr>
-                <a:srgbClr val="0645AD"/>
-              </a:buClr>
-              <a:buFont typeface="Arial"/>
-              <a:buChar char="•"/>
-            </a:pPr>
-            <a:r>
-              <a:rPr sz="1800" b="0">
-                <a:solidFill>
-                  <a:srgbClr val="202122"/>
-                </a:solidFill>
-                <a:latin typeface="Calibri"/>
-              </a:rPr>
-              <a:t>Preventive action suggested</a:t>
+                <a:latin typeface="Cambria"/>
+              </a:rPr>
+              <a:t>A first-line technician resets a password (routine). A corrupted database goes to second line, and a suspected hardware fault under warranty to the supplier (third line).</a:t>
             </a:r>
           </a:p>
         </p:txBody>
